--- a/slides/TP557_4_O_Paradigma_do_Machine_Learning.pptx
+++ b/slides/TP557_4_O_Paradigma_do_Machine_Learning.pptx
@@ -5,39 +5,44 @@
     <p:sldMasterId id="2147483648" r:id="rId1"/>
   </p:sldMasterIdLst>
   <p:notesMasterIdLst>
-    <p:notesMasterId r:id="rId29"/>
+    <p:notesMasterId r:id="rId34"/>
   </p:notesMasterIdLst>
   <p:handoutMasterIdLst>
-    <p:handoutMasterId r:id="rId30"/>
+    <p:handoutMasterId r:id="rId35"/>
   </p:handoutMasterIdLst>
   <p:sldIdLst>
     <p:sldId id="256" r:id="rId2"/>
     <p:sldId id="406" r:id="rId3"/>
     <p:sldId id="409" r:id="rId4"/>
-    <p:sldId id="410" r:id="rId5"/>
-    <p:sldId id="422" r:id="rId6"/>
-    <p:sldId id="423" r:id="rId7"/>
-    <p:sldId id="413" r:id="rId8"/>
-    <p:sldId id="431" r:id="rId9"/>
-    <p:sldId id="414" r:id="rId10"/>
-    <p:sldId id="412" r:id="rId11"/>
-    <p:sldId id="424" r:id="rId12"/>
-    <p:sldId id="415" r:id="rId13"/>
-    <p:sldId id="416" r:id="rId14"/>
-    <p:sldId id="426" r:id="rId15"/>
-    <p:sldId id="425" r:id="rId16"/>
-    <p:sldId id="417" r:id="rId17"/>
-    <p:sldId id="427" r:id="rId18"/>
-    <p:sldId id="428" r:id="rId19"/>
-    <p:sldId id="418" r:id="rId20"/>
-    <p:sldId id="420" r:id="rId21"/>
-    <p:sldId id="421" r:id="rId22"/>
-    <p:sldId id="430" r:id="rId23"/>
-    <p:sldId id="432" r:id="rId24"/>
-    <p:sldId id="405" r:id="rId25"/>
-    <p:sldId id="293" r:id="rId26"/>
-    <p:sldId id="306" r:id="rId27"/>
-    <p:sldId id="419" r:id="rId28"/>
+    <p:sldId id="433" r:id="rId5"/>
+    <p:sldId id="410" r:id="rId6"/>
+    <p:sldId id="422" r:id="rId7"/>
+    <p:sldId id="423" r:id="rId8"/>
+    <p:sldId id="413" r:id="rId9"/>
+    <p:sldId id="431" r:id="rId10"/>
+    <p:sldId id="414" r:id="rId11"/>
+    <p:sldId id="412" r:id="rId12"/>
+    <p:sldId id="434" r:id="rId13"/>
+    <p:sldId id="424" r:id="rId14"/>
+    <p:sldId id="415" r:id="rId15"/>
+    <p:sldId id="435" r:id="rId16"/>
+    <p:sldId id="436" r:id="rId17"/>
+    <p:sldId id="416" r:id="rId18"/>
+    <p:sldId id="426" r:id="rId19"/>
+    <p:sldId id="425" r:id="rId20"/>
+    <p:sldId id="417" r:id="rId21"/>
+    <p:sldId id="437" r:id="rId22"/>
+    <p:sldId id="427" r:id="rId23"/>
+    <p:sldId id="428" r:id="rId24"/>
+    <p:sldId id="418" r:id="rId25"/>
+    <p:sldId id="420" r:id="rId26"/>
+    <p:sldId id="421" r:id="rId27"/>
+    <p:sldId id="430" r:id="rId28"/>
+    <p:sldId id="432" r:id="rId29"/>
+    <p:sldId id="405" r:id="rId30"/>
+    <p:sldId id="293" r:id="rId31"/>
+    <p:sldId id="306" r:id="rId32"/>
+    <p:sldId id="419" r:id="rId33"/>
   </p:sldIdLst>
   <p:sldSz cx="12192000" cy="6858000"/>
   <p:notesSz cx="7315200" cy="9601200"/>
@@ -301,7 +306,7 @@
           <a:p>
             <a:fld id="{144F1436-6906-4D93-B7A2-786C327BFA14}" type="datetimeFigureOut">
               <a:rPr lang="nl-BE" smtClean="0"/>
-              <a:t>22/08/2023</a:t>
+              <a:t>26/03/2025</a:t>
             </a:fld>
             <a:endParaRPr lang="nl-BE"/>
           </a:p>
@@ -367,7 +372,7 @@
           <a:p>
             <a:fld id="{F7E56D9B-79AD-444A-AFED-DEC23408F8B4}" type="slidenum">
               <a:rPr lang="nl-BE" smtClean="0"/>
-              <a:t>‹nº›</a:t>
+              <a:t>‹#›</a:t>
             </a:fld>
             <a:endParaRPr lang="nl-BE"/>
           </a:p>
@@ -466,7 +471,7 @@
           <a:p>
             <a:fld id="{AA8CD09E-2914-4F47-B6C1-51B2C31814C9}" type="datetimeFigureOut">
               <a:rPr lang="pt-BR" smtClean="0"/>
-              <a:t>22/08/2023</a:t>
+              <a:t>26/03/2025</a:t>
             </a:fld>
             <a:endParaRPr lang="pt-BR"/>
           </a:p>
@@ -624,7 +629,7 @@
           <a:p>
             <a:fld id="{6FC8D850-966F-45A6-8DE7-15B891E7D40D}" type="slidenum">
               <a:rPr lang="pt-BR" smtClean="0"/>
-              <a:t>‹nº›</a:t>
+              <a:t>‹#›</a:t>
             </a:fld>
             <a:endParaRPr lang="pt-BR"/>
           </a:p>
@@ -885,7 +890,7 @@
           <a:p>
             <a:fld id="{6FC8D850-966F-45A6-8DE7-15B891E7D40D}" type="slidenum">
               <a:rPr lang="pt-BR" smtClean="0"/>
-              <a:t>15</a:t>
+              <a:t>17</a:t>
             </a:fld>
             <a:endParaRPr lang="pt-BR"/>
           </a:p>
@@ -894,7 +899,7 @@
     </p:spTree>
     <p:extLst>
       <p:ext uri="{BB962C8B-B14F-4D97-AF65-F5344CB8AC3E}">
-        <p14:creationId xmlns:p14="http://schemas.microsoft.com/office/powerpoint/2010/main" val="4069978893"/>
+        <p14:creationId xmlns:p14="http://schemas.microsoft.com/office/powerpoint/2010/main" val="1520028445"/>
       </p:ext>
     </p:extLst>
   </p:cSld>
@@ -948,42 +953,9 @@
           <a:bodyPr/>
           <a:lstStyle/>
           <a:p>
-            <a:pPr algn="l"/>
-            <a:r>
-              <a:rPr lang="pt-BR" b="0" i="0" dirty="0">
-                <a:solidFill>
-                  <a:srgbClr val="374151"/>
-                </a:solidFill>
-                <a:effectLst/>
-                <a:latin typeface="Söhne"/>
-              </a:rPr>
-              <a:t>Quando se resolve um problema desconhecido com base em experiências prévias, isso é chamado de "raciocínio indutivo". O raciocínio indutivo é um processo mental pelo qual chegamos a conclusões gerais a partir de observações específicas ou experiências passadas.</a:t>
-            </a:r>
-          </a:p>
-          <a:p>
-            <a:pPr algn="l"/>
-            <a:r>
-              <a:rPr lang="pt-BR" b="0" i="0" dirty="0">
-                <a:solidFill>
-                  <a:srgbClr val="374151"/>
-                </a:solidFill>
-                <a:effectLst/>
-                <a:latin typeface="Söhne"/>
-              </a:rPr>
-              <a:t>Em outras palavras, quando encontramos uma série de eventos ou situações semelhantes no passado e, com base nessas observações, inferimos que um padrão ou generalização é válido para situações futuras semelhantes, estamos usando o raciocínio indutivo. Essa forma de raciocínio é fundamental em nossa vida cotidiana e também desempenha um papel importante no método científico.</a:t>
-            </a:r>
-          </a:p>
-          <a:p>
-            <a:pPr algn="l"/>
-            <a:r>
-              <a:rPr lang="pt-BR" b="0" i="0" dirty="0">
-                <a:solidFill>
-                  <a:srgbClr val="374151"/>
-                </a:solidFill>
-                <a:effectLst/>
-                <a:latin typeface="Söhne"/>
-              </a:rPr>
-              <a:t>No entanto, é importante notar que o raciocínio indutivo não fornece garantias absolutas de que uma conclusão será sempre verdadeira. As generalizações feitas com base em raciocínio indutivo estão sujeitas a exceções, e é possível que as conclusões estejam incorretas em algumas situações. Apesar disso, o raciocínio indutivo é uma ferramenta valiosa para lidar com situações desconhecidas, permitindo-nos tomar decisões informadas com base em nossa experiência passada.</a:t>
+            <a:r>
+              <a:rPr lang="pt-BR" dirty="0"/>
+              <a:t>Mas além dos detalhes, é simplesmente adivinhar o relacionamento. Em seguida, ele mede o quão bom ou ruim é esse palpite. A terminologia frequentemente usada aqui é perda.</a:t>
             </a:r>
           </a:p>
         </p:txBody>
@@ -1005,7 +977,7 @@
           <a:p>
             <a:fld id="{6FC8D850-966F-45A6-8DE7-15B891E7D40D}" type="slidenum">
               <a:rPr lang="pt-BR" smtClean="0"/>
-              <a:t>16</a:t>
+              <a:t>18</a:t>
             </a:fld>
             <a:endParaRPr lang="pt-BR"/>
           </a:p>
@@ -1014,7 +986,7 @@
     </p:spTree>
     <p:extLst>
       <p:ext uri="{BB962C8B-B14F-4D97-AF65-F5344CB8AC3E}">
-        <p14:creationId xmlns:p14="http://schemas.microsoft.com/office/powerpoint/2010/main" val="3043654533"/>
+        <p14:creationId xmlns:p14="http://schemas.microsoft.com/office/powerpoint/2010/main" val="1477200284"/>
       </p:ext>
     </p:extLst>
   </p:cSld>
@@ -1068,42 +1040,9 @@
           <a:bodyPr/>
           <a:lstStyle/>
           <a:p>
-            <a:pPr algn="l"/>
-            <a:r>
-              <a:rPr lang="pt-BR" b="0" i="0" dirty="0">
-                <a:solidFill>
-                  <a:srgbClr val="374151"/>
-                </a:solidFill>
-                <a:effectLst/>
-                <a:latin typeface="Söhne"/>
-              </a:rPr>
-              <a:t>Quando se resolve um problema desconhecido com base em experiências prévias, isso é chamado de "raciocínio indutivo". O raciocínio indutivo é um processo mental pelo qual chegamos a conclusões gerais a partir de observações específicas ou experiências passadas.</a:t>
-            </a:r>
-          </a:p>
-          <a:p>
-            <a:pPr algn="l"/>
-            <a:r>
-              <a:rPr lang="pt-BR" b="0" i="0" dirty="0">
-                <a:solidFill>
-                  <a:srgbClr val="374151"/>
-                </a:solidFill>
-                <a:effectLst/>
-                <a:latin typeface="Söhne"/>
-              </a:rPr>
-              <a:t>Em outras palavras, quando encontramos uma série de eventos ou situações semelhantes no passado e, com base nessas observações, inferimos que um padrão ou generalização é válido para situações futuras semelhantes, estamos usando o raciocínio indutivo. Essa forma de raciocínio é fundamental em nossa vida cotidiana e também desempenha um papel importante no método científico.</a:t>
-            </a:r>
-          </a:p>
-          <a:p>
-            <a:pPr algn="l"/>
-            <a:r>
-              <a:rPr lang="pt-BR" b="0" i="0" dirty="0">
-                <a:solidFill>
-                  <a:srgbClr val="374151"/>
-                </a:solidFill>
-                <a:effectLst/>
-                <a:latin typeface="Söhne"/>
-              </a:rPr>
-              <a:t>No entanto, é importante notar que o raciocínio indutivo não fornece garantias absolutas de que uma conclusão será sempre verdadeira. As generalizações feitas com base em raciocínio indutivo estão sujeitas a exceções, e é possível que as conclusões estejam incorretas em algumas situações. Apesar disso, o raciocínio indutivo é uma ferramenta valiosa para lidar com situações desconhecidas, permitindo-nos tomar decisões informadas com base em nossa experiência passada.</a:t>
+            <a:r>
+              <a:rPr lang="pt-BR" dirty="0"/>
+              <a:t>Mas além dos detalhes, é simplesmente adivinhar o relacionamento. Em seguida, ele mede o quão bom ou ruim é esse palpite. A terminologia frequentemente usada aqui é perda.</a:t>
             </a:r>
           </a:p>
         </p:txBody>
@@ -1125,7 +1064,7 @@
           <a:p>
             <a:fld id="{6FC8D850-966F-45A6-8DE7-15B891E7D40D}" type="slidenum">
               <a:rPr lang="pt-BR" smtClean="0"/>
-              <a:t>17</a:t>
+              <a:t>19</a:t>
             </a:fld>
             <a:endParaRPr lang="pt-BR"/>
           </a:p>
@@ -1134,7 +1073,7 @@
     </p:spTree>
     <p:extLst>
       <p:ext uri="{BB962C8B-B14F-4D97-AF65-F5344CB8AC3E}">
-        <p14:creationId xmlns:p14="http://schemas.microsoft.com/office/powerpoint/2010/main" val="4215700863"/>
+        <p14:creationId xmlns:p14="http://schemas.microsoft.com/office/powerpoint/2010/main" val="4069978893"/>
       </p:ext>
     </p:extLst>
   </p:cSld>
@@ -1202,16 +1141,6 @@
           </a:p>
           <a:p>
             <a:pPr algn="l"/>
-            <a:endParaRPr lang="pt-BR" b="0" i="0" dirty="0">
-              <a:solidFill>
-                <a:srgbClr val="374151"/>
-              </a:solidFill>
-              <a:effectLst/>
-              <a:latin typeface="Söhne"/>
-            </a:endParaRPr>
-          </a:p>
-          <a:p>
-            <a:pPr algn="l"/>
             <a:r>
               <a:rPr lang="pt-BR" b="0" i="0" dirty="0">
                 <a:solidFill>
@@ -1222,16 +1151,6 @@
               </a:rPr>
               <a:t>Em outras palavras, quando encontramos uma série de eventos ou situações semelhantes no passado e, com base nessas observações, inferimos que um padrão ou generalização é válido para situações futuras semelhantes, estamos usando o raciocínio indutivo. Essa forma de raciocínio é fundamental em nossa vida cotidiana e também desempenha um papel importante no método científico.</a:t>
             </a:r>
-          </a:p>
-          <a:p>
-            <a:pPr algn="l"/>
-            <a:endParaRPr lang="pt-BR" b="0" i="0" dirty="0">
-              <a:solidFill>
-                <a:srgbClr val="374151"/>
-              </a:solidFill>
-              <a:effectLst/>
-              <a:latin typeface="Söhne"/>
-            </a:endParaRPr>
           </a:p>
           <a:p>
             <a:pPr algn="l"/>
@@ -1265,7 +1184,7 @@
           <a:p>
             <a:fld id="{6FC8D850-966F-45A6-8DE7-15B891E7D40D}" type="slidenum">
               <a:rPr lang="pt-BR" smtClean="0"/>
-              <a:t>18</a:t>
+              <a:t>20</a:t>
             </a:fld>
             <a:endParaRPr lang="pt-BR"/>
           </a:p>
@@ -1274,7 +1193,7 @@
     </p:spTree>
     <p:extLst>
       <p:ext uri="{BB962C8B-B14F-4D97-AF65-F5344CB8AC3E}">
-        <p14:creationId xmlns:p14="http://schemas.microsoft.com/office/powerpoint/2010/main" val="196127529"/>
+        <p14:creationId xmlns:p14="http://schemas.microsoft.com/office/powerpoint/2010/main" val="3043654533"/>
       </p:ext>
     </p:extLst>
   </p:cSld>
@@ -1289,7 +1208,13 @@
   <p:cSld>
     <p:spTree>
       <p:nvGrpSpPr>
-        <p:cNvPr id="1" name=""/>
+        <p:cNvPr id="1" name="">
+          <a:extLst>
+            <a:ext uri="{FF2B5EF4-FFF2-40B4-BE49-F238E27FC236}">
+              <a16:creationId xmlns:a16="http://schemas.microsoft.com/office/drawing/2014/main" id="{5487641C-C170-E5B3-BB64-52D45D996E2C}"/>
+            </a:ext>
+          </a:extLst>
+        </p:cNvPr>
         <p:cNvGrpSpPr/>
         <p:nvPr/>
       </p:nvGrpSpPr>
@@ -1303,7 +1228,13 @@
       </p:grpSpPr>
       <p:sp>
         <p:nvSpPr>
-          <p:cNvPr id="2" name="Espaço Reservado para Imagem de Slide 1"/>
+          <p:cNvPr id="2" name="Espaço Reservado para Imagem de Slide 1">
+            <a:extLst>
+              <a:ext uri="{FF2B5EF4-FFF2-40B4-BE49-F238E27FC236}">
+                <a16:creationId xmlns:a16="http://schemas.microsoft.com/office/drawing/2014/main" id="{B154C67F-67D7-0AB9-34FB-8F7C1F7F27C2}"/>
+              </a:ext>
+            </a:extLst>
+          </p:cNvPr>
           <p:cNvSpPr>
             <a:spLocks noGrp="1" noRot="1" noChangeAspect="1"/>
           </p:cNvSpPr>
@@ -1315,7 +1246,13 @@
       </p:sp>
       <p:sp>
         <p:nvSpPr>
-          <p:cNvPr id="3" name="Espaço Reservado para Anotações 2"/>
+          <p:cNvPr id="3" name="Espaço Reservado para Anotações 2">
+            <a:extLst>
+              <a:ext uri="{FF2B5EF4-FFF2-40B4-BE49-F238E27FC236}">
+                <a16:creationId xmlns:a16="http://schemas.microsoft.com/office/drawing/2014/main" id="{6E72D3C3-65E9-6ACC-6C7C-FD3CB612BCDC}"/>
+              </a:ext>
+            </a:extLst>
+          </p:cNvPr>
           <p:cNvSpPr>
             <a:spLocks noGrp="1"/>
           </p:cNvSpPr>
@@ -1342,16 +1279,6 @@
           </a:p>
           <a:p>
             <a:pPr algn="l"/>
-            <a:endParaRPr lang="pt-BR" b="0" i="0" dirty="0">
-              <a:solidFill>
-                <a:srgbClr val="374151"/>
-              </a:solidFill>
-              <a:effectLst/>
-              <a:latin typeface="Söhne"/>
-            </a:endParaRPr>
-          </a:p>
-          <a:p>
-            <a:pPr algn="l"/>
             <a:r>
               <a:rPr lang="pt-BR" b="0" i="0" dirty="0">
                 <a:solidFill>
@@ -1365,16 +1292,6 @@
           </a:p>
           <a:p>
             <a:pPr algn="l"/>
-            <a:endParaRPr lang="pt-BR" b="0" i="0" dirty="0">
-              <a:solidFill>
-                <a:srgbClr val="374151"/>
-              </a:solidFill>
-              <a:effectLst/>
-              <a:latin typeface="Söhne"/>
-            </a:endParaRPr>
-          </a:p>
-          <a:p>
-            <a:pPr algn="l"/>
             <a:r>
               <a:rPr lang="pt-BR" b="0" i="0" dirty="0">
                 <a:solidFill>
@@ -1390,7 +1307,13 @@
       </p:sp>
       <p:sp>
         <p:nvSpPr>
-          <p:cNvPr id="4" name="Espaço Reservado para Número de Slide 3"/>
+          <p:cNvPr id="4" name="Espaço Reservado para Número de Slide 3">
+            <a:extLst>
+              <a:ext uri="{FF2B5EF4-FFF2-40B4-BE49-F238E27FC236}">
+                <a16:creationId xmlns:a16="http://schemas.microsoft.com/office/drawing/2014/main" id="{D3E622FD-FB56-BB64-BF81-ABF00E33C62D}"/>
+              </a:ext>
+            </a:extLst>
+          </p:cNvPr>
           <p:cNvSpPr>
             <a:spLocks noGrp="1"/>
           </p:cNvSpPr>
@@ -1405,7 +1328,7 @@
           <a:p>
             <a:fld id="{6FC8D850-966F-45A6-8DE7-15B891E7D40D}" type="slidenum">
               <a:rPr lang="pt-BR" smtClean="0"/>
-              <a:t>19</a:t>
+              <a:t>21</a:t>
             </a:fld>
             <a:endParaRPr lang="pt-BR"/>
           </a:p>
@@ -1414,7 +1337,7 @@
     </p:spTree>
     <p:extLst>
       <p:ext uri="{BB962C8B-B14F-4D97-AF65-F5344CB8AC3E}">
-        <p14:creationId xmlns:p14="http://schemas.microsoft.com/office/powerpoint/2010/main" val="2932114005"/>
+        <p14:creationId xmlns:p14="http://schemas.microsoft.com/office/powerpoint/2010/main" val="249440051"/>
       </p:ext>
     </p:extLst>
   </p:cSld>
@@ -1477,18 +1400,8 @@
                 <a:effectLst/>
                 <a:latin typeface="Söhne"/>
               </a:rPr>
-              <a:t>No contexto de aprendizado de máquina, a generalização refere-se à capacidade de um modelo treinado em um conjunto de dados específico de realizar predições precisas e acuradas em dados que nunca foram vistos durante o processo de treinamento.</a:t>
-            </a:r>
-          </a:p>
-          <a:p>
-            <a:pPr algn="l"/>
-            <a:endParaRPr lang="pt-BR" b="0" i="0" dirty="0">
-              <a:solidFill>
-                <a:srgbClr val="374151"/>
-              </a:solidFill>
-              <a:effectLst/>
-              <a:latin typeface="Söhne"/>
-            </a:endParaRPr>
+              <a:t>Quando se resolve um problema desconhecido com base em experiências prévias, isso é chamado de "raciocínio indutivo". O raciocínio indutivo é um processo mental pelo qual chegamos a conclusões gerais a partir de observações específicas ou experiências passadas.</a:t>
+            </a:r>
           </a:p>
           <a:p>
             <a:pPr algn="l"/>
@@ -1500,18 +1413,8 @@
                 <a:effectLst/>
                 <a:latin typeface="Söhne"/>
               </a:rPr>
-              <a:t>Quando um modelo é treinado em um conjunto de dados, ele busca aprender padrões e regras que governam os relacionamentos entre as entradas e as saídas desse conjunto. A generalização ocorre quando o modelo consegue aplicar esse conhecimento aprendido para fazer predições em novos dados que não foram usados durante o treinamento. Em outras palavras, um modelo generalizado é capaz de "generalizar" o conhecimento adquirido com o conjunto de treinamento para realizar previsões precisas em situações desconhecidas.</a:t>
-            </a:r>
-          </a:p>
-          <a:p>
-            <a:pPr algn="l"/>
-            <a:endParaRPr lang="pt-BR" b="0" i="0" dirty="0">
-              <a:solidFill>
-                <a:srgbClr val="374151"/>
-              </a:solidFill>
-              <a:effectLst/>
-              <a:latin typeface="Söhne"/>
-            </a:endParaRPr>
+              <a:t>Em outras palavras, quando encontramos uma série de eventos ou situações semelhantes no passado e, com base nessas observações, inferimos que um padrão ou generalização é válido para situações futuras semelhantes, estamos usando o raciocínio indutivo. Essa forma de raciocínio é fundamental em nossa vida cotidiana e também desempenha um papel importante no método científico.</a:t>
+            </a:r>
           </a:p>
           <a:p>
             <a:pPr algn="l"/>
@@ -1523,91 +1426,8 @@
                 <a:effectLst/>
                 <a:latin typeface="Söhne"/>
               </a:rPr>
-              <a:t>A generalização é um aspecto crítico do aprendizado de máquina, pois o objetivo é que o modelo seja capaz de lidar efetivamente com dados do mundo real, que podem ser diferentes ou conter variações em relação ao conjunto de treinamento. Um modelo que generaliza bem evita problemas de </a:t>
-            </a:r>
-            <a:r>
-              <a:rPr lang="pt-BR" b="0" i="0" dirty="0" err="1">
-                <a:solidFill>
-                  <a:srgbClr val="374151"/>
-                </a:solidFill>
-                <a:effectLst/>
-                <a:latin typeface="Söhne"/>
-              </a:rPr>
-              <a:t>superajuste</a:t>
-            </a:r>
-            <a:r>
-              <a:rPr lang="pt-BR" b="0" i="0" dirty="0">
-                <a:solidFill>
-                  <a:srgbClr val="374151"/>
-                </a:solidFill>
-                <a:effectLst/>
-                <a:latin typeface="Söhne"/>
-              </a:rPr>
-              <a:t> (</a:t>
-            </a:r>
-            <a:r>
-              <a:rPr lang="pt-BR" b="0" i="0" dirty="0" err="1">
-                <a:solidFill>
-                  <a:srgbClr val="374151"/>
-                </a:solidFill>
-                <a:effectLst/>
-                <a:latin typeface="Söhne"/>
-              </a:rPr>
-              <a:t>overfitting</a:t>
-            </a:r>
-            <a:r>
-              <a:rPr lang="pt-BR" b="0" i="0" dirty="0">
-                <a:solidFill>
-                  <a:srgbClr val="374151"/>
-                </a:solidFill>
-                <a:effectLst/>
-                <a:latin typeface="Söhne"/>
-              </a:rPr>
-              <a:t>), onde ele se torna muito específico para o conjunto de treinamento e tem um desempenho inferior em novos dados, ou problemas de </a:t>
-            </a:r>
-            <a:r>
-              <a:rPr lang="pt-BR" b="0" i="0" dirty="0" err="1">
-                <a:solidFill>
-                  <a:srgbClr val="374151"/>
-                </a:solidFill>
-                <a:effectLst/>
-                <a:latin typeface="Söhne"/>
-              </a:rPr>
-              <a:t>subajuste</a:t>
-            </a:r>
-            <a:r>
-              <a:rPr lang="pt-BR" b="0" i="0" dirty="0">
-                <a:solidFill>
-                  <a:srgbClr val="374151"/>
-                </a:solidFill>
-                <a:effectLst/>
-                <a:latin typeface="Söhne"/>
-              </a:rPr>
-              <a:t> (</a:t>
-            </a:r>
-            <a:r>
-              <a:rPr lang="pt-BR" b="0" i="0" dirty="0" err="1">
-                <a:solidFill>
-                  <a:srgbClr val="374151"/>
-                </a:solidFill>
-                <a:effectLst/>
-                <a:latin typeface="Söhne"/>
-              </a:rPr>
-              <a:t>underfitting</a:t>
-            </a:r>
-            <a:r>
-              <a:rPr lang="pt-BR" b="0" i="0" dirty="0">
-                <a:solidFill>
-                  <a:srgbClr val="374151"/>
-                </a:solidFill>
-                <a:effectLst/>
-                <a:latin typeface="Söhne"/>
-              </a:rPr>
-              <a:t>), onde ele não captura adequadamente os padrões do conjunto de treinamento e também não tem um desempenho satisfatório em novos dados.</a:t>
-            </a:r>
-          </a:p>
-          <a:p>
-            <a:endParaRPr lang="pt-BR" dirty="0"/>
+              <a:t>No entanto, é importante notar que o raciocínio indutivo não fornece garantias absolutas de que uma conclusão será sempre verdadeira. As generalizações feitas com base em raciocínio indutivo estão sujeitas a exceções, e é possível que as conclusões estejam incorretas em algumas situações. Apesar disso, o raciocínio indutivo é uma ferramenta valiosa para lidar com situações desconhecidas, permitindo-nos tomar decisões informadas com base em nossa experiência passada.</a:t>
+            </a:r>
           </a:p>
         </p:txBody>
       </p:sp>
@@ -1628,7 +1448,7 @@
           <a:p>
             <a:fld id="{6FC8D850-966F-45A6-8DE7-15B891E7D40D}" type="slidenum">
               <a:rPr lang="pt-BR" smtClean="0"/>
-              <a:t>21</a:t>
+              <a:t>22</a:t>
             </a:fld>
             <a:endParaRPr lang="pt-BR"/>
           </a:p>
@@ -1637,7 +1457,7 @@
     </p:spTree>
     <p:extLst>
       <p:ext uri="{BB962C8B-B14F-4D97-AF65-F5344CB8AC3E}">
-        <p14:creationId xmlns:p14="http://schemas.microsoft.com/office/powerpoint/2010/main" val="1829632381"/>
+        <p14:creationId xmlns:p14="http://schemas.microsoft.com/office/powerpoint/2010/main" val="4215700863"/>
       </p:ext>
     </p:extLst>
   </p:cSld>
@@ -1700,7 +1520,7 @@
                 <a:effectLst/>
                 <a:latin typeface="Söhne"/>
               </a:rPr>
-              <a:t>No contexto de aprendizado de máquina, a generalização refere-se à capacidade de um modelo treinado em um conjunto de dados específico de realizar predições precisas e acuradas em dados que nunca foram vistos durante o processo de treinamento.</a:t>
+              <a:t>Quando se resolve um problema desconhecido com base em experiências prévias, isso é chamado de "raciocínio indutivo". O raciocínio indutivo é um processo mental pelo qual chegamos a conclusões gerais a partir de observações específicas ou experiências passadas.</a:t>
             </a:r>
           </a:p>
           <a:p>
@@ -1723,7 +1543,7 @@
                 <a:effectLst/>
                 <a:latin typeface="Söhne"/>
               </a:rPr>
-              <a:t>Quando um modelo é treinado em um conjunto de dados, ele busca aprender padrões e regras que governam os relacionamentos entre as entradas e as saídas desse conjunto. A generalização ocorre quando o modelo consegue aplicar esse conhecimento aprendido para fazer predições em novos dados que não foram usados durante o treinamento. Em outras palavras, um modelo generalizado é capaz de "generalizar" o conhecimento adquirido com o conjunto de treinamento para realizar previsões precisas em situações desconhecidas.</a:t>
+              <a:t>Em outras palavras, quando encontramos uma série de eventos ou situações semelhantes no passado e, com base nessas observações, inferimos que um padrão ou generalização é válido para situações futuras semelhantes, estamos usando o raciocínio indutivo. Essa forma de raciocínio é fundamental em nossa vida cotidiana e também desempenha um papel importante no método científico.</a:t>
             </a:r>
           </a:p>
           <a:p>
@@ -1746,91 +1566,8 @@
                 <a:effectLst/>
                 <a:latin typeface="Söhne"/>
               </a:rPr>
-              <a:t>A generalização é um aspecto crítico do aprendizado de máquina, pois o objetivo é que o modelo seja capaz de lidar efetivamente com dados do mundo real, que podem ser diferentes ou conter variações em relação ao conjunto de treinamento. Um modelo que generaliza bem evita problemas de </a:t>
-            </a:r>
-            <a:r>
-              <a:rPr lang="pt-BR" b="0" i="0" dirty="0" err="1">
-                <a:solidFill>
-                  <a:srgbClr val="374151"/>
-                </a:solidFill>
-                <a:effectLst/>
-                <a:latin typeface="Söhne"/>
-              </a:rPr>
-              <a:t>superajuste</a:t>
-            </a:r>
-            <a:r>
-              <a:rPr lang="pt-BR" b="0" i="0" dirty="0">
-                <a:solidFill>
-                  <a:srgbClr val="374151"/>
-                </a:solidFill>
-                <a:effectLst/>
-                <a:latin typeface="Söhne"/>
-              </a:rPr>
-              <a:t> (</a:t>
-            </a:r>
-            <a:r>
-              <a:rPr lang="pt-BR" b="0" i="0" dirty="0" err="1">
-                <a:solidFill>
-                  <a:srgbClr val="374151"/>
-                </a:solidFill>
-                <a:effectLst/>
-                <a:latin typeface="Söhne"/>
-              </a:rPr>
-              <a:t>overfitting</a:t>
-            </a:r>
-            <a:r>
-              <a:rPr lang="pt-BR" b="0" i="0" dirty="0">
-                <a:solidFill>
-                  <a:srgbClr val="374151"/>
-                </a:solidFill>
-                <a:effectLst/>
-                <a:latin typeface="Söhne"/>
-              </a:rPr>
-              <a:t>), onde ele se torna muito específico para o conjunto de treinamento e tem um desempenho inferior em novos dados, ou problemas de </a:t>
-            </a:r>
-            <a:r>
-              <a:rPr lang="pt-BR" b="0" i="0" dirty="0" err="1">
-                <a:solidFill>
-                  <a:srgbClr val="374151"/>
-                </a:solidFill>
-                <a:effectLst/>
-                <a:latin typeface="Söhne"/>
-              </a:rPr>
-              <a:t>subajuste</a:t>
-            </a:r>
-            <a:r>
-              <a:rPr lang="pt-BR" b="0" i="0" dirty="0">
-                <a:solidFill>
-                  <a:srgbClr val="374151"/>
-                </a:solidFill>
-                <a:effectLst/>
-                <a:latin typeface="Söhne"/>
-              </a:rPr>
-              <a:t> (</a:t>
-            </a:r>
-            <a:r>
-              <a:rPr lang="pt-BR" b="0" i="0" dirty="0" err="1">
-                <a:solidFill>
-                  <a:srgbClr val="374151"/>
-                </a:solidFill>
-                <a:effectLst/>
-                <a:latin typeface="Söhne"/>
-              </a:rPr>
-              <a:t>underfitting</a:t>
-            </a:r>
-            <a:r>
-              <a:rPr lang="pt-BR" b="0" i="0" dirty="0">
-                <a:solidFill>
-                  <a:srgbClr val="374151"/>
-                </a:solidFill>
-                <a:effectLst/>
-                <a:latin typeface="Söhne"/>
-              </a:rPr>
-              <a:t>), onde ele não captura adequadamente os padrões do conjunto de treinamento e também não tem um desempenho satisfatório em novos dados.</a:t>
-            </a:r>
-          </a:p>
-          <a:p>
-            <a:endParaRPr lang="pt-BR" dirty="0"/>
+              <a:t>No entanto, é importante notar que o raciocínio indutivo não fornece garantias absolutas de que uma conclusão será sempre verdadeira. As generalizações feitas com base em raciocínio indutivo estão sujeitas a exceções, e é possível que as conclusões estejam incorretas em algumas situações. Apesar disso, o raciocínio indutivo é uma ferramenta valiosa para lidar com situações desconhecidas, permitindo-nos tomar decisões informadas com base em nossa experiência passada.</a:t>
+            </a:r>
           </a:p>
         </p:txBody>
       </p:sp>
@@ -1851,7 +1588,7 @@
           <a:p>
             <a:fld id="{6FC8D850-966F-45A6-8DE7-15B891E7D40D}" type="slidenum">
               <a:rPr lang="pt-BR" smtClean="0"/>
-              <a:t>22</a:t>
+              <a:t>23</a:t>
             </a:fld>
             <a:endParaRPr lang="pt-BR"/>
           </a:p>
@@ -1860,7 +1597,7 @@
     </p:spTree>
     <p:extLst>
       <p:ext uri="{BB962C8B-B14F-4D97-AF65-F5344CB8AC3E}">
-        <p14:creationId xmlns:p14="http://schemas.microsoft.com/office/powerpoint/2010/main" val="1728993040"/>
+        <p14:creationId xmlns:p14="http://schemas.microsoft.com/office/powerpoint/2010/main" val="196127529"/>
       </p:ext>
     </p:extLst>
   </p:cSld>
@@ -1923,7 +1660,7 @@
                 <a:effectLst/>
                 <a:latin typeface="Söhne"/>
               </a:rPr>
-              <a:t>No contexto de aprendizado de máquina, a generalização refere-se à capacidade de um modelo treinado em um conjunto de dados específico de realizar predições precisas e acuradas em dados que nunca foram vistos durante o processo de treinamento.</a:t>
+              <a:t>Quando se resolve um problema desconhecido com base em experiências prévias, isso é chamado de "raciocínio indutivo". O raciocínio indutivo é um processo mental pelo qual chegamos a conclusões gerais a partir de observações específicas ou experiências passadas.</a:t>
             </a:r>
           </a:p>
           <a:p>
@@ -1946,7 +1683,7 @@
                 <a:effectLst/>
                 <a:latin typeface="Söhne"/>
               </a:rPr>
-              <a:t>Quando um modelo é treinado em um conjunto de dados, ele busca aprender padrões e regras que governam os relacionamentos entre as entradas e as saídas desse conjunto. A generalização ocorre quando o modelo consegue aplicar esse conhecimento aprendido para fazer predições em novos dados que não foram usados durante o treinamento. Em outras palavras, um modelo generalizado é capaz de "generalizar" o conhecimento adquirido com o conjunto de treinamento para realizar previsões precisas em situações desconhecidas.</a:t>
+              <a:t>Em outras palavras, quando encontramos uma série de eventos ou situações semelhantes no passado e, com base nessas observações, inferimos que um padrão ou generalização é válido para situações futuras semelhantes, estamos usando o raciocínio indutivo. Essa forma de raciocínio é fundamental em nossa vida cotidiana e também desempenha um papel importante no método científico.</a:t>
             </a:r>
           </a:p>
           <a:p>
@@ -1969,91 +1706,8 @@
                 <a:effectLst/>
                 <a:latin typeface="Söhne"/>
               </a:rPr>
-              <a:t>A generalização é um aspecto crítico do aprendizado de máquina, pois o objetivo é que o modelo seja capaz de lidar efetivamente com dados do mundo real, que podem ser diferentes ou conter variações em relação ao conjunto de treinamento. Um modelo que generaliza bem evita problemas de </a:t>
-            </a:r>
-            <a:r>
-              <a:rPr lang="pt-BR" b="0" i="0" dirty="0" err="1">
-                <a:solidFill>
-                  <a:srgbClr val="374151"/>
-                </a:solidFill>
-                <a:effectLst/>
-                <a:latin typeface="Söhne"/>
-              </a:rPr>
-              <a:t>superajuste</a:t>
-            </a:r>
-            <a:r>
-              <a:rPr lang="pt-BR" b="0" i="0" dirty="0">
-                <a:solidFill>
-                  <a:srgbClr val="374151"/>
-                </a:solidFill>
-                <a:effectLst/>
-                <a:latin typeface="Söhne"/>
-              </a:rPr>
-              <a:t> (</a:t>
-            </a:r>
-            <a:r>
-              <a:rPr lang="pt-BR" b="0" i="0" dirty="0" err="1">
-                <a:solidFill>
-                  <a:srgbClr val="374151"/>
-                </a:solidFill>
-                <a:effectLst/>
-                <a:latin typeface="Söhne"/>
-              </a:rPr>
-              <a:t>overfitting</a:t>
-            </a:r>
-            <a:r>
-              <a:rPr lang="pt-BR" b="0" i="0" dirty="0">
-                <a:solidFill>
-                  <a:srgbClr val="374151"/>
-                </a:solidFill>
-                <a:effectLst/>
-                <a:latin typeface="Söhne"/>
-              </a:rPr>
-              <a:t>), onde ele se torna muito específico para o conjunto de treinamento e tem um desempenho inferior em novos dados, ou problemas de </a:t>
-            </a:r>
-            <a:r>
-              <a:rPr lang="pt-BR" b="0" i="0" dirty="0" err="1">
-                <a:solidFill>
-                  <a:srgbClr val="374151"/>
-                </a:solidFill>
-                <a:effectLst/>
-                <a:latin typeface="Söhne"/>
-              </a:rPr>
-              <a:t>subajuste</a:t>
-            </a:r>
-            <a:r>
-              <a:rPr lang="pt-BR" b="0" i="0" dirty="0">
-                <a:solidFill>
-                  <a:srgbClr val="374151"/>
-                </a:solidFill>
-                <a:effectLst/>
-                <a:latin typeface="Söhne"/>
-              </a:rPr>
-              <a:t> (</a:t>
-            </a:r>
-            <a:r>
-              <a:rPr lang="pt-BR" b="0" i="0" dirty="0" err="1">
-                <a:solidFill>
-                  <a:srgbClr val="374151"/>
-                </a:solidFill>
-                <a:effectLst/>
-                <a:latin typeface="Söhne"/>
-              </a:rPr>
-              <a:t>underfitting</a:t>
-            </a:r>
-            <a:r>
-              <a:rPr lang="pt-BR" b="0" i="0" dirty="0">
-                <a:solidFill>
-                  <a:srgbClr val="374151"/>
-                </a:solidFill>
-                <a:effectLst/>
-                <a:latin typeface="Söhne"/>
-              </a:rPr>
-              <a:t>), onde ele não captura adequadamente os padrões do conjunto de treinamento e também não tem um desempenho satisfatório em novos dados.</a:t>
-            </a:r>
-          </a:p>
-          <a:p>
-            <a:endParaRPr lang="pt-BR" dirty="0"/>
+              <a:t>No entanto, é importante notar que o raciocínio indutivo não fornece garantias absolutas de que uma conclusão será sempre verdadeira. As generalizações feitas com base em raciocínio indutivo estão sujeitas a exceções, e é possível que as conclusões estejam incorretas em algumas situações. Apesar disso, o raciocínio indutivo é uma ferramenta valiosa para lidar com situações desconhecidas, permitindo-nos tomar decisões informadas com base em nossa experiência passada.</a:t>
+            </a:r>
           </a:p>
         </p:txBody>
       </p:sp>
@@ -2074,7 +1728,7 @@
           <a:p>
             <a:fld id="{6FC8D850-966F-45A6-8DE7-15B891E7D40D}" type="slidenum">
               <a:rPr lang="pt-BR" smtClean="0"/>
-              <a:t>23</a:t>
+              <a:t>24</a:t>
             </a:fld>
             <a:endParaRPr lang="pt-BR"/>
           </a:p>
@@ -2083,7 +1737,453 @@
     </p:spTree>
     <p:extLst>
       <p:ext uri="{BB962C8B-B14F-4D97-AF65-F5344CB8AC3E}">
-        <p14:creationId xmlns:p14="http://schemas.microsoft.com/office/powerpoint/2010/main" val="2643679924"/>
+        <p14:creationId xmlns:p14="http://schemas.microsoft.com/office/powerpoint/2010/main" val="2932114005"/>
+      </p:ext>
+    </p:extLst>
+  </p:cSld>
+  <p:clrMapOvr>
+    <a:masterClrMapping/>
+  </p:clrMapOvr>
+</p:notes>
+</file>
+
+<file path=ppt/notesSlides/notesSlide18.xml><?xml version="1.0" encoding="utf-8"?>
+<p:notes xmlns:a="http://schemas.openxmlformats.org/drawingml/2006/main" xmlns:r="http://schemas.openxmlformats.org/officeDocument/2006/relationships" xmlns:p="http://schemas.openxmlformats.org/presentationml/2006/main">
+  <p:cSld>
+    <p:spTree>
+      <p:nvGrpSpPr>
+        <p:cNvPr id="1" name=""/>
+        <p:cNvGrpSpPr/>
+        <p:nvPr/>
+      </p:nvGrpSpPr>
+      <p:grpSpPr>
+        <a:xfrm>
+          <a:off x="0" y="0"/>
+          <a:ext cx="0" cy="0"/>
+          <a:chOff x="0" y="0"/>
+          <a:chExt cx="0" cy="0"/>
+        </a:xfrm>
+      </p:grpSpPr>
+      <p:sp>
+        <p:nvSpPr>
+          <p:cNvPr id="2" name="Espaço Reservado para Imagem de Slide 1"/>
+          <p:cNvSpPr>
+            <a:spLocks noGrp="1" noRot="1" noChangeAspect="1"/>
+          </p:cNvSpPr>
+          <p:nvPr>
+            <p:ph type="sldImg"/>
+          </p:nvPr>
+        </p:nvSpPr>
+        <p:spPr/>
+      </p:sp>
+      <p:sp>
+        <p:nvSpPr>
+          <p:cNvPr id="3" name="Espaço Reservado para Anotações 2"/>
+          <p:cNvSpPr>
+            <a:spLocks noGrp="1"/>
+          </p:cNvSpPr>
+          <p:nvPr>
+            <p:ph type="body" idx="1"/>
+          </p:nvPr>
+        </p:nvSpPr>
+        <p:spPr/>
+        <p:txBody>
+          <a:bodyPr/>
+          <a:lstStyle/>
+          <a:p>
+            <a:pPr algn="l"/>
+            <a:r>
+              <a:rPr lang="pt-BR" b="0" i="0" dirty="0">
+                <a:solidFill>
+                  <a:srgbClr val="374151"/>
+                </a:solidFill>
+                <a:effectLst/>
+                <a:latin typeface="Söhne"/>
+              </a:rPr>
+              <a:t>No contexto de aprendizado de máquina, a generalização refere-se à capacidade de um modelo treinado em um conjunto de dados específico de realizar predições precisas e acuradas em dados que nunca foram vistos durante o processo de treinamento.</a:t>
+            </a:r>
+          </a:p>
+          <a:p>
+            <a:pPr algn="l"/>
+            <a:endParaRPr lang="pt-BR" b="0" i="0" dirty="0">
+              <a:solidFill>
+                <a:srgbClr val="374151"/>
+              </a:solidFill>
+              <a:effectLst/>
+              <a:latin typeface="Söhne"/>
+            </a:endParaRPr>
+          </a:p>
+          <a:p>
+            <a:pPr algn="l"/>
+            <a:r>
+              <a:rPr lang="pt-BR" b="0" i="0" dirty="0">
+                <a:solidFill>
+                  <a:srgbClr val="374151"/>
+                </a:solidFill>
+                <a:effectLst/>
+                <a:latin typeface="Söhne"/>
+              </a:rPr>
+              <a:t>Quando um modelo é treinado em um conjunto de dados, ele busca aprender padrões e regras que governam os relacionamentos entre as entradas e as saídas desse conjunto. A generalização ocorre quando o modelo consegue aplicar esse conhecimento aprendido para fazer predições em novos dados que não foram usados durante o treinamento. Em outras palavras, um modelo generalizado é capaz de "generalizar" o conhecimento adquirido com o conjunto de treinamento para realizar previsões precisas em situações desconhecidas.</a:t>
+            </a:r>
+          </a:p>
+          <a:p>
+            <a:pPr algn="l"/>
+            <a:endParaRPr lang="pt-BR" b="0" i="0" dirty="0">
+              <a:solidFill>
+                <a:srgbClr val="374151"/>
+              </a:solidFill>
+              <a:effectLst/>
+              <a:latin typeface="Söhne"/>
+            </a:endParaRPr>
+          </a:p>
+          <a:p>
+            <a:pPr algn="l"/>
+            <a:r>
+              <a:rPr lang="pt-BR" b="0" i="0" dirty="0">
+                <a:solidFill>
+                  <a:srgbClr val="374151"/>
+                </a:solidFill>
+                <a:effectLst/>
+                <a:latin typeface="Söhne"/>
+              </a:rPr>
+              <a:t>A generalização é um aspecto crítico do aprendizado de máquina, pois o objetivo é que o modelo seja capaz de lidar efetivamente com dados do mundo real, que podem ser diferentes ou conter variações em relação ao conjunto de treinamento. Um modelo que generaliza bem evita problemas de </a:t>
+            </a:r>
+            <a:r>
+              <a:rPr lang="pt-BR" b="0" i="0" dirty="0" err="1">
+                <a:solidFill>
+                  <a:srgbClr val="374151"/>
+                </a:solidFill>
+                <a:effectLst/>
+                <a:latin typeface="Söhne"/>
+              </a:rPr>
+              <a:t>superajuste</a:t>
+            </a:r>
+            <a:r>
+              <a:rPr lang="pt-BR" b="0" i="0" dirty="0">
+                <a:solidFill>
+                  <a:srgbClr val="374151"/>
+                </a:solidFill>
+                <a:effectLst/>
+                <a:latin typeface="Söhne"/>
+              </a:rPr>
+              <a:t> (</a:t>
+            </a:r>
+            <a:r>
+              <a:rPr lang="pt-BR" b="0" i="0" dirty="0" err="1">
+                <a:solidFill>
+                  <a:srgbClr val="374151"/>
+                </a:solidFill>
+                <a:effectLst/>
+                <a:latin typeface="Söhne"/>
+              </a:rPr>
+              <a:t>overfitting</a:t>
+            </a:r>
+            <a:r>
+              <a:rPr lang="pt-BR" b="0" i="0" dirty="0">
+                <a:solidFill>
+                  <a:srgbClr val="374151"/>
+                </a:solidFill>
+                <a:effectLst/>
+                <a:latin typeface="Söhne"/>
+              </a:rPr>
+              <a:t>), onde ele se torna muito específico para o conjunto de treinamento e tem um desempenho inferior em novos dados, ou problemas de </a:t>
+            </a:r>
+            <a:r>
+              <a:rPr lang="pt-BR" b="0" i="0" dirty="0" err="1">
+                <a:solidFill>
+                  <a:srgbClr val="374151"/>
+                </a:solidFill>
+                <a:effectLst/>
+                <a:latin typeface="Söhne"/>
+              </a:rPr>
+              <a:t>subajuste</a:t>
+            </a:r>
+            <a:r>
+              <a:rPr lang="pt-BR" b="0" i="0" dirty="0">
+                <a:solidFill>
+                  <a:srgbClr val="374151"/>
+                </a:solidFill>
+                <a:effectLst/>
+                <a:latin typeface="Söhne"/>
+              </a:rPr>
+              <a:t> (</a:t>
+            </a:r>
+            <a:r>
+              <a:rPr lang="pt-BR" b="0" i="0" dirty="0" err="1">
+                <a:solidFill>
+                  <a:srgbClr val="374151"/>
+                </a:solidFill>
+                <a:effectLst/>
+                <a:latin typeface="Söhne"/>
+              </a:rPr>
+              <a:t>underfitting</a:t>
+            </a:r>
+            <a:r>
+              <a:rPr lang="pt-BR" b="0" i="0" dirty="0">
+                <a:solidFill>
+                  <a:srgbClr val="374151"/>
+                </a:solidFill>
+                <a:effectLst/>
+                <a:latin typeface="Söhne"/>
+              </a:rPr>
+              <a:t>), onde ele não captura adequadamente os padrões do conjunto de treinamento e também não tem um desempenho satisfatório em novos dados.</a:t>
+            </a:r>
+          </a:p>
+          <a:p>
+            <a:endParaRPr lang="pt-BR" dirty="0"/>
+          </a:p>
+        </p:txBody>
+      </p:sp>
+      <p:sp>
+        <p:nvSpPr>
+          <p:cNvPr id="4" name="Espaço Reservado para Número de Slide 3"/>
+          <p:cNvSpPr>
+            <a:spLocks noGrp="1"/>
+          </p:cNvSpPr>
+          <p:nvPr>
+            <p:ph type="sldNum" sz="quarter" idx="5"/>
+          </p:nvPr>
+        </p:nvSpPr>
+        <p:spPr/>
+        <p:txBody>
+          <a:bodyPr/>
+          <a:lstStyle/>
+          <a:p>
+            <a:fld id="{6FC8D850-966F-45A6-8DE7-15B891E7D40D}" type="slidenum">
+              <a:rPr lang="pt-BR" smtClean="0"/>
+              <a:t>26</a:t>
+            </a:fld>
+            <a:endParaRPr lang="pt-BR"/>
+          </a:p>
+        </p:txBody>
+      </p:sp>
+    </p:spTree>
+    <p:extLst>
+      <p:ext uri="{BB962C8B-B14F-4D97-AF65-F5344CB8AC3E}">
+        <p14:creationId xmlns:p14="http://schemas.microsoft.com/office/powerpoint/2010/main" val="1829632381"/>
+      </p:ext>
+    </p:extLst>
+  </p:cSld>
+  <p:clrMapOvr>
+    <a:masterClrMapping/>
+  </p:clrMapOvr>
+</p:notes>
+</file>
+
+<file path=ppt/notesSlides/notesSlide19.xml><?xml version="1.0" encoding="utf-8"?>
+<p:notes xmlns:a="http://schemas.openxmlformats.org/drawingml/2006/main" xmlns:r="http://schemas.openxmlformats.org/officeDocument/2006/relationships" xmlns:p="http://schemas.openxmlformats.org/presentationml/2006/main">
+  <p:cSld>
+    <p:spTree>
+      <p:nvGrpSpPr>
+        <p:cNvPr id="1" name=""/>
+        <p:cNvGrpSpPr/>
+        <p:nvPr/>
+      </p:nvGrpSpPr>
+      <p:grpSpPr>
+        <a:xfrm>
+          <a:off x="0" y="0"/>
+          <a:ext cx="0" cy="0"/>
+          <a:chOff x="0" y="0"/>
+          <a:chExt cx="0" cy="0"/>
+        </a:xfrm>
+      </p:grpSpPr>
+      <p:sp>
+        <p:nvSpPr>
+          <p:cNvPr id="2" name="Espaço Reservado para Imagem de Slide 1"/>
+          <p:cNvSpPr>
+            <a:spLocks noGrp="1" noRot="1" noChangeAspect="1"/>
+          </p:cNvSpPr>
+          <p:nvPr>
+            <p:ph type="sldImg"/>
+          </p:nvPr>
+        </p:nvSpPr>
+        <p:spPr/>
+      </p:sp>
+      <p:sp>
+        <p:nvSpPr>
+          <p:cNvPr id="3" name="Espaço Reservado para Anotações 2"/>
+          <p:cNvSpPr>
+            <a:spLocks noGrp="1"/>
+          </p:cNvSpPr>
+          <p:nvPr>
+            <p:ph type="body" idx="1"/>
+          </p:nvPr>
+        </p:nvSpPr>
+        <p:spPr/>
+        <p:txBody>
+          <a:bodyPr/>
+          <a:lstStyle/>
+          <a:p>
+            <a:pPr algn="l"/>
+            <a:r>
+              <a:rPr lang="pt-BR" b="0" i="0" dirty="0">
+                <a:solidFill>
+                  <a:srgbClr val="374151"/>
+                </a:solidFill>
+                <a:effectLst/>
+                <a:latin typeface="Söhne"/>
+              </a:rPr>
+              <a:t>No contexto de aprendizado de máquina, a generalização refere-se à capacidade de um modelo treinado em um conjunto de dados específico de realizar predições precisas e acuradas em dados que nunca foram vistos durante o processo de treinamento.</a:t>
+            </a:r>
+          </a:p>
+          <a:p>
+            <a:pPr algn="l"/>
+            <a:endParaRPr lang="pt-BR" b="0" i="0" dirty="0">
+              <a:solidFill>
+                <a:srgbClr val="374151"/>
+              </a:solidFill>
+              <a:effectLst/>
+              <a:latin typeface="Söhne"/>
+            </a:endParaRPr>
+          </a:p>
+          <a:p>
+            <a:pPr algn="l"/>
+            <a:r>
+              <a:rPr lang="pt-BR" b="0" i="0" dirty="0">
+                <a:solidFill>
+                  <a:srgbClr val="374151"/>
+                </a:solidFill>
+                <a:effectLst/>
+                <a:latin typeface="Söhne"/>
+              </a:rPr>
+              <a:t>Quando um modelo é treinado em um conjunto de dados, ele busca aprender padrões e regras que governam os relacionamentos entre as entradas e as saídas desse conjunto. A generalização ocorre quando o modelo consegue aplicar esse conhecimento aprendido para fazer predições em novos dados que não foram usados durante o treinamento. Em outras palavras, um modelo generalizado é capaz de "generalizar" o conhecimento adquirido com o conjunto de treinamento para realizar previsões precisas em situações desconhecidas.</a:t>
+            </a:r>
+          </a:p>
+          <a:p>
+            <a:pPr algn="l"/>
+            <a:endParaRPr lang="pt-BR" b="0" i="0" dirty="0">
+              <a:solidFill>
+                <a:srgbClr val="374151"/>
+              </a:solidFill>
+              <a:effectLst/>
+              <a:latin typeface="Söhne"/>
+            </a:endParaRPr>
+          </a:p>
+          <a:p>
+            <a:pPr algn="l"/>
+            <a:r>
+              <a:rPr lang="pt-BR" b="0" i="0" dirty="0">
+                <a:solidFill>
+                  <a:srgbClr val="374151"/>
+                </a:solidFill>
+                <a:effectLst/>
+                <a:latin typeface="Söhne"/>
+              </a:rPr>
+              <a:t>A generalização é um aspecto crítico do aprendizado de máquina, pois o objetivo é que o modelo seja capaz de lidar efetivamente com dados do mundo real, que podem ser diferentes ou conter variações em relação ao conjunto de treinamento. Um modelo que generaliza bem evita problemas de </a:t>
+            </a:r>
+            <a:r>
+              <a:rPr lang="pt-BR" b="0" i="0" dirty="0" err="1">
+                <a:solidFill>
+                  <a:srgbClr val="374151"/>
+                </a:solidFill>
+                <a:effectLst/>
+                <a:latin typeface="Söhne"/>
+              </a:rPr>
+              <a:t>superajuste</a:t>
+            </a:r>
+            <a:r>
+              <a:rPr lang="pt-BR" b="0" i="0" dirty="0">
+                <a:solidFill>
+                  <a:srgbClr val="374151"/>
+                </a:solidFill>
+                <a:effectLst/>
+                <a:latin typeface="Söhne"/>
+              </a:rPr>
+              <a:t> (</a:t>
+            </a:r>
+            <a:r>
+              <a:rPr lang="pt-BR" b="0" i="0" dirty="0" err="1">
+                <a:solidFill>
+                  <a:srgbClr val="374151"/>
+                </a:solidFill>
+                <a:effectLst/>
+                <a:latin typeface="Söhne"/>
+              </a:rPr>
+              <a:t>overfitting</a:t>
+            </a:r>
+            <a:r>
+              <a:rPr lang="pt-BR" b="0" i="0" dirty="0">
+                <a:solidFill>
+                  <a:srgbClr val="374151"/>
+                </a:solidFill>
+                <a:effectLst/>
+                <a:latin typeface="Söhne"/>
+              </a:rPr>
+              <a:t>), onde ele se torna muito específico para o conjunto de treinamento e tem um desempenho inferior em novos dados, ou problemas de </a:t>
+            </a:r>
+            <a:r>
+              <a:rPr lang="pt-BR" b="0" i="0" dirty="0" err="1">
+                <a:solidFill>
+                  <a:srgbClr val="374151"/>
+                </a:solidFill>
+                <a:effectLst/>
+                <a:latin typeface="Söhne"/>
+              </a:rPr>
+              <a:t>subajuste</a:t>
+            </a:r>
+            <a:r>
+              <a:rPr lang="pt-BR" b="0" i="0" dirty="0">
+                <a:solidFill>
+                  <a:srgbClr val="374151"/>
+                </a:solidFill>
+                <a:effectLst/>
+                <a:latin typeface="Söhne"/>
+              </a:rPr>
+              <a:t> (</a:t>
+            </a:r>
+            <a:r>
+              <a:rPr lang="pt-BR" b="0" i="0" dirty="0" err="1">
+                <a:solidFill>
+                  <a:srgbClr val="374151"/>
+                </a:solidFill>
+                <a:effectLst/>
+                <a:latin typeface="Söhne"/>
+              </a:rPr>
+              <a:t>underfitting</a:t>
+            </a:r>
+            <a:r>
+              <a:rPr lang="pt-BR" b="0" i="0" dirty="0">
+                <a:solidFill>
+                  <a:srgbClr val="374151"/>
+                </a:solidFill>
+                <a:effectLst/>
+                <a:latin typeface="Söhne"/>
+              </a:rPr>
+              <a:t>), onde ele não captura adequadamente os padrões do conjunto de treinamento e também não tem um desempenho satisfatório em novos dados.</a:t>
+            </a:r>
+          </a:p>
+          <a:p>
+            <a:endParaRPr lang="pt-BR" dirty="0"/>
+          </a:p>
+        </p:txBody>
+      </p:sp>
+      <p:sp>
+        <p:nvSpPr>
+          <p:cNvPr id="4" name="Espaço Reservado para Número de Slide 3"/>
+          <p:cNvSpPr>
+            <a:spLocks noGrp="1"/>
+          </p:cNvSpPr>
+          <p:nvPr>
+            <p:ph type="sldNum" sz="quarter" idx="5"/>
+          </p:nvPr>
+        </p:nvSpPr>
+        <p:spPr/>
+        <p:txBody>
+          <a:bodyPr/>
+          <a:lstStyle/>
+          <a:p>
+            <a:fld id="{6FC8D850-966F-45A6-8DE7-15B891E7D40D}" type="slidenum">
+              <a:rPr lang="pt-BR" smtClean="0"/>
+              <a:t>27</a:t>
+            </a:fld>
+            <a:endParaRPr lang="pt-BR"/>
+          </a:p>
+        </p:txBody>
+      </p:sp>
+    </p:spTree>
+    <p:extLst>
+      <p:ext uri="{BB962C8B-B14F-4D97-AF65-F5344CB8AC3E}">
+        <p14:creationId xmlns:p14="http://schemas.microsoft.com/office/powerpoint/2010/main" val="1728993040"/>
       </p:ext>
     </p:extLst>
   </p:cSld>
@@ -2368,7 +2468,7 @@
 </p:notes>
 </file>
 
-<file path=ppt/notesSlides/notesSlide3.xml><?xml version="1.0" encoding="utf-8"?>
+<file path=ppt/notesSlides/notesSlide20.xml><?xml version="1.0" encoding="utf-8"?>
 <p:notes xmlns:a="http://schemas.openxmlformats.org/drawingml/2006/main" xmlns:r="http://schemas.openxmlformats.org/officeDocument/2006/relationships" xmlns:p="http://schemas.openxmlformats.org/presentationml/2006/main">
   <p:cSld>
     <p:spTree>
@@ -2412,25 +2512,451 @@
           <a:bodyPr/>
           <a:lstStyle/>
           <a:p>
-            <a:r>
-              <a:rPr lang="pt-BR" dirty="0"/>
-              <a:t>Através de treinamento com o conjunto de</a:t>
-            </a:r>
-            <a:r>
-              <a:rPr lang="pt-BR" baseline="0" dirty="0"/>
-              <a:t> dados</a:t>
-            </a:r>
-            <a:r>
-              <a:rPr lang="pt-BR" dirty="0"/>
-              <a:t>, o algoritmo de ML aprende um modelo que reproduz os resultados esperados e generaliza para entradas não vistas durante o treinamento.</a:t>
-            </a:r>
-            <a:endParaRPr lang="en-US" dirty="0"/>
+            <a:pPr algn="l"/>
+            <a:r>
+              <a:rPr lang="pt-BR" b="0" i="0" dirty="0">
+                <a:solidFill>
+                  <a:srgbClr val="374151"/>
+                </a:solidFill>
+                <a:effectLst/>
+                <a:latin typeface="Söhne"/>
+              </a:rPr>
+              <a:t>No contexto de aprendizado de máquina, a generalização refere-se à capacidade de um modelo treinado em um conjunto de dados específico de realizar predições precisas e acuradas em dados que nunca foram vistos durante o processo de treinamento.</a:t>
+            </a:r>
+          </a:p>
+          <a:p>
+            <a:pPr algn="l"/>
+            <a:endParaRPr lang="pt-BR" b="0" i="0" dirty="0">
+              <a:solidFill>
+                <a:srgbClr val="374151"/>
+              </a:solidFill>
+              <a:effectLst/>
+              <a:latin typeface="Söhne"/>
+            </a:endParaRPr>
+          </a:p>
+          <a:p>
+            <a:pPr algn="l"/>
+            <a:r>
+              <a:rPr lang="pt-BR" b="0" i="0" dirty="0">
+                <a:solidFill>
+                  <a:srgbClr val="374151"/>
+                </a:solidFill>
+                <a:effectLst/>
+                <a:latin typeface="Söhne"/>
+              </a:rPr>
+              <a:t>Quando um modelo é treinado em um conjunto de dados, ele busca aprender padrões e regras que governam os relacionamentos entre as entradas e as saídas desse conjunto. A generalização ocorre quando o modelo consegue aplicar esse conhecimento aprendido para fazer predições em novos dados que não foram usados durante o treinamento. Em outras palavras, um modelo generalizado é capaz de "generalizar" o conhecimento adquirido com o conjunto de treinamento para realizar previsões precisas em situações desconhecidas.</a:t>
+            </a:r>
+          </a:p>
+          <a:p>
+            <a:pPr algn="l"/>
+            <a:endParaRPr lang="pt-BR" b="0" i="0" dirty="0">
+              <a:solidFill>
+                <a:srgbClr val="374151"/>
+              </a:solidFill>
+              <a:effectLst/>
+              <a:latin typeface="Söhne"/>
+            </a:endParaRPr>
+          </a:p>
+          <a:p>
+            <a:pPr algn="l"/>
+            <a:r>
+              <a:rPr lang="pt-BR" b="0" i="0" dirty="0">
+                <a:solidFill>
+                  <a:srgbClr val="374151"/>
+                </a:solidFill>
+                <a:effectLst/>
+                <a:latin typeface="Söhne"/>
+              </a:rPr>
+              <a:t>A generalização é um aspecto crítico do aprendizado de máquina, pois o objetivo é que o modelo seja capaz de lidar efetivamente com dados do mundo real, que podem ser diferentes ou conter variações em relação ao conjunto de treinamento. Um modelo que generaliza bem evita problemas de </a:t>
+            </a:r>
+            <a:r>
+              <a:rPr lang="pt-BR" b="0" i="0" dirty="0" err="1">
+                <a:solidFill>
+                  <a:srgbClr val="374151"/>
+                </a:solidFill>
+                <a:effectLst/>
+                <a:latin typeface="Söhne"/>
+              </a:rPr>
+              <a:t>superajuste</a:t>
+            </a:r>
+            <a:r>
+              <a:rPr lang="pt-BR" b="0" i="0" dirty="0">
+                <a:solidFill>
+                  <a:srgbClr val="374151"/>
+                </a:solidFill>
+                <a:effectLst/>
+                <a:latin typeface="Söhne"/>
+              </a:rPr>
+              <a:t> (</a:t>
+            </a:r>
+            <a:r>
+              <a:rPr lang="pt-BR" b="0" i="0" dirty="0" err="1">
+                <a:solidFill>
+                  <a:srgbClr val="374151"/>
+                </a:solidFill>
+                <a:effectLst/>
+                <a:latin typeface="Söhne"/>
+              </a:rPr>
+              <a:t>overfitting</a:t>
+            </a:r>
+            <a:r>
+              <a:rPr lang="pt-BR" b="0" i="0" dirty="0">
+                <a:solidFill>
+                  <a:srgbClr val="374151"/>
+                </a:solidFill>
+                <a:effectLst/>
+                <a:latin typeface="Söhne"/>
+              </a:rPr>
+              <a:t>), onde ele se torna muito específico para o conjunto de treinamento e tem um desempenho inferior em novos dados, ou problemas de </a:t>
+            </a:r>
+            <a:r>
+              <a:rPr lang="pt-BR" b="0" i="0" dirty="0" err="1">
+                <a:solidFill>
+                  <a:srgbClr val="374151"/>
+                </a:solidFill>
+                <a:effectLst/>
+                <a:latin typeface="Söhne"/>
+              </a:rPr>
+              <a:t>subajuste</a:t>
+            </a:r>
+            <a:r>
+              <a:rPr lang="pt-BR" b="0" i="0" dirty="0">
+                <a:solidFill>
+                  <a:srgbClr val="374151"/>
+                </a:solidFill>
+                <a:effectLst/>
+                <a:latin typeface="Söhne"/>
+              </a:rPr>
+              <a:t> (</a:t>
+            </a:r>
+            <a:r>
+              <a:rPr lang="pt-BR" b="0" i="0" dirty="0" err="1">
+                <a:solidFill>
+                  <a:srgbClr val="374151"/>
+                </a:solidFill>
+                <a:effectLst/>
+                <a:latin typeface="Söhne"/>
+              </a:rPr>
+              <a:t>underfitting</a:t>
+            </a:r>
+            <a:r>
+              <a:rPr lang="pt-BR" b="0" i="0" dirty="0">
+                <a:solidFill>
+                  <a:srgbClr val="374151"/>
+                </a:solidFill>
+                <a:effectLst/>
+                <a:latin typeface="Söhne"/>
+              </a:rPr>
+              <a:t>), onde ele não captura adequadamente os padrões do conjunto de treinamento e também não tem um desempenho satisfatório em novos dados.</a:t>
+            </a:r>
+          </a:p>
+          <a:p>
+            <a:endParaRPr lang="pt-BR" dirty="0"/>
           </a:p>
         </p:txBody>
       </p:sp>
       <p:sp>
         <p:nvSpPr>
           <p:cNvPr id="4" name="Espaço Reservado para Número de Slide 3"/>
+          <p:cNvSpPr>
+            <a:spLocks noGrp="1"/>
+          </p:cNvSpPr>
+          <p:nvPr>
+            <p:ph type="sldNum" sz="quarter" idx="5"/>
+          </p:nvPr>
+        </p:nvSpPr>
+        <p:spPr/>
+        <p:txBody>
+          <a:bodyPr/>
+          <a:lstStyle/>
+          <a:p>
+            <a:fld id="{6FC8D850-966F-45A6-8DE7-15B891E7D40D}" type="slidenum">
+              <a:rPr lang="pt-BR" smtClean="0"/>
+              <a:t>28</a:t>
+            </a:fld>
+            <a:endParaRPr lang="pt-BR"/>
+          </a:p>
+        </p:txBody>
+      </p:sp>
+    </p:spTree>
+    <p:extLst>
+      <p:ext uri="{BB962C8B-B14F-4D97-AF65-F5344CB8AC3E}">
+        <p14:creationId xmlns:p14="http://schemas.microsoft.com/office/powerpoint/2010/main" val="2643679924"/>
+      </p:ext>
+    </p:extLst>
+  </p:cSld>
+  <p:clrMapOvr>
+    <a:masterClrMapping/>
+  </p:clrMapOvr>
+</p:notes>
+</file>
+
+<file path=ppt/notesSlides/notesSlide3.xml><?xml version="1.0" encoding="utf-8"?>
+<p:notes xmlns:a="http://schemas.openxmlformats.org/drawingml/2006/main" xmlns:r="http://schemas.openxmlformats.org/officeDocument/2006/relationships" xmlns:p="http://schemas.openxmlformats.org/presentationml/2006/main">
+  <p:cSld>
+    <p:spTree>
+      <p:nvGrpSpPr>
+        <p:cNvPr id="1" name="">
+          <a:extLst>
+            <a:ext uri="{FF2B5EF4-FFF2-40B4-BE49-F238E27FC236}">
+              <a16:creationId xmlns:a16="http://schemas.microsoft.com/office/drawing/2014/main" id="{AEFFA2C8-0783-734A-4D33-3AE4F3B577BE}"/>
+            </a:ext>
+          </a:extLst>
+        </p:cNvPr>
+        <p:cNvGrpSpPr/>
+        <p:nvPr/>
+      </p:nvGrpSpPr>
+      <p:grpSpPr>
+        <a:xfrm>
+          <a:off x="0" y="0"/>
+          <a:ext cx="0" cy="0"/>
+          <a:chOff x="0" y="0"/>
+          <a:chExt cx="0" cy="0"/>
+        </a:xfrm>
+      </p:grpSpPr>
+      <p:sp>
+        <p:nvSpPr>
+          <p:cNvPr id="2" name="Espaço Reservado para Imagem de Slide 1">
+            <a:extLst>
+              <a:ext uri="{FF2B5EF4-FFF2-40B4-BE49-F238E27FC236}">
+                <a16:creationId xmlns:a16="http://schemas.microsoft.com/office/drawing/2014/main" id="{1DF07686-2AD7-D98E-58F9-6BE3257D0631}"/>
+              </a:ext>
+            </a:extLst>
+          </p:cNvPr>
+          <p:cNvSpPr>
+            <a:spLocks noGrp="1" noRot="1" noChangeAspect="1"/>
+          </p:cNvSpPr>
+          <p:nvPr>
+            <p:ph type="sldImg"/>
+          </p:nvPr>
+        </p:nvSpPr>
+        <p:spPr/>
+      </p:sp>
+      <p:sp>
+        <p:nvSpPr>
+          <p:cNvPr id="3" name="Espaço Reservado para Anotações 2">
+            <a:extLst>
+              <a:ext uri="{FF2B5EF4-FFF2-40B4-BE49-F238E27FC236}">
+                <a16:creationId xmlns:a16="http://schemas.microsoft.com/office/drawing/2014/main" id="{FC1C9337-0AAF-8C91-BE14-21A764038412}"/>
+              </a:ext>
+            </a:extLst>
+          </p:cNvPr>
+          <p:cNvSpPr>
+            <a:spLocks noGrp="1"/>
+          </p:cNvSpPr>
+          <p:nvPr>
+            <p:ph type="body" idx="1"/>
+          </p:nvPr>
+        </p:nvSpPr>
+        <p:spPr/>
+        <p:txBody>
+          <a:bodyPr/>
+          <a:lstStyle/>
+          <a:p>
+            <a:r>
+              <a:rPr lang="pt-BR" sz="1200" dirty="0"/>
+              <a:t>ML: técnicas e </a:t>
+            </a:r>
+            <a:r>
+              <a:rPr lang="pt-BR" sz="1200" dirty="0" err="1"/>
+              <a:t>algortimos</a:t>
+            </a:r>
+            <a:r>
+              <a:rPr lang="pt-BR" sz="1200" dirty="0"/>
+              <a:t> orientadas a dados: aprendem automaticamente a partir de grandes volumes de dados.</a:t>
+            </a:r>
+          </a:p>
+          <a:p>
+            <a:endParaRPr lang="en-US" sz="1200" b="1" dirty="0"/>
+          </a:p>
+          <a:p>
+            <a:r>
+              <a:rPr lang="pt-BR" sz="1200" b="0" dirty="0"/>
+              <a:t>O aprendizado de máquina pode ser definido como o processo de </a:t>
+            </a:r>
+            <a:r>
+              <a:rPr lang="pt-BR" sz="1200" b="1" dirty="0"/>
+              <a:t>induzir</a:t>
+            </a:r>
+            <a:r>
+              <a:rPr lang="pt-BR" sz="1200" b="0" dirty="0"/>
+              <a:t> inteligência em uma</a:t>
+            </a:r>
+            <a:r>
+              <a:rPr lang="pt-BR" sz="1200" b="0" baseline="0" dirty="0"/>
+              <a:t> </a:t>
+            </a:r>
+            <a:r>
+              <a:rPr lang="pt-BR" sz="1200" b="0" dirty="0"/>
+              <a:t>máquina </a:t>
+            </a:r>
+            <a:r>
+              <a:rPr lang="pt-BR" sz="1200" b="1" dirty="0"/>
+              <a:t>sem que ela</a:t>
+            </a:r>
+            <a:r>
+              <a:rPr lang="pt-BR" sz="1200" b="1" baseline="0" dirty="0"/>
+              <a:t> seja explicitamente</a:t>
+            </a:r>
+            <a:r>
+              <a:rPr lang="pt-BR" sz="1200" b="1" dirty="0"/>
+              <a:t> programada</a:t>
+            </a:r>
+            <a:r>
+              <a:rPr lang="pt-BR" sz="1200" b="0" dirty="0"/>
+              <a:t>.</a:t>
+            </a:r>
+            <a:endParaRPr lang="en-US" sz="1200" b="0" dirty="0"/>
+          </a:p>
+          <a:p>
+            <a:endParaRPr lang="en-US" sz="1200" b="1" dirty="0"/>
+          </a:p>
+          <a:p>
+            <a:r>
+              <a:rPr lang="pt-BR" sz="1200" b="0" dirty="0"/>
+              <a:t>Por exemplo, o filtro de spam do </a:t>
+            </a:r>
+            <a:r>
+              <a:rPr lang="pt-BR" sz="1200" b="0" dirty="0" err="1"/>
+              <a:t>gmail</a:t>
+            </a:r>
+            <a:r>
+              <a:rPr lang="pt-BR" sz="1200" b="0" dirty="0"/>
+              <a:t> utiliza aprendizado de máquina para aprender se</a:t>
+            </a:r>
+            <a:r>
+              <a:rPr lang="pt-BR" sz="1200" b="0" baseline="0" dirty="0"/>
+              <a:t> um email é </a:t>
+            </a:r>
+            <a:r>
+              <a:rPr lang="pt-BR" sz="1200" b="0" dirty="0"/>
+              <a:t>spam</a:t>
+            </a:r>
+            <a:r>
+              <a:rPr lang="pt-BR" sz="1200" b="0" baseline="0" dirty="0"/>
+              <a:t> </a:t>
+            </a:r>
+            <a:r>
+              <a:rPr lang="pt-BR" sz="1200" b="0" dirty="0"/>
+              <a:t>(por exemplo, sinalizados por usuários) e exemplos de </a:t>
+            </a:r>
+            <a:r>
+              <a:rPr lang="pt-BR" sz="1200" b="0" dirty="0" err="1"/>
+              <a:t>emails</a:t>
+            </a:r>
+            <a:r>
+              <a:rPr lang="pt-BR" sz="1200" b="0" dirty="0"/>
+              <a:t> regulares (não spam, também chamados de “</a:t>
+            </a:r>
+            <a:r>
+              <a:rPr lang="pt-BR" sz="1200" b="0" dirty="0" err="1"/>
+              <a:t>ham</a:t>
+            </a:r>
+            <a:r>
+              <a:rPr lang="pt-BR" sz="1200" b="0" dirty="0"/>
+              <a:t>"). </a:t>
+            </a:r>
+          </a:p>
+          <a:p>
+            <a:endParaRPr lang="pt-BR" sz="1200" b="0" dirty="0"/>
+          </a:p>
+          <a:p>
+            <a:r>
+              <a:rPr lang="pt-BR" sz="1200" b="0" dirty="0"/>
+              <a:t>Os exemplos que o modelo usa para aprender são chamados de </a:t>
+            </a:r>
+            <a:r>
+              <a:rPr lang="pt-BR" sz="1200" b="1" dirty="0"/>
+              <a:t>conjunto de treinamento</a:t>
+            </a:r>
+            <a:r>
+              <a:rPr lang="pt-BR" sz="1200" b="0" dirty="0"/>
+              <a:t>. Cada </a:t>
+            </a:r>
+            <a:r>
+              <a:rPr lang="pt-BR" sz="1200" b="1" dirty="0"/>
+              <a:t>exemplo de treinamento </a:t>
+            </a:r>
+            <a:r>
+              <a:rPr lang="pt-BR" sz="1200" b="0" dirty="0"/>
+              <a:t>é chamado de </a:t>
+            </a:r>
+            <a:r>
+              <a:rPr lang="pt-BR" sz="1200" b="1" dirty="0"/>
+              <a:t>instância de treinamento </a:t>
+            </a:r>
+            <a:r>
+              <a:rPr lang="pt-BR" sz="1200" b="0" dirty="0"/>
+              <a:t>(ou amostra).</a:t>
+            </a:r>
+          </a:p>
+          <a:p>
+            <a:endParaRPr lang="pt-BR" sz="1200" b="0" dirty="0"/>
+          </a:p>
+          <a:p>
+            <a:r>
+              <a:rPr lang="pt-BR" sz="1200" b="0" dirty="0"/>
+              <a:t>Induzir conhecimento através da apresentação de experiências prévias.</a:t>
+            </a:r>
+          </a:p>
+          <a:p>
+            <a:endParaRPr lang="pt-BR" sz="1200" b="0" dirty="0"/>
+          </a:p>
+          <a:p>
+            <a:pPr marL="0" marR="0" lvl="0" indent="0" algn="l" defTabSz="914400" rtl="0" eaLnBrk="1" fontAlgn="auto" latinLnBrk="0" hangingPunct="1">
+              <a:lnSpc>
+                <a:spcPct val="100000"/>
+              </a:lnSpc>
+              <a:spcBef>
+                <a:spcPts val="0"/>
+              </a:spcBef>
+              <a:spcAft>
+                <a:spcPts val="0"/>
+              </a:spcAft>
+              <a:buClrTx/>
+              <a:buSzTx/>
+              <a:buFontTx/>
+              <a:buNone/>
+              <a:tabLst/>
+              <a:defRPr/>
+            </a:pPr>
+            <a:r>
+              <a:rPr lang="pt-BR" b="1" dirty="0"/>
+              <a:t>Induzir</a:t>
+            </a:r>
+            <a:r>
+              <a:rPr lang="pt-BR" dirty="0"/>
+              <a:t> conhecimento através de experiências prévias.</a:t>
+            </a:r>
+          </a:p>
+          <a:p>
+            <a:endParaRPr lang="en-US" sz="1200" b="0" dirty="0"/>
+          </a:p>
+          <a:p>
+            <a:endParaRPr lang="pt-BR" dirty="0"/>
+          </a:p>
+          <a:p>
+            <a:r>
+              <a:rPr lang="pt-BR" dirty="0"/>
+              <a:t>Através de experiências prévias, induz-se</a:t>
+            </a:r>
+            <a:r>
+              <a:rPr lang="pt-BR" baseline="0" dirty="0"/>
+              <a:t> conhecimento nas máquinas</a:t>
+            </a:r>
+            <a:endParaRPr lang="en-US" dirty="0"/>
+          </a:p>
+        </p:txBody>
+      </p:sp>
+      <p:sp>
+        <p:nvSpPr>
+          <p:cNvPr id="4" name="Espaço Reservado para Número de Slide 3">
+            <a:extLst>
+              <a:ext uri="{FF2B5EF4-FFF2-40B4-BE49-F238E27FC236}">
+                <a16:creationId xmlns:a16="http://schemas.microsoft.com/office/drawing/2014/main" id="{4E91EABD-8099-711D-DC9A-7311F9F5748F}"/>
+              </a:ext>
+            </a:extLst>
+          </p:cNvPr>
           <p:cNvSpPr>
             <a:spLocks noGrp="1"/>
           </p:cNvSpPr>
@@ -2454,7 +2980,7 @@
     </p:spTree>
     <p:extLst>
       <p:ext uri="{BB962C8B-B14F-4D97-AF65-F5344CB8AC3E}">
-        <p14:creationId xmlns:p14="http://schemas.microsoft.com/office/powerpoint/2010/main" val="3209907235"/>
+        <p14:creationId xmlns:p14="http://schemas.microsoft.com/office/powerpoint/2010/main" val="1177767080"/>
       </p:ext>
     </p:extLst>
   </p:cSld>
@@ -2550,7 +3076,7 @@
     </p:spTree>
     <p:extLst>
       <p:ext uri="{BB962C8B-B14F-4D97-AF65-F5344CB8AC3E}">
-        <p14:creationId xmlns:p14="http://schemas.microsoft.com/office/powerpoint/2010/main" val="2453481621"/>
+        <p14:creationId xmlns:p14="http://schemas.microsoft.com/office/powerpoint/2010/main" val="3209907235"/>
       </p:ext>
     </p:extLst>
   </p:cSld>
@@ -2646,7 +3172,7 @@
     </p:spTree>
     <p:extLst>
       <p:ext uri="{BB962C8B-B14F-4D97-AF65-F5344CB8AC3E}">
-        <p14:creationId xmlns:p14="http://schemas.microsoft.com/office/powerpoint/2010/main" val="2348205420"/>
+        <p14:creationId xmlns:p14="http://schemas.microsoft.com/office/powerpoint/2010/main" val="2453481621"/>
       </p:ext>
     </p:extLst>
   </p:cSld>
@@ -2712,15 +3238,6 @@
               <a:rPr lang="pt-BR" dirty="0"/>
               <a:t>, o algoritmo de ML aprende um modelo que reproduz os resultados esperados e generaliza para entradas não vistas durante o treinamento.</a:t>
             </a:r>
-          </a:p>
-          <a:p>
-            <a:endParaRPr lang="pt-BR" dirty="0"/>
-          </a:p>
-          <a:p>
-            <a:r>
-              <a:rPr lang="pt-BR" dirty="0"/>
-              <a:t>Então, em vez de você tentar descobrir as regras que agem sobre os dados para lhe dar uma resposta, e se você fizer o contrário e fornecer as respostas com os dados e tiver um computador que pode descobrir as regras que irão combiná-los juntos?</a:t>
-            </a:r>
             <a:endParaRPr lang="en-US" dirty="0"/>
           </a:p>
         </p:txBody>
@@ -2742,7 +3259,7 @@
           <a:p>
             <a:fld id="{6FC8D850-966F-45A6-8DE7-15B891E7D40D}" type="slidenum">
               <a:rPr lang="pt-BR" smtClean="0"/>
-              <a:t>10</a:t>
+              <a:t>7</a:t>
             </a:fld>
             <a:endParaRPr lang="pt-BR"/>
           </a:p>
@@ -2751,7 +3268,7 @@
     </p:spTree>
     <p:extLst>
       <p:ext uri="{BB962C8B-B14F-4D97-AF65-F5344CB8AC3E}">
-        <p14:creationId xmlns:p14="http://schemas.microsoft.com/office/powerpoint/2010/main" val="303382888"/>
+        <p14:creationId xmlns:p14="http://schemas.microsoft.com/office/powerpoint/2010/main" val="2348205420"/>
       </p:ext>
     </p:extLst>
   </p:cSld>
@@ -2856,7 +3373,7 @@
     </p:spTree>
     <p:extLst>
       <p:ext uri="{BB962C8B-B14F-4D97-AF65-F5344CB8AC3E}">
-        <p14:creationId xmlns:p14="http://schemas.microsoft.com/office/powerpoint/2010/main" val="805259485"/>
+        <p14:creationId xmlns:p14="http://schemas.microsoft.com/office/powerpoint/2010/main" val="303382888"/>
       </p:ext>
     </p:extLst>
   </p:cSld>
@@ -2871,7 +3388,13 @@
   <p:cSld>
     <p:spTree>
       <p:nvGrpSpPr>
-        <p:cNvPr id="1" name=""/>
+        <p:cNvPr id="1" name="">
+          <a:extLst>
+            <a:ext uri="{FF2B5EF4-FFF2-40B4-BE49-F238E27FC236}">
+              <a16:creationId xmlns:a16="http://schemas.microsoft.com/office/drawing/2014/main" id="{5346B81A-60D6-61D4-C223-2450C5FB6264}"/>
+            </a:ext>
+          </a:extLst>
+        </p:cNvPr>
         <p:cNvGrpSpPr/>
         <p:nvPr/>
       </p:nvGrpSpPr>
@@ -2885,7 +3408,13 @@
       </p:grpSpPr>
       <p:sp>
         <p:nvSpPr>
-          <p:cNvPr id="2" name="Espaço Reservado para Imagem de Slide 1"/>
+          <p:cNvPr id="2" name="Espaço Reservado para Imagem de Slide 1">
+            <a:extLst>
+              <a:ext uri="{FF2B5EF4-FFF2-40B4-BE49-F238E27FC236}">
+                <a16:creationId xmlns:a16="http://schemas.microsoft.com/office/drawing/2014/main" id="{89F69B26-62CD-6429-4E32-A2EB409FAF21}"/>
+              </a:ext>
+            </a:extLst>
+          </p:cNvPr>
           <p:cNvSpPr>
             <a:spLocks noGrp="1" noRot="1" noChangeAspect="1"/>
           </p:cNvSpPr>
@@ -2897,7 +3426,13 @@
       </p:sp>
       <p:sp>
         <p:nvSpPr>
-          <p:cNvPr id="3" name="Espaço Reservado para Anotações 2"/>
+          <p:cNvPr id="3" name="Espaço Reservado para Anotações 2">
+            <a:extLst>
+              <a:ext uri="{FF2B5EF4-FFF2-40B4-BE49-F238E27FC236}">
+                <a16:creationId xmlns:a16="http://schemas.microsoft.com/office/drawing/2014/main" id="{543EB985-F134-D82D-46D4-D8C9451663AF}"/>
+              </a:ext>
+            </a:extLst>
+          </p:cNvPr>
           <p:cNvSpPr>
             <a:spLocks noGrp="1"/>
           </p:cNvSpPr>
@@ -2912,19 +3447,43 @@
           <a:p>
             <a:r>
               <a:rPr lang="pt-BR" dirty="0"/>
-              <a:t>Mas além dos detalhes, é simplesmente adivinhar o relacionamento. Em seguida, ele mede o quão bom ou ruim é esse palpite. A terminologia frequentemente usada aqui é perda.</a:t>
-            </a:r>
+              <a:t>Através de treinamento com o conjunto de</a:t>
+            </a:r>
+            <a:r>
+              <a:rPr lang="pt-BR" baseline="0" dirty="0"/>
+              <a:t> dados</a:t>
+            </a:r>
+            <a:r>
+              <a:rPr lang="pt-BR" dirty="0"/>
+              <a:t>, o algoritmo de ML aprende um modelo que reproduz os resultados esperados e generaliza para entradas não vistas durante o treinamento.</a:t>
+            </a:r>
+          </a:p>
+          <a:p>
+            <a:endParaRPr lang="pt-BR" dirty="0"/>
+          </a:p>
+          <a:p>
+            <a:r>
+              <a:rPr lang="pt-BR" dirty="0"/>
+              <a:t>Então, em vez de você tentar descobrir as regras que agem sobre os dados para lhe dar uma resposta, e se você fizer o contrário e fornecer as respostas com os dados e tiver um computador que pode descobrir as regras que irão combiná-los juntos?</a:t>
+            </a:r>
+            <a:endParaRPr lang="en-US" dirty="0"/>
           </a:p>
         </p:txBody>
       </p:sp>
       <p:sp>
         <p:nvSpPr>
-          <p:cNvPr id="4" name="Espaço Reservado para Número de Slide 3"/>
+          <p:cNvPr id="4" name="Espaço Reservado para Número de Slide 3">
+            <a:extLst>
+              <a:ext uri="{FF2B5EF4-FFF2-40B4-BE49-F238E27FC236}">
+                <a16:creationId xmlns:a16="http://schemas.microsoft.com/office/drawing/2014/main" id="{87A5387E-B915-232C-1589-DC2FB1791FB5}"/>
+              </a:ext>
+            </a:extLst>
+          </p:cNvPr>
           <p:cNvSpPr>
             <a:spLocks noGrp="1"/>
           </p:cNvSpPr>
           <p:nvPr>
-            <p:ph type="sldNum" sz="quarter" idx="5"/>
+            <p:ph type="sldNum" sz="quarter" idx="10"/>
           </p:nvPr>
         </p:nvSpPr>
         <p:spPr/>
@@ -2934,7 +3493,7 @@
           <a:p>
             <a:fld id="{6FC8D850-966F-45A6-8DE7-15B891E7D40D}" type="slidenum">
               <a:rPr lang="pt-BR" smtClean="0"/>
-              <a:t>13</a:t>
+              <a:t>12</a:t>
             </a:fld>
             <a:endParaRPr lang="pt-BR"/>
           </a:p>
@@ -2943,7 +3502,7 @@
     </p:spTree>
     <p:extLst>
       <p:ext uri="{BB962C8B-B14F-4D97-AF65-F5344CB8AC3E}">
-        <p14:creationId xmlns:p14="http://schemas.microsoft.com/office/powerpoint/2010/main" val="1520028445"/>
+        <p14:creationId xmlns:p14="http://schemas.microsoft.com/office/powerpoint/2010/main" val="916218368"/>
       </p:ext>
     </p:extLst>
   </p:cSld>
@@ -2999,8 +3558,26 @@
           <a:p>
             <a:r>
               <a:rPr lang="pt-BR" dirty="0"/>
-              <a:t>Mas além dos detalhes, é simplesmente adivinhar o relacionamento. Em seguida, ele mede o quão bom ou ruim é esse palpite. A terminologia frequentemente usada aqui é perda.</a:t>
-            </a:r>
+              <a:t>Através de treinamento com o conjunto de</a:t>
+            </a:r>
+            <a:r>
+              <a:rPr lang="pt-BR" baseline="0" dirty="0"/>
+              <a:t> dados</a:t>
+            </a:r>
+            <a:r>
+              <a:rPr lang="pt-BR" dirty="0"/>
+              <a:t>, o algoritmo de ML aprende um modelo que reproduz os resultados esperados e generaliza para entradas não vistas durante o treinamento.</a:t>
+            </a:r>
+          </a:p>
+          <a:p>
+            <a:endParaRPr lang="pt-BR" dirty="0"/>
+          </a:p>
+          <a:p>
+            <a:r>
+              <a:rPr lang="pt-BR" dirty="0"/>
+              <a:t>Então, em vez de você tentar descobrir as regras que agem sobre os dados para lhe dar uma resposta, e se você fizer o contrário e fornecer as respostas com os dados e tiver um computador que pode descobrir as regras que irão combiná-los juntos?</a:t>
+            </a:r>
+            <a:endParaRPr lang="en-US" dirty="0"/>
           </a:p>
         </p:txBody>
       </p:sp>
@@ -3011,7 +3588,7 @@
             <a:spLocks noGrp="1"/>
           </p:cNvSpPr>
           <p:nvPr>
-            <p:ph type="sldNum" sz="quarter" idx="5"/>
+            <p:ph type="sldNum" sz="quarter" idx="10"/>
           </p:nvPr>
         </p:nvSpPr>
         <p:spPr/>
@@ -3021,7 +3598,7 @@
           <a:p>
             <a:fld id="{6FC8D850-966F-45A6-8DE7-15B891E7D40D}" type="slidenum">
               <a:rPr lang="pt-BR" smtClean="0"/>
-              <a:t>14</a:t>
+              <a:t>13</a:t>
             </a:fld>
             <a:endParaRPr lang="pt-BR"/>
           </a:p>
@@ -3030,7 +3607,7 @@
     </p:spTree>
     <p:extLst>
       <p:ext uri="{BB962C8B-B14F-4D97-AF65-F5344CB8AC3E}">
-        <p14:creationId xmlns:p14="http://schemas.microsoft.com/office/powerpoint/2010/main" val="1477200284"/>
+        <p14:creationId xmlns:p14="http://schemas.microsoft.com/office/powerpoint/2010/main" val="805259485"/>
       </p:ext>
     </p:extLst>
   </p:cSld>
@@ -3187,7 +3764,7 @@
           <a:p>
             <a:fld id="{63289F7E-B80B-496E-81B4-D396C37C9454}" type="datetimeFigureOut">
               <a:rPr lang="pt-BR" smtClean="0"/>
-              <a:t>22/08/2023</a:t>
+              <a:t>26/03/2025</a:t>
             </a:fld>
             <a:endParaRPr lang="pt-BR"/>
           </a:p>
@@ -3241,7 +3818,7 @@
           <a:p>
             <a:fld id="{1A7E88B7-70CE-4035-AE73-13FA6FB985D4}" type="slidenum">
               <a:rPr lang="pt-BR" smtClean="0"/>
-              <a:t>‹nº›</a:t>
+              <a:t>‹#›</a:t>
             </a:fld>
             <a:endParaRPr lang="pt-BR"/>
           </a:p>
@@ -3385,7 +3962,7 @@
           <a:p>
             <a:fld id="{63289F7E-B80B-496E-81B4-D396C37C9454}" type="datetimeFigureOut">
               <a:rPr lang="pt-BR" smtClean="0"/>
-              <a:t>22/08/2023</a:t>
+              <a:t>26/03/2025</a:t>
             </a:fld>
             <a:endParaRPr lang="pt-BR"/>
           </a:p>
@@ -3439,7 +4016,7 @@
           <a:p>
             <a:fld id="{1A7E88B7-70CE-4035-AE73-13FA6FB985D4}" type="slidenum">
               <a:rPr lang="pt-BR" smtClean="0"/>
-              <a:t>‹nº›</a:t>
+              <a:t>‹#›</a:t>
             </a:fld>
             <a:endParaRPr lang="pt-BR"/>
           </a:p>
@@ -3593,7 +4170,7 @@
           <a:p>
             <a:fld id="{63289F7E-B80B-496E-81B4-D396C37C9454}" type="datetimeFigureOut">
               <a:rPr lang="pt-BR" smtClean="0"/>
-              <a:t>22/08/2023</a:t>
+              <a:t>26/03/2025</a:t>
             </a:fld>
             <a:endParaRPr lang="pt-BR"/>
           </a:p>
@@ -3647,7 +4224,7 @@
           <a:p>
             <a:fld id="{1A7E88B7-70CE-4035-AE73-13FA6FB985D4}" type="slidenum">
               <a:rPr lang="pt-BR" smtClean="0"/>
-              <a:t>‹nº›</a:t>
+              <a:t>‹#›</a:t>
             </a:fld>
             <a:endParaRPr lang="pt-BR"/>
           </a:p>
@@ -3791,7 +4368,7 @@
           <a:p>
             <a:fld id="{63289F7E-B80B-496E-81B4-D396C37C9454}" type="datetimeFigureOut">
               <a:rPr lang="pt-BR" smtClean="0"/>
-              <a:t>22/08/2023</a:t>
+              <a:t>26/03/2025</a:t>
             </a:fld>
             <a:endParaRPr lang="pt-BR"/>
           </a:p>
@@ -3845,7 +4422,7 @@
           <a:p>
             <a:fld id="{1A7E88B7-70CE-4035-AE73-13FA6FB985D4}" type="slidenum">
               <a:rPr lang="pt-BR" smtClean="0"/>
-              <a:t>‹nº›</a:t>
+              <a:t>‹#›</a:t>
             </a:fld>
             <a:endParaRPr lang="pt-BR"/>
           </a:p>
@@ -4066,7 +4643,7 @@
           <a:p>
             <a:fld id="{63289F7E-B80B-496E-81B4-D396C37C9454}" type="datetimeFigureOut">
               <a:rPr lang="pt-BR" smtClean="0"/>
-              <a:t>22/08/2023</a:t>
+              <a:t>26/03/2025</a:t>
             </a:fld>
             <a:endParaRPr lang="pt-BR"/>
           </a:p>
@@ -4120,7 +4697,7 @@
           <a:p>
             <a:fld id="{1A7E88B7-70CE-4035-AE73-13FA6FB985D4}" type="slidenum">
               <a:rPr lang="pt-BR" smtClean="0"/>
-              <a:t>‹nº›</a:t>
+              <a:t>‹#›</a:t>
             </a:fld>
             <a:endParaRPr lang="pt-BR"/>
           </a:p>
@@ -4331,7 +4908,7 @@
           <a:p>
             <a:fld id="{63289F7E-B80B-496E-81B4-D396C37C9454}" type="datetimeFigureOut">
               <a:rPr lang="pt-BR" smtClean="0"/>
-              <a:t>22/08/2023</a:t>
+              <a:t>26/03/2025</a:t>
             </a:fld>
             <a:endParaRPr lang="pt-BR"/>
           </a:p>
@@ -4385,7 +4962,7 @@
           <a:p>
             <a:fld id="{1A7E88B7-70CE-4035-AE73-13FA6FB985D4}" type="slidenum">
               <a:rPr lang="pt-BR" smtClean="0"/>
-              <a:t>‹nº›</a:t>
+              <a:t>‹#›</a:t>
             </a:fld>
             <a:endParaRPr lang="pt-BR"/>
           </a:p>
@@ -4743,7 +5320,7 @@
           <a:p>
             <a:fld id="{63289F7E-B80B-496E-81B4-D396C37C9454}" type="datetimeFigureOut">
               <a:rPr lang="pt-BR" smtClean="0"/>
-              <a:t>22/08/2023</a:t>
+              <a:t>26/03/2025</a:t>
             </a:fld>
             <a:endParaRPr lang="pt-BR"/>
           </a:p>
@@ -4797,7 +5374,7 @@
           <a:p>
             <a:fld id="{1A7E88B7-70CE-4035-AE73-13FA6FB985D4}" type="slidenum">
               <a:rPr lang="pt-BR" smtClean="0"/>
-              <a:t>‹nº›</a:t>
+              <a:t>‹#›</a:t>
             </a:fld>
             <a:endParaRPr lang="pt-BR"/>
           </a:p>
@@ -4884,7 +5461,7 @@
           <a:p>
             <a:fld id="{63289F7E-B80B-496E-81B4-D396C37C9454}" type="datetimeFigureOut">
               <a:rPr lang="pt-BR" smtClean="0"/>
-              <a:t>22/08/2023</a:t>
+              <a:t>26/03/2025</a:t>
             </a:fld>
             <a:endParaRPr lang="pt-BR"/>
           </a:p>
@@ -4938,7 +5515,7 @@
           <a:p>
             <a:fld id="{1A7E88B7-70CE-4035-AE73-13FA6FB985D4}" type="slidenum">
               <a:rPr lang="pt-BR" smtClean="0"/>
-              <a:t>‹nº›</a:t>
+              <a:t>‹#›</a:t>
             </a:fld>
             <a:endParaRPr lang="pt-BR"/>
           </a:p>
@@ -4997,7 +5574,7 @@
           <a:p>
             <a:fld id="{63289F7E-B80B-496E-81B4-D396C37C9454}" type="datetimeFigureOut">
               <a:rPr lang="pt-BR" smtClean="0"/>
-              <a:t>22/08/2023</a:t>
+              <a:t>26/03/2025</a:t>
             </a:fld>
             <a:endParaRPr lang="pt-BR"/>
           </a:p>
@@ -5051,7 +5628,7 @@
           <a:p>
             <a:fld id="{1A7E88B7-70CE-4035-AE73-13FA6FB985D4}" type="slidenum">
               <a:rPr lang="pt-BR" smtClean="0"/>
-              <a:t>‹nº›</a:t>
+              <a:t>‹#›</a:t>
             </a:fld>
             <a:endParaRPr lang="pt-BR"/>
           </a:p>
@@ -5308,7 +5885,7 @@
           <a:p>
             <a:fld id="{63289F7E-B80B-496E-81B4-D396C37C9454}" type="datetimeFigureOut">
               <a:rPr lang="pt-BR" smtClean="0"/>
-              <a:t>22/08/2023</a:t>
+              <a:t>26/03/2025</a:t>
             </a:fld>
             <a:endParaRPr lang="pt-BR"/>
           </a:p>
@@ -5362,7 +5939,7 @@
           <a:p>
             <a:fld id="{1A7E88B7-70CE-4035-AE73-13FA6FB985D4}" type="slidenum">
               <a:rPr lang="pt-BR" smtClean="0"/>
-              <a:t>‹nº›</a:t>
+              <a:t>‹#›</a:t>
             </a:fld>
             <a:endParaRPr lang="pt-BR"/>
           </a:p>
@@ -5596,7 +6173,7 @@
           <a:p>
             <a:fld id="{63289F7E-B80B-496E-81B4-D396C37C9454}" type="datetimeFigureOut">
               <a:rPr lang="pt-BR" smtClean="0"/>
-              <a:t>22/08/2023</a:t>
+              <a:t>26/03/2025</a:t>
             </a:fld>
             <a:endParaRPr lang="pt-BR"/>
           </a:p>
@@ -5650,7 +6227,7 @@
           <a:p>
             <a:fld id="{1A7E88B7-70CE-4035-AE73-13FA6FB985D4}" type="slidenum">
               <a:rPr lang="pt-BR" smtClean="0"/>
-              <a:t>‹nº›</a:t>
+              <a:t>‹#›</a:t>
             </a:fld>
             <a:endParaRPr lang="pt-BR"/>
           </a:p>
@@ -5837,7 +6414,7 @@
           <a:p>
             <a:fld id="{63289F7E-B80B-496E-81B4-D396C37C9454}" type="datetimeFigureOut">
               <a:rPr lang="pt-BR" smtClean="0"/>
-              <a:t>22/08/2023</a:t>
+              <a:t>26/03/2025</a:t>
             </a:fld>
             <a:endParaRPr lang="pt-BR"/>
           </a:p>
@@ -5927,7 +6504,7 @@
           <a:p>
             <a:fld id="{1A7E88B7-70CE-4035-AE73-13FA6FB985D4}" type="slidenum">
               <a:rPr lang="pt-BR" smtClean="0"/>
-              <a:t>‹nº›</a:t>
+              <a:t>‹#›</a:t>
             </a:fld>
             <a:endParaRPr lang="pt-BR"/>
           </a:p>
@@ -6510,6 +7087,286 @@
           <a:chExt cx="0" cy="0"/>
         </a:xfrm>
       </p:grpSpPr>
+      <p:sp>
+        <p:nvSpPr>
+          <p:cNvPr id="2" name="Título 1">
+            <a:extLst>
+              <a:ext uri="{FF2B5EF4-FFF2-40B4-BE49-F238E27FC236}">
+                <a16:creationId xmlns:a16="http://schemas.microsoft.com/office/drawing/2014/main" id="{E1859D24-083B-4F12-23CB-CA788AD2D8EC}"/>
+              </a:ext>
+            </a:extLst>
+          </p:cNvPr>
+          <p:cNvSpPr>
+            <a:spLocks noGrp="1"/>
+          </p:cNvSpPr>
+          <p:nvPr>
+            <p:ph type="title"/>
+          </p:nvPr>
+        </p:nvSpPr>
+        <p:spPr/>
+        <p:txBody>
+          <a:bodyPr/>
+          <a:lstStyle/>
+          <a:p>
+            <a:r>
+              <a:rPr lang="pt-BR" dirty="0"/>
+              <a:t>Programação tradicional</a:t>
+            </a:r>
+          </a:p>
+        </p:txBody>
+      </p:sp>
+      <p:sp>
+        <p:nvSpPr>
+          <p:cNvPr id="3" name="Espaço Reservado para Conteúdo 2">
+            <a:extLst>
+              <a:ext uri="{FF2B5EF4-FFF2-40B4-BE49-F238E27FC236}">
+                <a16:creationId xmlns:a16="http://schemas.microsoft.com/office/drawing/2014/main" id="{B712A549-DCD5-9C7D-3A1F-F4CB938CF177}"/>
+              </a:ext>
+            </a:extLst>
+          </p:cNvPr>
+          <p:cNvSpPr>
+            <a:spLocks noGrp="1"/>
+          </p:cNvSpPr>
+          <p:nvPr>
+            <p:ph idx="1"/>
+          </p:nvPr>
+        </p:nvSpPr>
+        <p:spPr>
+          <a:xfrm>
+            <a:off x="7222733" y="1690688"/>
+            <a:ext cx="4900010" cy="5167312"/>
+          </a:xfrm>
+        </p:spPr>
+        <p:txBody>
+          <a:bodyPr>
+            <a:normAutofit/>
+          </a:bodyPr>
+          <a:lstStyle/>
+          <a:p>
+            <a:r>
+              <a:rPr lang="pt-BR" dirty="0"/>
+              <a:t>Além disso, vejam que as </a:t>
+            </a:r>
+            <a:r>
+              <a:rPr lang="pt-BR" b="1" i="1" dirty="0">
+                <a:solidFill>
+                  <a:srgbClr val="00B050"/>
+                </a:solidFill>
+              </a:rPr>
+              <a:t>regras</a:t>
+            </a:r>
+            <a:r>
+              <a:rPr lang="pt-BR" dirty="0"/>
+              <a:t> que criamos são bem </a:t>
+            </a:r>
+            <a:r>
+              <a:rPr lang="pt-BR" b="1" i="1" dirty="0">
+                <a:solidFill>
+                  <a:srgbClr val="00B050"/>
+                </a:solidFill>
+              </a:rPr>
+              <a:t>simples e com certeza gerariam vários erros de identificação</a:t>
+            </a:r>
+            <a:r>
+              <a:rPr lang="pt-BR" dirty="0"/>
+              <a:t>.</a:t>
+            </a:r>
+          </a:p>
+          <a:p>
+            <a:pPr lvl="1">
+              <a:buFont typeface="Wingdings" panose="05000000000000000000" pitchFamily="2" charset="2"/>
+              <a:buChar char="§"/>
+            </a:pPr>
+            <a:r>
+              <a:rPr lang="pt-BR" dirty="0"/>
+              <a:t>Por exemplo, podemos correr ladeira abaixo mais rápido do que pedalamos ladeira acima.</a:t>
+            </a:r>
+          </a:p>
+          <a:p>
+            <a:r>
+              <a:rPr lang="pt-BR" b="1" i="1" dirty="0">
+                <a:solidFill>
+                  <a:schemeClr val="accent1"/>
+                </a:solidFill>
+              </a:rPr>
+              <a:t>Aprendizado de máquina</a:t>
+            </a:r>
+            <a:r>
+              <a:rPr lang="pt-BR" dirty="0"/>
+              <a:t> pode nos ajudar a resolver este problema.</a:t>
+            </a:r>
+          </a:p>
+        </p:txBody>
+      </p:sp>
+      <p:grpSp>
+        <p:nvGrpSpPr>
+          <p:cNvPr id="10" name="Agrupar 9">
+            <a:extLst>
+              <a:ext uri="{FF2B5EF4-FFF2-40B4-BE49-F238E27FC236}">
+                <a16:creationId xmlns:a16="http://schemas.microsoft.com/office/drawing/2014/main" id="{E6BE4743-3C61-AD20-5644-76B635B7F260}"/>
+              </a:ext>
+            </a:extLst>
+          </p:cNvPr>
+          <p:cNvGrpSpPr>
+            <a:grpSpLocks noChangeAspect="1"/>
+          </p:cNvGrpSpPr>
+          <p:nvPr/>
+        </p:nvGrpSpPr>
+        <p:grpSpPr>
+          <a:xfrm>
+            <a:off x="149400" y="2420042"/>
+            <a:ext cx="6833430" cy="2655392"/>
+            <a:chOff x="0" y="1672582"/>
+            <a:chExt cx="8387452" cy="3259256"/>
+          </a:xfrm>
+        </p:grpSpPr>
+        <p:pic>
+          <p:nvPicPr>
+            <p:cNvPr id="5" name="Imagem 4">
+              <a:extLst>
+                <a:ext uri="{FF2B5EF4-FFF2-40B4-BE49-F238E27FC236}">
+                  <a16:creationId xmlns:a16="http://schemas.microsoft.com/office/drawing/2014/main" id="{3DDF97E4-A0BE-B8B6-AC86-B7FD47E96CCE}"/>
+                </a:ext>
+              </a:extLst>
+            </p:cNvPr>
+            <p:cNvPicPr>
+              <a:picLocks noChangeAspect="1"/>
+            </p:cNvPicPr>
+            <p:nvPr/>
+          </p:nvPicPr>
+          <p:blipFill rotWithShape="1">
+            <a:blip r:embed="rId2"/>
+            <a:srcRect r="81786"/>
+            <a:stretch/>
+          </p:blipFill>
+          <p:spPr>
+            <a:xfrm>
+              <a:off x="0" y="1672582"/>
+              <a:ext cx="2220686" cy="3241150"/>
+            </a:xfrm>
+            <a:prstGeom prst="rect">
+              <a:avLst/>
+            </a:prstGeom>
+          </p:spPr>
+        </p:pic>
+        <p:pic>
+          <p:nvPicPr>
+            <p:cNvPr id="6" name="Imagem 5">
+              <a:extLst>
+                <a:ext uri="{FF2B5EF4-FFF2-40B4-BE49-F238E27FC236}">
+                  <a16:creationId xmlns:a16="http://schemas.microsoft.com/office/drawing/2014/main" id="{7A6EC6EF-821D-9118-6748-01EAB046CC0F}"/>
+                </a:ext>
+              </a:extLst>
+            </p:cNvPr>
+            <p:cNvPicPr>
+              <a:picLocks noChangeAspect="1"/>
+            </p:cNvPicPr>
+            <p:nvPr/>
+          </p:nvPicPr>
+          <p:blipFill rotWithShape="1">
+            <a:blip r:embed="rId2"/>
+            <a:srcRect l="89732"/>
+            <a:stretch/>
+          </p:blipFill>
+          <p:spPr>
+            <a:xfrm>
+              <a:off x="7135595" y="1672582"/>
+              <a:ext cx="1251857" cy="3241150"/>
+            </a:xfrm>
+            <a:prstGeom prst="rect">
+              <a:avLst/>
+            </a:prstGeom>
+          </p:spPr>
+        </p:pic>
+        <p:pic>
+          <p:nvPicPr>
+            <p:cNvPr id="7" name="Imagem 6">
+              <a:extLst>
+                <a:ext uri="{FF2B5EF4-FFF2-40B4-BE49-F238E27FC236}">
+                  <a16:creationId xmlns:a16="http://schemas.microsoft.com/office/drawing/2014/main" id="{3578A7AB-C96B-1A18-011E-428B8A543367}"/>
+                </a:ext>
+              </a:extLst>
+            </p:cNvPr>
+            <p:cNvPicPr>
+              <a:picLocks noChangeAspect="1"/>
+            </p:cNvPicPr>
+            <p:nvPr/>
+          </p:nvPicPr>
+          <p:blipFill rotWithShape="1">
+            <a:blip r:embed="rId2"/>
+            <a:srcRect l="31697" r="52857"/>
+            <a:stretch/>
+          </p:blipFill>
+          <p:spPr>
+            <a:xfrm>
+              <a:off x="2607132" y="1690688"/>
+              <a:ext cx="1883228" cy="3241150"/>
+            </a:xfrm>
+            <a:prstGeom prst="rect">
+              <a:avLst/>
+            </a:prstGeom>
+          </p:spPr>
+        </p:pic>
+        <p:pic>
+          <p:nvPicPr>
+            <p:cNvPr id="8" name="Imagem 7">
+              <a:extLst>
+                <a:ext uri="{FF2B5EF4-FFF2-40B4-BE49-F238E27FC236}">
+                  <a16:creationId xmlns:a16="http://schemas.microsoft.com/office/drawing/2014/main" id="{D2F08DCC-A613-B284-5DDE-3A2147E22AF5}"/>
+                </a:ext>
+              </a:extLst>
+            </p:cNvPr>
+            <p:cNvPicPr>
+              <a:picLocks noChangeAspect="1"/>
+            </p:cNvPicPr>
+            <p:nvPr/>
+          </p:nvPicPr>
+          <p:blipFill rotWithShape="1">
+            <a:blip r:embed="rId2"/>
+            <a:srcRect l="60714" r="23929"/>
+            <a:stretch/>
+          </p:blipFill>
+          <p:spPr>
+            <a:xfrm>
+              <a:off x="4876806" y="1672582"/>
+              <a:ext cx="1872343" cy="3241150"/>
+            </a:xfrm>
+            <a:prstGeom prst="rect">
+              <a:avLst/>
+            </a:prstGeom>
+          </p:spPr>
+        </p:pic>
+      </p:grpSp>
+    </p:spTree>
+    <p:extLst>
+      <p:ext uri="{BB962C8B-B14F-4D97-AF65-F5344CB8AC3E}">
+        <p14:creationId xmlns:p14="http://schemas.microsoft.com/office/powerpoint/2010/main" val="195948511"/>
+      </p:ext>
+    </p:extLst>
+  </p:cSld>
+  <p:clrMapOvr>
+    <a:masterClrMapping/>
+  </p:clrMapOvr>
+</p:sld>
+</file>
+
+<file path=ppt/slides/slide11.xml><?xml version="1.0" encoding="utf-8"?>
+<p:sld xmlns:a="http://schemas.openxmlformats.org/drawingml/2006/main" xmlns:r="http://schemas.openxmlformats.org/officeDocument/2006/relationships" xmlns:p="http://schemas.openxmlformats.org/presentationml/2006/main">
+  <p:cSld>
+    <p:spTree>
+      <p:nvGrpSpPr>
+        <p:cNvPr id="1" name=""/>
+        <p:cNvGrpSpPr/>
+        <p:nvPr/>
+      </p:nvGrpSpPr>
+      <p:grpSpPr>
+        <a:xfrm>
+          <a:off x="0" y="0"/>
+          <a:ext cx="0" cy="0"/>
+          <a:chOff x="0" y="0"/>
+          <a:chExt cx="0" cy="0"/>
+        </a:xfrm>
+      </p:grpSpPr>
       <p:pic>
         <p:nvPicPr>
           <p:cNvPr id="30" name="Picture 2">
@@ -6537,7 +7394,7 @@
         </p:blipFill>
         <p:spPr bwMode="auto">
           <a:xfrm>
-            <a:off x="772828" y="4585535"/>
+            <a:off x="661991" y="4187485"/>
             <a:ext cx="2979222" cy="2095623"/>
           </a:xfrm>
           <a:prstGeom prst="rect">
@@ -6648,32 +7505,32 @@
               <a:t>E se ao invés de tentarmos </a:t>
             </a:r>
             <a:r>
-              <a:rPr lang="pt-BR" b="1" i="1" dirty="0"/>
-              <a:t>descobrir as regras que agem sobre os dados para gerar as respostas</a:t>
-            </a:r>
-            <a:r>
-              <a:rPr lang="pt-BR" dirty="0"/>
-              <a:t>, fizermos o </a:t>
-            </a:r>
-            <a:r>
-              <a:rPr lang="pt-BR" b="1" i="1" dirty="0"/>
-              <a:t>contrário</a:t>
-            </a:r>
-            <a:r>
-              <a:rPr lang="pt-BR" dirty="0"/>
-              <a:t>? Ou seja, </a:t>
-            </a:r>
-            <a:r>
               <a:rPr lang="pt-BR" b="1" i="1" dirty="0">
                 <a:solidFill>
                   <a:srgbClr val="00B050"/>
                 </a:solidFill>
               </a:rPr>
-              <a:t>fornecer as respostas e os dados a um computador e deixar que ele descubra as regras </a:t>
+              <a:t>nós mesmos definir as regras</a:t>
+            </a:r>
+            <a:r>
+              <a:rPr lang="pt-BR" b="1" i="1" dirty="0"/>
+              <a:t> que agem sobre os dados para gerar as respostas</a:t>
             </a:r>
             <a:r>
               <a:rPr lang="pt-BR" dirty="0"/>
-              <a:t>que geram as saídas (i.e., um mapeamento das entradas nas respostas)?</a:t>
+              <a:t>, fizermos o </a:t>
+            </a:r>
+            <a:r>
+              <a:rPr lang="pt-BR" b="1" i="1" dirty="0">
+                <a:solidFill>
+                  <a:srgbClr val="7030A0"/>
+                </a:solidFill>
+              </a:rPr>
+              <a:t>contrário</a:t>
+            </a:r>
+            <a:r>
+              <a:rPr lang="pt-BR" dirty="0"/>
+              <a:t>?</a:t>
             </a:r>
           </a:p>
           <a:p>
@@ -6693,7 +7550,7 @@
         </p:nvSpPr>
         <p:spPr>
           <a:xfrm>
-            <a:off x="5788138" y="5120871"/>
+            <a:off x="5677301" y="4722821"/>
             <a:ext cx="1910443" cy="849086"/>
           </a:xfrm>
           <a:prstGeom prst="rect">
@@ -6746,7 +7603,7 @@
         </p:nvSpPr>
         <p:spPr>
           <a:xfrm>
-            <a:off x="4960139" y="4589285"/>
+            <a:off x="4849302" y="4191235"/>
             <a:ext cx="3524518" cy="461665"/>
           </a:xfrm>
           <a:prstGeom prst="rect">
@@ -6778,7 +7635,7 @@
         </p:nvCxnSpPr>
         <p:spPr>
           <a:xfrm>
-            <a:off x="4960138" y="5300486"/>
+            <a:off x="4849301" y="4902436"/>
             <a:ext cx="828000" cy="0"/>
           </a:xfrm>
           <a:prstGeom prst="straightConnector1">
@@ -6813,7 +7670,7 @@
         </p:nvCxnSpPr>
         <p:spPr>
           <a:xfrm>
-            <a:off x="4960138" y="5795786"/>
+            <a:off x="4849301" y="5397736"/>
             <a:ext cx="828000" cy="0"/>
           </a:xfrm>
           <a:prstGeom prst="straightConnector1">
@@ -6848,7 +7705,7 @@
             </p:nvSpPr>
             <p:spPr>
               <a:xfrm>
-                <a:off x="3920552" y="5001596"/>
+                <a:off x="3809715" y="4603546"/>
                 <a:ext cx="1039586" cy="584775"/>
               </a:xfrm>
               <a:prstGeom prst="rect">
@@ -6900,7 +7757,7 @@
             </p:nvSpPr>
             <p:spPr>
               <a:xfrm>
-                <a:off x="3920552" y="5001596"/>
+                <a:off x="3809715" y="4603546"/>
                 <a:ext cx="1039586" cy="584775"/>
               </a:xfrm>
               <a:prstGeom prst="rect">
@@ -6909,7 +7766,7 @@
               <a:blipFill>
                 <a:blip r:embed="rId4"/>
                 <a:stretch>
-                  <a:fillRect l="-3509" t="-5208" r="-2924" b="-10417"/>
+                  <a:fillRect l="-3529" t="-5208" r="-3529" b="-10417"/>
                 </a:stretch>
               </a:blipFill>
             </p:spPr>
@@ -6918,7 +7775,7 @@
               <a:lstStyle/>
               <a:p>
                 <a:r>
-                  <a:rPr lang="pt-BR">
+                  <a:rPr lang="en-US">
                     <a:noFill/>
                   </a:rPr>
                   <a:t> </a:t>
@@ -6938,7 +7795,7 @@
             </p:nvSpPr>
             <p:spPr>
               <a:xfrm>
-                <a:off x="3649847" y="5502506"/>
+                <a:off x="3539010" y="5104456"/>
                 <a:ext cx="1512176" cy="861774"/>
               </a:xfrm>
               <a:prstGeom prst="rect">
@@ -7019,7 +7876,7 @@
             </p:nvSpPr>
             <p:spPr>
               <a:xfrm>
-                <a:off x="3649847" y="5502506"/>
+                <a:off x="3539010" y="5104456"/>
                 <a:ext cx="1512176" cy="861774"/>
               </a:xfrm>
               <a:prstGeom prst="rect">
@@ -7028,7 +7885,7 @@
               <a:blipFill>
                 <a:blip r:embed="rId5"/>
                 <a:stretch>
-                  <a:fillRect t="-4255" b="-6383"/>
+                  <a:fillRect t="-3521" b="-6338"/>
                 </a:stretch>
               </a:blipFill>
             </p:spPr>
@@ -7037,7 +7894,7 @@
               <a:lstStyle/>
               <a:p>
                 <a:r>
-                  <a:rPr lang="pt-BR">
+                  <a:rPr lang="en-US">
                     <a:noFill/>
                   </a:rPr>
                   <a:t> </a:t>
@@ -7057,7 +7914,7 @@
         </p:nvCxnSpPr>
         <p:spPr>
           <a:xfrm>
-            <a:off x="7698581" y="5545414"/>
+            <a:off x="7587744" y="5147364"/>
             <a:ext cx="828000" cy="0"/>
           </a:xfrm>
           <a:prstGeom prst="straightConnector1">
@@ -7092,7 +7949,7 @@
             </p:nvSpPr>
             <p:spPr>
               <a:xfrm>
-                <a:off x="8514180" y="5097669"/>
+                <a:off x="8403343" y="4699619"/>
                 <a:ext cx="2712410" cy="861774"/>
               </a:xfrm>
               <a:prstGeom prst="rect">
@@ -7209,7 +8066,7 @@
             </p:nvSpPr>
             <p:spPr>
               <a:xfrm>
-                <a:off x="8514180" y="5097669"/>
+                <a:off x="8403343" y="4699619"/>
                 <a:ext cx="2712410" cy="861774"/>
               </a:xfrm>
               <a:prstGeom prst="rect">
@@ -7218,7 +8075,7 @@
               <a:blipFill>
                 <a:blip r:embed="rId6"/>
                 <a:stretch>
-                  <a:fillRect t="-3521" b="-6338"/>
+                  <a:fillRect t="-4255" b="-6383"/>
                 </a:stretch>
               </a:blipFill>
             </p:spPr>
@@ -7227,7 +8084,7 @@
               <a:lstStyle/>
               <a:p>
                 <a:r>
-                  <a:rPr lang="pt-BR">
+                  <a:rPr lang="en-US">
                     <a:noFill/>
                   </a:rPr>
                   <a:t> </a:t>
@@ -7245,7 +8102,7 @@
         </p:nvSpPr>
         <p:spPr>
           <a:xfrm>
-            <a:off x="5250429" y="6311826"/>
+            <a:off x="5139592" y="5913776"/>
             <a:ext cx="5720990" cy="369332"/>
           </a:xfrm>
           <a:prstGeom prst="rect">
@@ -7277,7 +8134,7 @@
         </p:nvCxnSpPr>
         <p:spPr>
           <a:xfrm>
-            <a:off x="4416473" y="6398694"/>
+            <a:off x="4305636" y="6000644"/>
             <a:ext cx="833956" cy="97798"/>
           </a:xfrm>
           <a:prstGeom prst="straightConnector1">
@@ -7313,7 +8170,7 @@
         </p:nvSpPr>
         <p:spPr>
           <a:xfrm>
-            <a:off x="9185121" y="4463756"/>
+            <a:off x="9074284" y="4065706"/>
             <a:ext cx="1169418" cy="422029"/>
           </a:xfrm>
           <a:prstGeom prst="wedgeRectCallout">
@@ -7369,7 +8226,7 @@
         </p:nvSpPr>
         <p:spPr>
           <a:xfrm>
-            <a:off x="3385440" y="4963416"/>
+            <a:off x="3274603" y="4565366"/>
             <a:ext cx="2062066" cy="1435278"/>
           </a:xfrm>
           <a:prstGeom prst="ellipse">
@@ -7421,7 +8278,7 @@
         </p:nvSpPr>
         <p:spPr>
           <a:xfrm>
-            <a:off x="1109609" y="4374407"/>
+            <a:off x="998772" y="3976357"/>
             <a:ext cx="2540238" cy="338554"/>
           </a:xfrm>
           <a:prstGeom prst="rect">
@@ -7468,7 +8325,1080 @@
 </p:sld>
 </file>
 
-<file path=ppt/slides/slide11.xml><?xml version="1.0" encoding="utf-8"?>
+<file path=ppt/slides/slide12.xml><?xml version="1.0" encoding="utf-8"?>
+<p:sld xmlns:a="http://schemas.openxmlformats.org/drawingml/2006/main" xmlns:r="http://schemas.openxmlformats.org/officeDocument/2006/relationships" xmlns:p="http://schemas.openxmlformats.org/presentationml/2006/main">
+  <p:cSld>
+    <p:spTree>
+      <p:nvGrpSpPr>
+        <p:cNvPr id="1" name="">
+          <a:extLst>
+            <a:ext uri="{FF2B5EF4-FFF2-40B4-BE49-F238E27FC236}">
+              <a16:creationId xmlns:a16="http://schemas.microsoft.com/office/drawing/2014/main" id="{62D85005-1B32-9E4E-9A4E-72F8E13E7647}"/>
+            </a:ext>
+          </a:extLst>
+        </p:cNvPr>
+        <p:cNvGrpSpPr/>
+        <p:nvPr/>
+      </p:nvGrpSpPr>
+      <p:grpSpPr>
+        <a:xfrm>
+          <a:off x="0" y="0"/>
+          <a:ext cx="0" cy="0"/>
+          <a:chOff x="0" y="0"/>
+          <a:chExt cx="0" cy="0"/>
+        </a:xfrm>
+      </p:grpSpPr>
+      <p:pic>
+        <p:nvPicPr>
+          <p:cNvPr id="30" name="Picture 2">
+            <a:extLst>
+              <a:ext uri="{FF2B5EF4-FFF2-40B4-BE49-F238E27FC236}">
+                <a16:creationId xmlns:a16="http://schemas.microsoft.com/office/drawing/2014/main" id="{2A798789-F197-2CA6-41E4-606EC3C7A815}"/>
+              </a:ext>
+            </a:extLst>
+          </p:cNvPr>
+          <p:cNvPicPr>
+            <a:picLocks noChangeAspect="1" noChangeArrowheads="1"/>
+          </p:cNvPicPr>
+          <p:nvPr/>
+        </p:nvPicPr>
+        <p:blipFill rotWithShape="1">
+          <a:blip r:embed="rId3">
+            <a:extLst>
+              <a:ext uri="{28A0092B-C50C-407E-A947-70E740481C1C}">
+                <a14:useLocalDpi xmlns:a14="http://schemas.microsoft.com/office/drawing/2010/main" val="0"/>
+              </a:ext>
+            </a:extLst>
+          </a:blip>
+          <a:srcRect l="616" r="1714"/>
+          <a:stretch/>
+        </p:blipFill>
+        <p:spPr bwMode="auto">
+          <a:xfrm>
+            <a:off x="900038" y="4132953"/>
+            <a:ext cx="2979222" cy="2095623"/>
+          </a:xfrm>
+          <a:prstGeom prst="rect">
+            <a:avLst/>
+          </a:prstGeom>
+          <a:noFill/>
+          <a:extLst>
+            <a:ext uri="{909E8E84-426E-40DD-AFC4-6F175D3DCCD1}">
+              <a14:hiddenFill xmlns:a14="http://schemas.microsoft.com/office/drawing/2010/main">
+                <a:solidFill>
+                  <a:srgbClr val="FFFFFF"/>
+                </a:solidFill>
+              </a14:hiddenFill>
+            </a:ext>
+          </a:extLst>
+        </p:spPr>
+      </p:pic>
+      <p:sp>
+        <p:nvSpPr>
+          <p:cNvPr id="2" name="Title 1">
+            <a:extLst>
+              <a:ext uri="{FF2B5EF4-FFF2-40B4-BE49-F238E27FC236}">
+                <a16:creationId xmlns:a16="http://schemas.microsoft.com/office/drawing/2014/main" id="{66045CBA-C738-370D-09C9-FAD80CB9E251}"/>
+              </a:ext>
+            </a:extLst>
+          </p:cNvPr>
+          <p:cNvSpPr>
+            <a:spLocks noGrp="1"/>
+          </p:cNvSpPr>
+          <p:nvPr>
+            <p:ph type="title"/>
+          </p:nvPr>
+        </p:nvSpPr>
+        <p:spPr/>
+        <p:txBody>
+          <a:bodyPr/>
+          <a:lstStyle/>
+          <a:p>
+            <a:r>
+              <a:rPr lang="pt-BR" dirty="0"/>
+              <a:t>O paradigma do aprendizado de máquina</a:t>
+            </a:r>
+          </a:p>
+        </p:txBody>
+      </p:sp>
+      <p:sp>
+        <p:nvSpPr>
+          <p:cNvPr id="3" name="Content Placeholder 2">
+            <a:extLst>
+              <a:ext uri="{FF2B5EF4-FFF2-40B4-BE49-F238E27FC236}">
+                <a16:creationId xmlns:a16="http://schemas.microsoft.com/office/drawing/2014/main" id="{C4F797B7-9248-DED8-FA47-663D1C7316EB}"/>
+              </a:ext>
+            </a:extLst>
+          </p:cNvPr>
+          <p:cNvSpPr>
+            <a:spLocks noGrp="1"/>
+          </p:cNvSpPr>
+          <p:nvPr>
+            <p:ph idx="1"/>
+          </p:nvPr>
+        </p:nvSpPr>
+        <p:spPr>
+          <a:xfrm>
+            <a:off x="838200" y="1825625"/>
+            <a:ext cx="11206316" cy="2692338"/>
+          </a:xfrm>
+        </p:spPr>
+        <p:txBody>
+          <a:bodyPr>
+            <a:normAutofit/>
+          </a:bodyPr>
+          <a:lstStyle/>
+          <a:p>
+            <a:r>
+              <a:rPr lang="pt-BR" dirty="0"/>
+              <a:t>Ou seja, </a:t>
+            </a:r>
+            <a:r>
+              <a:rPr lang="pt-BR" b="1" i="1" dirty="0">
+                <a:solidFill>
+                  <a:srgbClr val="00B050"/>
+                </a:solidFill>
+              </a:rPr>
+              <a:t>fornecer as </a:t>
+            </a:r>
+            <a:r>
+              <a:rPr lang="pt-BR" b="1" i="1" dirty="0">
+                <a:solidFill>
+                  <a:schemeClr val="accent1"/>
+                </a:solidFill>
+              </a:rPr>
+              <a:t>respostas e os dados (i.e., entradas) </a:t>
+            </a:r>
+            <a:r>
+              <a:rPr lang="pt-BR" b="1" i="1" dirty="0">
+                <a:solidFill>
+                  <a:srgbClr val="00B050"/>
+                </a:solidFill>
+              </a:rPr>
+              <a:t>a um computador e deixar que ele </a:t>
+            </a:r>
+            <a:r>
+              <a:rPr lang="pt-BR" b="1" i="1" dirty="0">
+                <a:solidFill>
+                  <a:srgbClr val="7030A0"/>
+                </a:solidFill>
+              </a:rPr>
+              <a:t>descubra</a:t>
+            </a:r>
+            <a:r>
+              <a:rPr lang="pt-BR" b="1" i="1" dirty="0">
+                <a:solidFill>
+                  <a:srgbClr val="00B050"/>
+                </a:solidFill>
+              </a:rPr>
+              <a:t> as regras </a:t>
+            </a:r>
+            <a:r>
+              <a:rPr lang="pt-BR" dirty="0"/>
+              <a:t>que geram as saídas.</a:t>
+            </a:r>
+          </a:p>
+          <a:p>
+            <a:r>
+              <a:rPr lang="pt-BR" dirty="0"/>
+              <a:t>Queremos que o computador </a:t>
+            </a:r>
+            <a:r>
+              <a:rPr lang="pt-BR" b="1" i="1" dirty="0">
+                <a:solidFill>
+                  <a:schemeClr val="accent2"/>
+                </a:solidFill>
+              </a:rPr>
+              <a:t>aprenda</a:t>
+            </a:r>
+            <a:r>
+              <a:rPr lang="pt-BR" dirty="0"/>
+              <a:t> o mapeamento das entradas nas saídas.</a:t>
+            </a:r>
+          </a:p>
+          <a:p>
+            <a:pPr lvl="1"/>
+            <a:endParaRPr lang="pt-BR" dirty="0"/>
+          </a:p>
+          <a:p>
+            <a:endParaRPr lang="pt-BR" dirty="0"/>
+          </a:p>
+        </p:txBody>
+      </p:sp>
+      <p:sp>
+        <p:nvSpPr>
+          <p:cNvPr id="13" name="Rectangle 12">
+            <a:extLst>
+              <a:ext uri="{FF2B5EF4-FFF2-40B4-BE49-F238E27FC236}">
+                <a16:creationId xmlns:a16="http://schemas.microsoft.com/office/drawing/2014/main" id="{7C18E33B-18B8-E068-FB37-BFE4BB0EA2BF}"/>
+              </a:ext>
+            </a:extLst>
+          </p:cNvPr>
+          <p:cNvSpPr/>
+          <p:nvPr/>
+        </p:nvSpPr>
+        <p:spPr>
+          <a:xfrm>
+            <a:off x="5915348" y="4668289"/>
+            <a:ext cx="1910443" cy="849086"/>
+          </a:xfrm>
+          <a:prstGeom prst="rect">
+            <a:avLst/>
+          </a:prstGeom>
+          <a:noFill/>
+          <a:ln>
+            <a:solidFill>
+              <a:schemeClr val="tx1"/>
+            </a:solidFill>
+          </a:ln>
+        </p:spPr>
+        <p:style>
+          <a:lnRef idx="2">
+            <a:schemeClr val="accent1">
+              <a:shade val="50000"/>
+            </a:schemeClr>
+          </a:lnRef>
+          <a:fillRef idx="1">
+            <a:schemeClr val="accent1"/>
+          </a:fillRef>
+          <a:effectRef idx="0">
+            <a:schemeClr val="accent1"/>
+          </a:effectRef>
+          <a:fontRef idx="minor">
+            <a:schemeClr val="lt1"/>
+          </a:fontRef>
+        </p:style>
+        <p:txBody>
+          <a:bodyPr rtlCol="0" anchor="ctr"/>
+          <a:lstStyle/>
+          <a:p>
+            <a:pPr algn="ctr"/>
+            <a:r>
+              <a:rPr lang="pt-BR" dirty="0">
+                <a:solidFill>
+                  <a:schemeClr val="tx1"/>
+                </a:solidFill>
+              </a:rPr>
+              <a:t>Computador</a:t>
+            </a:r>
+          </a:p>
+        </p:txBody>
+      </p:sp>
+      <p:sp>
+        <p:nvSpPr>
+          <p:cNvPr id="14" name="TextBox 13">
+            <a:extLst>
+              <a:ext uri="{FF2B5EF4-FFF2-40B4-BE49-F238E27FC236}">
+                <a16:creationId xmlns:a16="http://schemas.microsoft.com/office/drawing/2014/main" id="{A71E9CF5-FAA8-ECFD-A421-A75A9FFC7DDE}"/>
+              </a:ext>
+            </a:extLst>
+          </p:cNvPr>
+          <p:cNvSpPr txBox="1"/>
+          <p:nvPr/>
+        </p:nvSpPr>
+        <p:spPr>
+          <a:xfrm>
+            <a:off x="5087349" y="4136703"/>
+            <a:ext cx="3524518" cy="461665"/>
+          </a:xfrm>
+          <a:prstGeom prst="rect">
+            <a:avLst/>
+          </a:prstGeom>
+          <a:noFill/>
+        </p:spPr>
+        <p:txBody>
+          <a:bodyPr wrap="square" rtlCol="0">
+            <a:spAutoFit/>
+          </a:bodyPr>
+          <a:lstStyle/>
+          <a:p>
+            <a:pPr algn="ctr"/>
+            <a:r>
+              <a:rPr lang="pt-BR" sz="2400" b="1" dirty="0"/>
+              <a:t>Aprendizado de Máquina</a:t>
+            </a:r>
+          </a:p>
+        </p:txBody>
+      </p:sp>
+      <p:cxnSp>
+        <p:nvCxnSpPr>
+          <p:cNvPr id="15" name="Straight Arrow Connector 14">
+            <a:extLst>
+              <a:ext uri="{FF2B5EF4-FFF2-40B4-BE49-F238E27FC236}">
+                <a16:creationId xmlns:a16="http://schemas.microsoft.com/office/drawing/2014/main" id="{B4D97AA2-EACA-F9E9-B954-381B66C4F848}"/>
+              </a:ext>
+            </a:extLst>
+          </p:cNvPr>
+          <p:cNvCxnSpPr>
+            <a:cxnSpLocks/>
+          </p:cNvCxnSpPr>
+          <p:nvPr/>
+        </p:nvCxnSpPr>
+        <p:spPr>
+          <a:xfrm>
+            <a:off x="5087348" y="4847904"/>
+            <a:ext cx="828000" cy="0"/>
+          </a:xfrm>
+          <a:prstGeom prst="straightConnector1">
+            <a:avLst/>
+          </a:prstGeom>
+          <a:ln w="19050">
+            <a:tailEnd type="triangle"/>
+          </a:ln>
+        </p:spPr>
+        <p:style>
+          <a:lnRef idx="1">
+            <a:schemeClr val="accent1"/>
+          </a:lnRef>
+          <a:fillRef idx="0">
+            <a:schemeClr val="accent1"/>
+          </a:fillRef>
+          <a:effectRef idx="0">
+            <a:schemeClr val="accent1"/>
+          </a:effectRef>
+          <a:fontRef idx="minor">
+            <a:schemeClr val="tx1"/>
+          </a:fontRef>
+        </p:style>
+      </p:cxnSp>
+      <p:cxnSp>
+        <p:nvCxnSpPr>
+          <p:cNvPr id="16" name="Straight Arrow Connector 15">
+            <a:extLst>
+              <a:ext uri="{FF2B5EF4-FFF2-40B4-BE49-F238E27FC236}">
+                <a16:creationId xmlns:a16="http://schemas.microsoft.com/office/drawing/2014/main" id="{1E2E9B5E-BEFC-0330-7BDC-33B8C97689F4}"/>
+              </a:ext>
+            </a:extLst>
+          </p:cNvPr>
+          <p:cNvCxnSpPr>
+            <a:cxnSpLocks/>
+          </p:cNvCxnSpPr>
+          <p:nvPr/>
+        </p:nvCxnSpPr>
+        <p:spPr>
+          <a:xfrm>
+            <a:off x="5087348" y="5343204"/>
+            <a:ext cx="828000" cy="0"/>
+          </a:xfrm>
+          <a:prstGeom prst="straightConnector1">
+            <a:avLst/>
+          </a:prstGeom>
+          <a:ln w="19050">
+            <a:tailEnd type="triangle"/>
+          </a:ln>
+        </p:spPr>
+        <p:style>
+          <a:lnRef idx="1">
+            <a:schemeClr val="accent1"/>
+          </a:lnRef>
+          <a:fillRef idx="0">
+            <a:schemeClr val="accent1"/>
+          </a:fillRef>
+          <a:effectRef idx="0">
+            <a:schemeClr val="accent1"/>
+          </a:effectRef>
+          <a:fontRef idx="minor">
+            <a:schemeClr val="tx1"/>
+          </a:fontRef>
+        </p:style>
+      </p:cxnSp>
+      <mc:AlternateContent xmlns:mc="http://schemas.openxmlformats.org/markup-compatibility/2006" xmlns:a14="http://schemas.microsoft.com/office/drawing/2010/main">
+        <mc:Choice Requires="a14">
+          <p:sp>
+            <p:nvSpPr>
+              <p:cNvPr id="17" name="TextBox 16">
+                <a:extLst>
+                  <a:ext uri="{FF2B5EF4-FFF2-40B4-BE49-F238E27FC236}">
+                    <a16:creationId xmlns:a16="http://schemas.microsoft.com/office/drawing/2014/main" id="{7ED11556-F756-B72D-1A0B-5E2B87A6D121}"/>
+                  </a:ext>
+                </a:extLst>
+              </p:cNvPr>
+              <p:cNvSpPr txBox="1"/>
+              <p:nvPr/>
+            </p:nvSpPr>
+            <p:spPr>
+              <a:xfrm>
+                <a:off x="4047762" y="4549014"/>
+                <a:ext cx="1039586" cy="584775"/>
+              </a:xfrm>
+              <a:prstGeom prst="rect">
+                <a:avLst/>
+              </a:prstGeom>
+              <a:noFill/>
+            </p:spPr>
+            <p:txBody>
+              <a:bodyPr wrap="square" rtlCol="0">
+                <a:spAutoFit/>
+              </a:bodyPr>
+              <a:lstStyle/>
+              <a:p>
+                <a:pPr algn="ctr"/>
+                <a:r>
+                  <a:rPr lang="pt-BR" dirty="0"/>
+                  <a:t>Entradas</a:t>
+                </a:r>
+              </a:p>
+              <a:p>
+                <a:pPr algn="ctr"/>
+                <a:r>
+                  <a:rPr lang="pt-BR" sz="1400" dirty="0"/>
+                  <a:t>e.g., </a:t>
+                </a:r>
+                <a14:m>
+                  <m:oMath xmlns:m="http://schemas.openxmlformats.org/officeDocument/2006/math">
+                    <m:r>
+                      <a:rPr lang="pt-BR" sz="1400" i="1">
+                        <a:latin typeface="Cambria Math" panose="02040503050406030204" pitchFamily="18" charset="0"/>
+                      </a:rPr>
+                      <m:t>𝑥</m:t>
+                    </m:r>
+                  </m:oMath>
+                </a14:m>
+                <a:endParaRPr lang="pt-BR" sz="1400" dirty="0"/>
+              </a:p>
+            </p:txBody>
+          </p:sp>
+        </mc:Choice>
+        <mc:Fallback xmlns="">
+          <p:sp>
+            <p:nvSpPr>
+              <p:cNvPr id="17" name="TextBox 16">
+                <a:extLst>
+                  <a:ext uri="{FF2B5EF4-FFF2-40B4-BE49-F238E27FC236}">
+                    <a16:creationId xmlns:a16="http://schemas.microsoft.com/office/drawing/2014/main" id="{7ED11556-F756-B72D-1A0B-5E2B87A6D121}"/>
+                  </a:ext>
+                </a:extLst>
+              </p:cNvPr>
+              <p:cNvSpPr txBox="1">
+                <a:spLocks noRot="1" noChangeAspect="1" noMove="1" noResize="1" noEditPoints="1" noAdjustHandles="1" noChangeArrowheads="1" noChangeShapeType="1" noTextEdit="1"/>
+              </p:cNvSpPr>
+              <p:nvPr/>
+            </p:nvSpPr>
+            <p:spPr>
+              <a:xfrm>
+                <a:off x="4047762" y="4549014"/>
+                <a:ext cx="1039586" cy="584775"/>
+              </a:xfrm>
+              <a:prstGeom prst="rect">
+                <a:avLst/>
+              </a:prstGeom>
+              <a:blipFill>
+                <a:blip r:embed="rId4"/>
+                <a:stretch>
+                  <a:fillRect l="-3509" t="-5208" r="-2924" b="-10417"/>
+                </a:stretch>
+              </a:blipFill>
+            </p:spPr>
+            <p:txBody>
+              <a:bodyPr/>
+              <a:lstStyle/>
+              <a:p>
+                <a:r>
+                  <a:rPr lang="en-US">
+                    <a:noFill/>
+                  </a:rPr>
+                  <a:t> </a:t>
+                </a:r>
+              </a:p>
+            </p:txBody>
+          </p:sp>
+        </mc:Fallback>
+      </mc:AlternateContent>
+      <mc:AlternateContent xmlns:mc="http://schemas.openxmlformats.org/markup-compatibility/2006" xmlns:a14="http://schemas.microsoft.com/office/drawing/2010/main">
+        <mc:Choice Requires="a14">
+          <p:sp>
+            <p:nvSpPr>
+              <p:cNvPr id="18" name="TextBox 17">
+                <a:extLst>
+                  <a:ext uri="{FF2B5EF4-FFF2-40B4-BE49-F238E27FC236}">
+                    <a16:creationId xmlns:a16="http://schemas.microsoft.com/office/drawing/2014/main" id="{2EF112C0-FF90-B36E-77D0-7A72AFACB46C}"/>
+                  </a:ext>
+                </a:extLst>
+              </p:cNvPr>
+              <p:cNvSpPr txBox="1"/>
+              <p:nvPr/>
+            </p:nvSpPr>
+            <p:spPr>
+              <a:xfrm>
+                <a:off x="3777057" y="5049924"/>
+                <a:ext cx="1512176" cy="861774"/>
+              </a:xfrm>
+              <a:prstGeom prst="rect">
+                <a:avLst/>
+              </a:prstGeom>
+              <a:noFill/>
+            </p:spPr>
+            <p:txBody>
+              <a:bodyPr wrap="square" rtlCol="0">
+                <a:spAutoFit/>
+              </a:bodyPr>
+              <a:lstStyle/>
+              <a:p>
+                <a:pPr algn="ctr"/>
+                <a:r>
+                  <a:rPr lang="pt-BR" dirty="0"/>
+                  <a:t>Resultados esperados</a:t>
+                </a:r>
+              </a:p>
+              <a:p>
+                <a:pPr algn="ctr"/>
+                <a:r>
+                  <a:rPr lang="pt-BR" sz="1400" dirty="0"/>
+                  <a:t>e.g., </a:t>
+                </a:r>
+                <a14:m>
+                  <m:oMath xmlns:m="http://schemas.openxmlformats.org/officeDocument/2006/math">
+                    <m:r>
+                      <a:rPr lang="pt-BR" sz="1400" i="1">
+                        <a:latin typeface="Cambria Math" panose="02040503050406030204" pitchFamily="18" charset="0"/>
+                      </a:rPr>
+                      <m:t>𝑦</m:t>
+                    </m:r>
+                    <m:r>
+                      <a:rPr lang="pt-BR" sz="1400" i="1">
+                        <a:latin typeface="Cambria Math" panose="02040503050406030204" pitchFamily="18" charset="0"/>
+                      </a:rPr>
+                      <m:t>=</m:t>
+                    </m:r>
+                    <m:r>
+                      <a:rPr lang="pt-BR" sz="1400" i="1">
+                        <a:latin typeface="Cambria Math" panose="02040503050406030204" pitchFamily="18" charset="0"/>
+                      </a:rPr>
+                      <m:t>𝑓</m:t>
+                    </m:r>
+                    <m:d>
+                      <m:dPr>
+                        <m:ctrlPr>
+                          <a:rPr lang="pt-BR" sz="1400" i="1">
+                            <a:latin typeface="Cambria Math" panose="02040503050406030204" pitchFamily="18" charset="0"/>
+                          </a:rPr>
+                        </m:ctrlPr>
+                      </m:dPr>
+                      <m:e>
+                        <m:r>
+                          <a:rPr lang="pt-BR" sz="1400" i="1">
+                            <a:latin typeface="Cambria Math" panose="02040503050406030204" pitchFamily="18" charset="0"/>
+                          </a:rPr>
+                          <m:t>𝑥</m:t>
+                        </m:r>
+                      </m:e>
+                    </m:d>
+                  </m:oMath>
+                </a14:m>
+                <a:endParaRPr lang="pt-BR" dirty="0"/>
+              </a:p>
+            </p:txBody>
+          </p:sp>
+        </mc:Choice>
+        <mc:Fallback xmlns="">
+          <p:sp>
+            <p:nvSpPr>
+              <p:cNvPr id="18" name="TextBox 17">
+                <a:extLst>
+                  <a:ext uri="{FF2B5EF4-FFF2-40B4-BE49-F238E27FC236}">
+                    <a16:creationId xmlns:a16="http://schemas.microsoft.com/office/drawing/2014/main" id="{2EF112C0-FF90-B36E-77D0-7A72AFACB46C}"/>
+                  </a:ext>
+                </a:extLst>
+              </p:cNvPr>
+              <p:cNvSpPr txBox="1">
+                <a:spLocks noRot="1" noChangeAspect="1" noMove="1" noResize="1" noEditPoints="1" noAdjustHandles="1" noChangeArrowheads="1" noChangeShapeType="1" noTextEdit="1"/>
+              </p:cNvSpPr>
+              <p:nvPr/>
+            </p:nvSpPr>
+            <p:spPr>
+              <a:xfrm>
+                <a:off x="3777057" y="5049924"/>
+                <a:ext cx="1512176" cy="861774"/>
+              </a:xfrm>
+              <a:prstGeom prst="rect">
+                <a:avLst/>
+              </a:prstGeom>
+              <a:blipFill>
+                <a:blip r:embed="rId5"/>
+                <a:stretch>
+                  <a:fillRect t="-3521" b="-6338"/>
+                </a:stretch>
+              </a:blipFill>
+            </p:spPr>
+            <p:txBody>
+              <a:bodyPr/>
+              <a:lstStyle/>
+              <a:p>
+                <a:r>
+                  <a:rPr lang="en-US">
+                    <a:noFill/>
+                  </a:rPr>
+                  <a:t> </a:t>
+                </a:r>
+              </a:p>
+            </p:txBody>
+          </p:sp>
+        </mc:Fallback>
+      </mc:AlternateContent>
+      <p:cxnSp>
+        <p:nvCxnSpPr>
+          <p:cNvPr id="19" name="Straight Arrow Connector 18">
+            <a:extLst>
+              <a:ext uri="{FF2B5EF4-FFF2-40B4-BE49-F238E27FC236}">
+                <a16:creationId xmlns:a16="http://schemas.microsoft.com/office/drawing/2014/main" id="{36C97953-7515-F8C7-0838-4174E6CE513C}"/>
+              </a:ext>
+            </a:extLst>
+          </p:cNvPr>
+          <p:cNvCxnSpPr>
+            <a:cxnSpLocks/>
+          </p:cNvCxnSpPr>
+          <p:nvPr/>
+        </p:nvCxnSpPr>
+        <p:spPr>
+          <a:xfrm>
+            <a:off x="7825791" y="5092832"/>
+            <a:ext cx="828000" cy="0"/>
+          </a:xfrm>
+          <a:prstGeom prst="straightConnector1">
+            <a:avLst/>
+          </a:prstGeom>
+          <a:ln w="19050">
+            <a:tailEnd type="triangle"/>
+          </a:ln>
+        </p:spPr>
+        <p:style>
+          <a:lnRef idx="1">
+            <a:schemeClr val="accent1"/>
+          </a:lnRef>
+          <a:fillRef idx="0">
+            <a:schemeClr val="accent1"/>
+          </a:fillRef>
+          <a:effectRef idx="0">
+            <a:schemeClr val="accent1"/>
+          </a:effectRef>
+          <a:fontRef idx="minor">
+            <a:schemeClr val="tx1"/>
+          </a:fontRef>
+        </p:style>
+      </p:cxnSp>
+      <mc:AlternateContent xmlns:mc="http://schemas.openxmlformats.org/markup-compatibility/2006" xmlns:a14="http://schemas.microsoft.com/office/drawing/2010/main">
+        <mc:Choice Requires="a14">
+          <p:sp>
+            <p:nvSpPr>
+              <p:cNvPr id="20" name="TextBox 19">
+                <a:extLst>
+                  <a:ext uri="{FF2B5EF4-FFF2-40B4-BE49-F238E27FC236}">
+                    <a16:creationId xmlns:a16="http://schemas.microsoft.com/office/drawing/2014/main" id="{C3F935D0-3700-4C3E-82B0-AF9AA22A9C69}"/>
+                  </a:ext>
+                </a:extLst>
+              </p:cNvPr>
+              <p:cNvSpPr txBox="1"/>
+              <p:nvPr/>
+            </p:nvSpPr>
+            <p:spPr>
+              <a:xfrm>
+                <a:off x="8641390" y="4645087"/>
+                <a:ext cx="2712410" cy="861774"/>
+              </a:xfrm>
+              <a:prstGeom prst="rect">
+                <a:avLst/>
+              </a:prstGeom>
+              <a:noFill/>
+            </p:spPr>
+            <p:txBody>
+              <a:bodyPr wrap="square" rtlCol="0">
+                <a:spAutoFit/>
+              </a:bodyPr>
+              <a:lstStyle/>
+              <a:p>
+                <a:pPr algn="ctr"/>
+                <a:r>
+                  <a:rPr lang="pt-BR" dirty="0"/>
+                  <a:t>Programa = </a:t>
+                </a:r>
+                <a:r>
+                  <a:rPr lang="pt-BR" b="1" dirty="0">
+                    <a:solidFill>
+                      <a:srgbClr val="FF0000"/>
+                    </a:solidFill>
+                  </a:rPr>
+                  <a:t>Modelo de Aprendizado de Máquina</a:t>
+                </a:r>
+              </a:p>
+              <a:p>
+                <a:pPr algn="ctr"/>
+                <a:r>
+                  <a:rPr lang="pt-BR" sz="1400" dirty="0" err="1"/>
+                  <a:t>e.</a:t>
+                </a:r>
+                <a:r>
+                  <a:rPr lang="pt-BR" sz="1400" dirty="0"/>
+                  <a:t>g., </a:t>
+                </a:r>
+                <a14:m>
+                  <m:oMath xmlns:m="http://schemas.openxmlformats.org/officeDocument/2006/math">
+                    <m:r>
+                      <a:rPr lang="pt-BR" sz="1400" i="1">
+                        <a:latin typeface="Cambria Math" panose="02040503050406030204" pitchFamily="18" charset="0"/>
+                      </a:rPr>
+                      <m:t>𝑦</m:t>
+                    </m:r>
+                    <m:r>
+                      <a:rPr lang="pt-BR" sz="1400" i="1">
+                        <a:latin typeface="Cambria Math" panose="02040503050406030204" pitchFamily="18" charset="0"/>
+                      </a:rPr>
+                      <m:t>=</m:t>
+                    </m:r>
+                    <m:r>
+                      <a:rPr lang="pt-BR" sz="1400" i="1">
+                        <a:latin typeface="Cambria Math" panose="02040503050406030204" pitchFamily="18" charset="0"/>
+                      </a:rPr>
+                      <m:t>𝑓</m:t>
+                    </m:r>
+                    <m:d>
+                      <m:dPr>
+                        <m:ctrlPr>
+                          <a:rPr lang="pt-BR" sz="1400" i="1">
+                            <a:latin typeface="Cambria Math" panose="02040503050406030204" pitchFamily="18" charset="0"/>
+                          </a:rPr>
+                        </m:ctrlPr>
+                      </m:dPr>
+                      <m:e>
+                        <m:r>
+                          <a:rPr lang="pt-BR" sz="1400" i="1">
+                            <a:latin typeface="Cambria Math" panose="02040503050406030204" pitchFamily="18" charset="0"/>
+                          </a:rPr>
+                          <m:t>𝑥</m:t>
+                        </m:r>
+                      </m:e>
+                    </m:d>
+                    <m:r>
+                      <a:rPr lang="pt-BR" sz="1400" i="1">
+                        <a:latin typeface="Cambria Math" panose="02040503050406030204" pitchFamily="18" charset="0"/>
+                      </a:rPr>
+                      <m:t>=</m:t>
+                    </m:r>
+                    <m:r>
+                      <a:rPr lang="pt-BR" sz="1400" i="1">
+                        <a:latin typeface="Cambria Math" panose="02040503050406030204" pitchFamily="18" charset="0"/>
+                      </a:rPr>
+                      <m:t>𝑎</m:t>
+                    </m:r>
+                    <m:r>
+                      <a:rPr lang="pt-BR" sz="1400" i="1">
+                        <a:latin typeface="Cambria Math" panose="02040503050406030204" pitchFamily="18" charset="0"/>
+                      </a:rPr>
+                      <m:t>+</m:t>
+                    </m:r>
+                    <m:r>
+                      <a:rPr lang="pt-BR" sz="1400" i="1">
+                        <a:latin typeface="Cambria Math" panose="02040503050406030204" pitchFamily="18" charset="0"/>
+                      </a:rPr>
+                      <m:t>𝑏𝑥</m:t>
+                    </m:r>
+                  </m:oMath>
+                </a14:m>
+                <a:endParaRPr lang="pt-BR" sz="1400" dirty="0"/>
+              </a:p>
+            </p:txBody>
+          </p:sp>
+        </mc:Choice>
+        <mc:Fallback xmlns="">
+          <p:sp>
+            <p:nvSpPr>
+              <p:cNvPr id="20" name="TextBox 19">
+                <a:extLst>
+                  <a:ext uri="{FF2B5EF4-FFF2-40B4-BE49-F238E27FC236}">
+                    <a16:creationId xmlns:a16="http://schemas.microsoft.com/office/drawing/2014/main" id="{C3F935D0-3700-4C3E-82B0-AF9AA22A9C69}"/>
+                  </a:ext>
+                </a:extLst>
+              </p:cNvPr>
+              <p:cNvSpPr txBox="1">
+                <a:spLocks noRot="1" noChangeAspect="1" noMove="1" noResize="1" noEditPoints="1" noAdjustHandles="1" noChangeArrowheads="1" noChangeShapeType="1" noTextEdit="1"/>
+              </p:cNvSpPr>
+              <p:nvPr/>
+            </p:nvSpPr>
+            <p:spPr>
+              <a:xfrm>
+                <a:off x="8641390" y="4645087"/>
+                <a:ext cx="2712410" cy="861774"/>
+              </a:xfrm>
+              <a:prstGeom prst="rect">
+                <a:avLst/>
+              </a:prstGeom>
+              <a:blipFill>
+                <a:blip r:embed="rId6"/>
+                <a:stretch>
+                  <a:fillRect t="-4255" b="-6383"/>
+                </a:stretch>
+              </a:blipFill>
+            </p:spPr>
+            <p:txBody>
+              <a:bodyPr/>
+              <a:lstStyle/>
+              <a:p>
+                <a:r>
+                  <a:rPr lang="en-US">
+                    <a:noFill/>
+                  </a:rPr>
+                  <a:t> </a:t>
+                </a:r>
+              </a:p>
+            </p:txBody>
+          </p:sp>
+        </mc:Fallback>
+      </mc:AlternateContent>
+      <p:sp>
+        <p:nvSpPr>
+          <p:cNvPr id="6" name="Retângulo 5">
+            <a:extLst>
+              <a:ext uri="{FF2B5EF4-FFF2-40B4-BE49-F238E27FC236}">
+                <a16:creationId xmlns:a16="http://schemas.microsoft.com/office/drawing/2014/main" id="{F5F94C9C-D419-2356-007E-4B351F599BE9}"/>
+              </a:ext>
+            </a:extLst>
+          </p:cNvPr>
+          <p:cNvSpPr/>
+          <p:nvPr/>
+        </p:nvSpPr>
+        <p:spPr>
+          <a:xfrm>
+            <a:off x="5377639" y="5859244"/>
+            <a:ext cx="5720990" cy="369332"/>
+          </a:xfrm>
+          <a:prstGeom prst="rect">
+            <a:avLst/>
+          </a:prstGeom>
+        </p:spPr>
+        <p:txBody>
+          <a:bodyPr wrap="square">
+            <a:spAutoFit/>
+          </a:bodyPr>
+          <a:lstStyle/>
+          <a:p>
+            <a:r>
+              <a:rPr lang="pt-BR" b="1" i="1" dirty="0"/>
+              <a:t>Experiências prévias = conjunto de dados de treinamento.</a:t>
+            </a:r>
+            <a:endParaRPr lang="en-US" b="1" i="1" dirty="0"/>
+          </a:p>
+        </p:txBody>
+      </p:sp>
+      <p:cxnSp>
+        <p:nvCxnSpPr>
+          <p:cNvPr id="24" name="Conector de seta reta 23">
+            <a:extLst>
+              <a:ext uri="{FF2B5EF4-FFF2-40B4-BE49-F238E27FC236}">
+                <a16:creationId xmlns:a16="http://schemas.microsoft.com/office/drawing/2014/main" id="{F78EF055-7D28-8A48-536A-55C34F3B1416}"/>
+              </a:ext>
+            </a:extLst>
+          </p:cNvPr>
+          <p:cNvCxnSpPr>
+            <a:stCxn id="21" idx="4"/>
+            <a:endCxn id="6" idx="1"/>
+          </p:cNvCxnSpPr>
+          <p:nvPr/>
+        </p:nvCxnSpPr>
+        <p:spPr>
+          <a:xfrm>
+            <a:off x="4543683" y="5946112"/>
+            <a:ext cx="833956" cy="97798"/>
+          </a:xfrm>
+          <a:prstGeom prst="straightConnector1">
+            <a:avLst/>
+          </a:prstGeom>
+          <a:ln w="28575">
+            <a:solidFill>
+              <a:srgbClr val="FF0000"/>
+            </a:solidFill>
+            <a:tailEnd type="triangle"/>
+          </a:ln>
+        </p:spPr>
+        <p:style>
+          <a:lnRef idx="1">
+            <a:schemeClr val="accent1"/>
+          </a:lnRef>
+          <a:fillRef idx="0">
+            <a:schemeClr val="accent1"/>
+          </a:fillRef>
+          <a:effectRef idx="0">
+            <a:schemeClr val="accent1"/>
+          </a:effectRef>
+          <a:fontRef idx="minor">
+            <a:schemeClr val="tx1"/>
+          </a:fontRef>
+        </p:style>
+      </p:cxnSp>
+      <p:sp>
+        <p:nvSpPr>
+          <p:cNvPr id="22" name="Texto explicativo retangular 21">
+            <a:extLst>
+              <a:ext uri="{FF2B5EF4-FFF2-40B4-BE49-F238E27FC236}">
+                <a16:creationId xmlns:a16="http://schemas.microsoft.com/office/drawing/2014/main" id="{86F3C10C-53D1-F387-2574-A92D9B8E35F9}"/>
+              </a:ext>
+            </a:extLst>
+          </p:cNvPr>
+          <p:cNvSpPr/>
+          <p:nvPr/>
+        </p:nvSpPr>
+        <p:spPr>
+          <a:xfrm>
+            <a:off x="9312331" y="4011174"/>
+            <a:ext cx="1169418" cy="422029"/>
+          </a:xfrm>
+          <a:prstGeom prst="wedgeRectCallout">
+            <a:avLst>
+              <a:gd name="adj1" fmla="val -44165"/>
+              <a:gd name="adj2" fmla="val 111702"/>
+            </a:avLst>
+          </a:prstGeom>
+          <a:noFill/>
+        </p:spPr>
+        <p:style>
+          <a:lnRef idx="2">
+            <a:schemeClr val="accent1">
+              <a:shade val="50000"/>
+            </a:schemeClr>
+          </a:lnRef>
+          <a:fillRef idx="1">
+            <a:schemeClr val="accent1"/>
+          </a:fillRef>
+          <a:effectRef idx="0">
+            <a:schemeClr val="accent1"/>
+          </a:effectRef>
+          <a:fontRef idx="minor">
+            <a:schemeClr val="lt1"/>
+          </a:fontRef>
+        </p:style>
+        <p:txBody>
+          <a:bodyPr rtlCol="0" anchor="ctr"/>
+          <a:lstStyle/>
+          <a:p>
+            <a:pPr algn="ctr"/>
+            <a:r>
+              <a:rPr lang="pt-BR" sz="1400" dirty="0">
+                <a:solidFill>
+                  <a:schemeClr val="tx1"/>
+                </a:solidFill>
+              </a:rPr>
+              <a:t>Resultado do treinamento</a:t>
+            </a:r>
+            <a:endParaRPr lang="en-US" sz="1400" dirty="0">
+              <a:solidFill>
+                <a:schemeClr val="tx1"/>
+              </a:solidFill>
+            </a:endParaRPr>
+          </a:p>
+        </p:txBody>
+      </p:sp>
+      <p:sp>
+        <p:nvSpPr>
+          <p:cNvPr id="21" name="Elipse 20">
+            <a:extLst>
+              <a:ext uri="{FF2B5EF4-FFF2-40B4-BE49-F238E27FC236}">
+                <a16:creationId xmlns:a16="http://schemas.microsoft.com/office/drawing/2014/main" id="{87ADF499-24DE-B950-5282-2215225F355E}"/>
+              </a:ext>
+            </a:extLst>
+          </p:cNvPr>
+          <p:cNvSpPr/>
+          <p:nvPr/>
+        </p:nvSpPr>
+        <p:spPr>
+          <a:xfrm>
+            <a:off x="3512650" y="4510834"/>
+            <a:ext cx="2062066" cy="1435278"/>
+          </a:xfrm>
+          <a:prstGeom prst="ellipse">
+            <a:avLst/>
+          </a:prstGeom>
+          <a:noFill/>
+          <a:ln w="28575">
+            <a:solidFill>
+              <a:srgbClr val="FF0000"/>
+            </a:solidFill>
+          </a:ln>
+        </p:spPr>
+        <p:style>
+          <a:lnRef idx="2">
+            <a:schemeClr val="accent1">
+              <a:shade val="50000"/>
+            </a:schemeClr>
+          </a:lnRef>
+          <a:fillRef idx="1">
+            <a:schemeClr val="accent1"/>
+          </a:fillRef>
+          <a:effectRef idx="0">
+            <a:schemeClr val="accent1"/>
+          </a:effectRef>
+          <a:fontRef idx="minor">
+            <a:schemeClr val="lt1"/>
+          </a:fontRef>
+        </p:style>
+        <p:txBody>
+          <a:bodyPr rtlCol="0" anchor="ctr"/>
+          <a:lstStyle/>
+          <a:p>
+            <a:pPr algn="ctr"/>
+            <a:endParaRPr lang="en-US"/>
+          </a:p>
+        </p:txBody>
+      </p:sp>
+      <p:sp>
+        <p:nvSpPr>
+          <p:cNvPr id="4" name="CaixaDeTexto 3">
+            <a:extLst>
+              <a:ext uri="{FF2B5EF4-FFF2-40B4-BE49-F238E27FC236}">
+                <a16:creationId xmlns:a16="http://schemas.microsoft.com/office/drawing/2014/main" id="{287466E0-F4F4-52E2-A9AA-A63EE3DCCD2F}"/>
+              </a:ext>
+            </a:extLst>
+          </p:cNvPr>
+          <p:cNvSpPr txBox="1"/>
+          <p:nvPr/>
+        </p:nvSpPr>
+        <p:spPr>
+          <a:xfrm>
+            <a:off x="1236819" y="3921825"/>
+            <a:ext cx="2540238" cy="338554"/>
+          </a:xfrm>
+          <a:prstGeom prst="rect">
+            <a:avLst/>
+          </a:prstGeom>
+          <a:noFill/>
+        </p:spPr>
+        <p:txBody>
+          <a:bodyPr wrap="square" rtlCol="0">
+            <a:spAutoFit/>
+          </a:bodyPr>
+          <a:lstStyle/>
+          <a:p>
+            <a:pPr algn="ctr"/>
+            <a:r>
+              <a:rPr lang="pt-BR" sz="1600" b="1" dirty="0" err="1">
+                <a:solidFill>
+                  <a:srgbClr val="7030A0"/>
+                </a:solidFill>
+              </a:rPr>
+              <a:t>Paleteria</a:t>
+            </a:r>
+            <a:r>
+              <a:rPr lang="pt-BR" sz="1600" b="1" dirty="0">
+                <a:solidFill>
+                  <a:srgbClr val="7030A0"/>
+                </a:solidFill>
+              </a:rPr>
+              <a:t> Mexicana</a:t>
+            </a:r>
+          </a:p>
+        </p:txBody>
+      </p:sp>
+    </p:spTree>
+    <p:extLst>
+      <p:ext uri="{BB962C8B-B14F-4D97-AF65-F5344CB8AC3E}">
+        <p14:creationId xmlns:p14="http://schemas.microsoft.com/office/powerpoint/2010/main" val="1881333170"/>
+      </p:ext>
+    </p:extLst>
+  </p:cSld>
+  <p:clrMapOvr>
+    <a:masterClrMapping/>
+  </p:clrMapOvr>
+</p:sld>
+</file>
+
+<file path=ppt/slides/slide13.xml><?xml version="1.0" encoding="utf-8"?>
 <p:sld xmlns:a="http://schemas.openxmlformats.org/drawingml/2006/main" xmlns:r="http://schemas.openxmlformats.org/officeDocument/2006/relationships" xmlns:p="http://schemas.openxmlformats.org/presentationml/2006/main">
   <p:cSld>
     <p:spTree>
@@ -7600,10 +9530,10 @@
             <a:r>
               <a:rPr lang="pt-BR" b="1" i="1" dirty="0">
                 <a:solidFill>
-                  <a:srgbClr val="00B050"/>
+                  <a:schemeClr val="accent2"/>
                 </a:solidFill>
               </a:rPr>
-              <a:t>épocas</a:t>
+              <a:t>iterações</a:t>
             </a:r>
             <a:r>
               <a:rPr lang="pt-BR" dirty="0"/>
@@ -7646,18 +9576,15 @@
             <a:r>
               <a:rPr lang="pt-BR" b="1" i="1" dirty="0">
                 <a:solidFill>
-                  <a:srgbClr val="00B050"/>
+                  <a:srgbClr val="7030A0"/>
                 </a:solidFill>
               </a:rPr>
-              <a:t>mapeamento</a:t>
+              <a:t>bom mapeamento</a:t>
             </a:r>
             <a:r>
               <a:rPr lang="pt-BR" dirty="0"/>
               <a:t> das entradas nas saídas esperadas.</a:t>
             </a:r>
-          </a:p>
-          <a:p>
-            <a:endParaRPr lang="pt-BR" dirty="0"/>
           </a:p>
         </p:txBody>
       </p:sp>
@@ -8405,7 +10332,7 @@
 </p:sld>
 </file>
 
-<file path=ppt/slides/slide12.xml><?xml version="1.0" encoding="utf-8"?>
+<file path=ppt/slides/slide14.xml><?xml version="1.0" encoding="utf-8"?>
 <p:sld xmlns:a="http://schemas.openxmlformats.org/drawingml/2006/main" xmlns:r="http://schemas.openxmlformats.org/officeDocument/2006/relationships" xmlns:p="http://schemas.openxmlformats.org/presentationml/2006/main">
   <p:cSld>
     <p:spTree>
@@ -8468,8 +10395,8 @@
         </p:nvSpPr>
         <p:spPr>
           <a:xfrm>
-            <a:off x="6686550" y="1825625"/>
-            <a:ext cx="5391149" cy="5032376"/>
+            <a:off x="6834909" y="1825625"/>
+            <a:ext cx="5242790" cy="5032376"/>
           </a:xfrm>
         </p:spPr>
         <p:txBody>
@@ -8488,11 +10415,11 @@
                   <a:srgbClr val="00B050"/>
                 </a:solidFill>
               </a:rPr>
-              <a:t>coletar informações de sensores</a:t>
+              <a:t>coletar informações de diferentes sensores</a:t>
             </a:r>
             <a:r>
               <a:rPr lang="pt-BR" dirty="0"/>
-              <a:t> diferentes e </a:t>
+              <a:t> (i.e., entradas) e </a:t>
             </a:r>
             <a:r>
               <a:rPr lang="pt-BR" b="1" i="1" dirty="0">
@@ -8505,32 +10432,6 @@
             <a:r>
               <a:rPr lang="pt-BR" dirty="0"/>
               <a:t> (i.e., saídas esperadas) com a atividade do usuário. </a:t>
-            </a:r>
-          </a:p>
-          <a:p>
-            <a:r>
-              <a:rPr lang="pt-BR" dirty="0"/>
-              <a:t>Usando este </a:t>
-            </a:r>
-            <a:r>
-              <a:rPr lang="pt-BR" b="1" i="1" dirty="0"/>
-              <a:t>conjunto de dados </a:t>
-            </a:r>
-            <a:r>
-              <a:rPr lang="pt-BR" dirty="0"/>
-              <a:t>(i.e., dados dos sensores e rótulos), o computador pode</a:t>
-            </a:r>
-            <a:r>
-              <a:rPr lang="pt-BR" b="1" i="1" dirty="0">
-                <a:solidFill>
-                  <a:srgbClr val="00B050"/>
-                </a:solidFill>
-              </a:rPr>
-              <a:t> descobrir regras que identificam as atividades</a:t>
-            </a:r>
-            <a:r>
-              <a:rPr lang="pt-BR" dirty="0"/>
-              <a:t>: caminhar, correr, pedalar e até mesmo jogar golfe.</a:t>
             </a:r>
           </a:p>
         </p:txBody>
@@ -8565,66 +10466,6 @@
           </a:prstGeom>
         </p:spPr>
       </p:pic>
-      <p:sp>
-        <p:nvSpPr>
-          <p:cNvPr id="6" name="CaixaDeTexto 5">
-            <a:extLst>
-              <a:ext uri="{FF2B5EF4-FFF2-40B4-BE49-F238E27FC236}">
-                <a16:creationId xmlns:a16="http://schemas.microsoft.com/office/drawing/2014/main" id="{61D66C21-5AB6-6D20-EC2A-FEC07891C0EB}"/>
-              </a:ext>
-            </a:extLst>
-          </p:cNvPr>
-          <p:cNvSpPr txBox="1"/>
-          <p:nvPr/>
-        </p:nvSpPr>
-        <p:spPr>
-          <a:xfrm>
-            <a:off x="838200" y="4943475"/>
-            <a:ext cx="5079715" cy="923330"/>
-          </a:xfrm>
-          <a:prstGeom prst="rect">
-            <a:avLst/>
-          </a:prstGeom>
-          <a:noFill/>
-        </p:spPr>
-        <p:txBody>
-          <a:bodyPr wrap="square" rtlCol="0">
-            <a:spAutoFit/>
-          </a:bodyPr>
-          <a:lstStyle/>
-          <a:p>
-            <a:pPr algn="ctr"/>
-            <a:r>
-              <a:rPr lang="pt-BR" dirty="0"/>
-              <a:t>O computador aprende, através do seu treinamento, </a:t>
-            </a:r>
-            <a:r>
-              <a:rPr lang="pt-BR" b="1" i="1" dirty="0">
-                <a:solidFill>
-                  <a:srgbClr val="00B050"/>
-                </a:solidFill>
-              </a:rPr>
-              <a:t>padrões</a:t>
-            </a:r>
-            <a:r>
-              <a:rPr lang="pt-BR" dirty="0"/>
-              <a:t> nos dados de diferentes sensores que </a:t>
-            </a:r>
-            <a:r>
-              <a:rPr lang="pt-BR" b="1" i="1" dirty="0">
-                <a:solidFill>
-                  <a:srgbClr val="00B050"/>
-                </a:solidFill>
-              </a:rPr>
-              <a:t>podem ser mapeados nas atividades</a:t>
-            </a:r>
-            <a:r>
-              <a:rPr lang="pt-BR" dirty="0"/>
-              <a:t>.</a:t>
-            </a:r>
-          </a:p>
-        </p:txBody>
-      </p:sp>
     </p:spTree>
     <p:extLst>
       <p:ext uri="{BB962C8B-B14F-4D97-AF65-F5344CB8AC3E}">
@@ -8638,7 +10479,393 @@
 </p:sld>
 </file>
 
-<file path=ppt/slides/slide13.xml><?xml version="1.0" encoding="utf-8"?>
+<file path=ppt/slides/slide15.xml><?xml version="1.0" encoding="utf-8"?>
+<p:sld xmlns:a="http://schemas.openxmlformats.org/drawingml/2006/main" xmlns:r="http://schemas.openxmlformats.org/officeDocument/2006/relationships" xmlns:p="http://schemas.openxmlformats.org/presentationml/2006/main">
+  <p:cSld>
+    <p:spTree>
+      <p:nvGrpSpPr>
+        <p:cNvPr id="1" name="">
+          <a:extLst>
+            <a:ext uri="{FF2B5EF4-FFF2-40B4-BE49-F238E27FC236}">
+              <a16:creationId xmlns:a16="http://schemas.microsoft.com/office/drawing/2014/main" id="{D5C065E5-8F45-1BD5-AF0D-8C6545D1B062}"/>
+            </a:ext>
+          </a:extLst>
+        </p:cNvPr>
+        <p:cNvGrpSpPr/>
+        <p:nvPr/>
+      </p:nvGrpSpPr>
+      <p:grpSpPr>
+        <a:xfrm>
+          <a:off x="0" y="0"/>
+          <a:ext cx="0" cy="0"/>
+          <a:chOff x="0" y="0"/>
+          <a:chExt cx="0" cy="0"/>
+        </a:xfrm>
+      </p:grpSpPr>
+      <p:sp>
+        <p:nvSpPr>
+          <p:cNvPr id="2" name="Título 1">
+            <a:extLst>
+              <a:ext uri="{FF2B5EF4-FFF2-40B4-BE49-F238E27FC236}">
+                <a16:creationId xmlns:a16="http://schemas.microsoft.com/office/drawing/2014/main" id="{3FB668D9-FA22-5459-A7EF-537ACE788125}"/>
+              </a:ext>
+            </a:extLst>
+          </p:cNvPr>
+          <p:cNvSpPr>
+            <a:spLocks noGrp="1"/>
+          </p:cNvSpPr>
+          <p:nvPr>
+            <p:ph type="title"/>
+          </p:nvPr>
+        </p:nvSpPr>
+        <p:spPr/>
+        <p:txBody>
+          <a:bodyPr/>
+          <a:lstStyle/>
+          <a:p>
+            <a:r>
+              <a:rPr lang="pt-BR" dirty="0"/>
+              <a:t>O paradigma do aprendizado de máquina</a:t>
+            </a:r>
+          </a:p>
+        </p:txBody>
+      </p:sp>
+      <p:sp>
+        <p:nvSpPr>
+          <p:cNvPr id="3" name="Espaço Reservado para Conteúdo 2">
+            <a:extLst>
+              <a:ext uri="{FF2B5EF4-FFF2-40B4-BE49-F238E27FC236}">
+                <a16:creationId xmlns:a16="http://schemas.microsoft.com/office/drawing/2014/main" id="{FE2F7E17-6357-BAA8-6A6C-7A9D9BF46E85}"/>
+              </a:ext>
+            </a:extLst>
+          </p:cNvPr>
+          <p:cNvSpPr>
+            <a:spLocks noGrp="1"/>
+          </p:cNvSpPr>
+          <p:nvPr>
+            <p:ph idx="1"/>
+          </p:nvPr>
+        </p:nvSpPr>
+        <p:spPr>
+          <a:xfrm>
+            <a:off x="6997984" y="1825625"/>
+            <a:ext cx="5079715" cy="5032376"/>
+          </a:xfrm>
+        </p:spPr>
+        <p:txBody>
+          <a:bodyPr>
+            <a:normAutofit/>
+          </a:bodyPr>
+          <a:lstStyle/>
+          <a:p>
+            <a:r>
+              <a:rPr lang="pt-BR" dirty="0"/>
+              <a:t>Usando este </a:t>
+            </a:r>
+            <a:r>
+              <a:rPr lang="pt-BR" b="1" i="1" dirty="0"/>
+              <a:t>conjunto de dados </a:t>
+            </a:r>
+            <a:r>
+              <a:rPr lang="pt-BR" dirty="0"/>
+              <a:t>(i.e., dados dos sensores e rótulos), o computador pode</a:t>
+            </a:r>
+            <a:r>
+              <a:rPr lang="pt-BR" b="1" i="1" dirty="0">
+                <a:solidFill>
+                  <a:srgbClr val="00B050"/>
+                </a:solidFill>
+              </a:rPr>
+              <a:t> </a:t>
+            </a:r>
+            <a:r>
+              <a:rPr lang="pt-BR" b="1" i="1" dirty="0">
+                <a:solidFill>
+                  <a:srgbClr val="7030A0"/>
+                </a:solidFill>
+              </a:rPr>
+              <a:t>descobrir</a:t>
+            </a:r>
+            <a:r>
+              <a:rPr lang="pt-BR" b="1" i="1" dirty="0">
+                <a:solidFill>
+                  <a:srgbClr val="00B050"/>
+                </a:solidFill>
+              </a:rPr>
+              <a:t> regras que identificam as atividades</a:t>
+            </a:r>
+            <a:r>
+              <a:rPr lang="pt-BR" dirty="0"/>
+              <a:t>: </a:t>
+            </a:r>
+          </a:p>
+          <a:p>
+            <a:pPr lvl="1">
+              <a:buFont typeface="Wingdings" panose="05000000000000000000" pitchFamily="2" charset="2"/>
+              <a:buChar char="§"/>
+            </a:pPr>
+            <a:r>
+              <a:rPr lang="pt-BR" dirty="0"/>
+              <a:t>caminhar, </a:t>
+            </a:r>
+          </a:p>
+          <a:p>
+            <a:pPr lvl="1">
+              <a:buFont typeface="Wingdings" panose="05000000000000000000" pitchFamily="2" charset="2"/>
+              <a:buChar char="§"/>
+            </a:pPr>
+            <a:r>
+              <a:rPr lang="pt-BR" dirty="0"/>
+              <a:t>correr, </a:t>
+            </a:r>
+          </a:p>
+          <a:p>
+            <a:pPr lvl="1">
+              <a:buFont typeface="Wingdings" panose="05000000000000000000" pitchFamily="2" charset="2"/>
+              <a:buChar char="§"/>
+            </a:pPr>
+            <a:r>
+              <a:rPr lang="pt-BR" dirty="0"/>
+              <a:t>pedalar e </a:t>
+            </a:r>
+          </a:p>
+          <a:p>
+            <a:pPr lvl="1">
+              <a:buFont typeface="Wingdings" panose="05000000000000000000" pitchFamily="2" charset="2"/>
+              <a:buChar char="§"/>
+            </a:pPr>
+            <a:r>
+              <a:rPr lang="pt-BR" dirty="0"/>
+              <a:t>até mesmo jogar golfe.</a:t>
+            </a:r>
+          </a:p>
+        </p:txBody>
+      </p:sp>
+      <p:pic>
+        <p:nvPicPr>
+          <p:cNvPr id="5" name="Imagem 4">
+            <a:extLst>
+              <a:ext uri="{FF2B5EF4-FFF2-40B4-BE49-F238E27FC236}">
+                <a16:creationId xmlns:a16="http://schemas.microsoft.com/office/drawing/2014/main" id="{DFA5DC01-1022-7A2E-F90A-26F48412B42C}"/>
+              </a:ext>
+            </a:extLst>
+          </p:cNvPr>
+          <p:cNvPicPr>
+            <a:picLocks noChangeAspect="1"/>
+          </p:cNvPicPr>
+          <p:nvPr/>
+        </p:nvPicPr>
+        <p:blipFill>
+          <a:blip r:embed="rId2"/>
+          <a:stretch>
+            <a:fillRect/>
+          </a:stretch>
+        </p:blipFill>
+        <p:spPr>
+          <a:xfrm>
+            <a:off x="76200" y="2274810"/>
+            <a:ext cx="6552000" cy="2308379"/>
+          </a:xfrm>
+          <a:prstGeom prst="rect">
+            <a:avLst/>
+          </a:prstGeom>
+        </p:spPr>
+      </p:pic>
+    </p:spTree>
+    <p:extLst>
+      <p:ext uri="{BB962C8B-B14F-4D97-AF65-F5344CB8AC3E}">
+        <p14:creationId xmlns:p14="http://schemas.microsoft.com/office/powerpoint/2010/main" val="3846713569"/>
+      </p:ext>
+    </p:extLst>
+  </p:cSld>
+  <p:clrMapOvr>
+    <a:masterClrMapping/>
+  </p:clrMapOvr>
+</p:sld>
+</file>
+
+<file path=ppt/slides/slide16.xml><?xml version="1.0" encoding="utf-8"?>
+<p:sld xmlns:a="http://schemas.openxmlformats.org/drawingml/2006/main" xmlns:r="http://schemas.openxmlformats.org/officeDocument/2006/relationships" xmlns:p="http://schemas.openxmlformats.org/presentationml/2006/main">
+  <p:cSld>
+    <p:spTree>
+      <p:nvGrpSpPr>
+        <p:cNvPr id="1" name="">
+          <a:extLst>
+            <a:ext uri="{FF2B5EF4-FFF2-40B4-BE49-F238E27FC236}">
+              <a16:creationId xmlns:a16="http://schemas.microsoft.com/office/drawing/2014/main" id="{884A5A6F-6D46-48C7-4464-B1AD22DA0EF6}"/>
+            </a:ext>
+          </a:extLst>
+        </p:cNvPr>
+        <p:cNvGrpSpPr/>
+        <p:nvPr/>
+      </p:nvGrpSpPr>
+      <p:grpSpPr>
+        <a:xfrm>
+          <a:off x="0" y="0"/>
+          <a:ext cx="0" cy="0"/>
+          <a:chOff x="0" y="0"/>
+          <a:chExt cx="0" cy="0"/>
+        </a:xfrm>
+      </p:grpSpPr>
+      <p:sp>
+        <p:nvSpPr>
+          <p:cNvPr id="2" name="Título 1">
+            <a:extLst>
+              <a:ext uri="{FF2B5EF4-FFF2-40B4-BE49-F238E27FC236}">
+                <a16:creationId xmlns:a16="http://schemas.microsoft.com/office/drawing/2014/main" id="{C2EBBF58-C8DF-D4CC-F96E-9784DC7FD4C6}"/>
+              </a:ext>
+            </a:extLst>
+          </p:cNvPr>
+          <p:cNvSpPr>
+            <a:spLocks noGrp="1"/>
+          </p:cNvSpPr>
+          <p:nvPr>
+            <p:ph type="title"/>
+          </p:nvPr>
+        </p:nvSpPr>
+        <p:spPr/>
+        <p:txBody>
+          <a:bodyPr/>
+          <a:lstStyle/>
+          <a:p>
+            <a:r>
+              <a:rPr lang="pt-BR" dirty="0"/>
+              <a:t>O paradigma do aprendizado de máquina</a:t>
+            </a:r>
+          </a:p>
+        </p:txBody>
+      </p:sp>
+      <p:sp>
+        <p:nvSpPr>
+          <p:cNvPr id="3" name="Espaço Reservado para Conteúdo 2">
+            <a:extLst>
+              <a:ext uri="{FF2B5EF4-FFF2-40B4-BE49-F238E27FC236}">
+                <a16:creationId xmlns:a16="http://schemas.microsoft.com/office/drawing/2014/main" id="{6A104971-6270-53A5-0EB5-DE52D07BA4D8}"/>
+              </a:ext>
+            </a:extLst>
+          </p:cNvPr>
+          <p:cNvSpPr>
+            <a:spLocks noGrp="1"/>
+          </p:cNvSpPr>
+          <p:nvPr>
+            <p:ph idx="1"/>
+          </p:nvPr>
+        </p:nvSpPr>
+        <p:spPr>
+          <a:xfrm>
+            <a:off x="6997984" y="1825625"/>
+            <a:ext cx="5079715" cy="5032376"/>
+          </a:xfrm>
+        </p:spPr>
+        <p:txBody>
+          <a:bodyPr>
+            <a:normAutofit/>
+          </a:bodyPr>
+          <a:lstStyle/>
+          <a:p>
+            <a:r>
+              <a:rPr lang="pt-BR" dirty="0"/>
+              <a:t>O computador aprende, através de </a:t>
+            </a:r>
+            <a:r>
+              <a:rPr lang="pt-BR" b="1" i="1" dirty="0">
+                <a:solidFill>
+                  <a:schemeClr val="accent2"/>
+                </a:solidFill>
+              </a:rPr>
+              <a:t>treinamento</a:t>
+            </a:r>
+            <a:r>
+              <a:rPr lang="pt-BR" dirty="0"/>
+              <a:t>, </a:t>
+            </a:r>
+            <a:r>
+              <a:rPr lang="pt-BR" b="1" i="1" dirty="0">
+                <a:solidFill>
+                  <a:srgbClr val="00B050"/>
+                </a:solidFill>
+              </a:rPr>
+              <a:t>padrões</a:t>
+            </a:r>
+            <a:r>
+              <a:rPr lang="pt-BR" dirty="0"/>
+              <a:t> nos dados de diferentes sensores que </a:t>
+            </a:r>
+            <a:r>
+              <a:rPr lang="pt-BR" b="1" i="1" dirty="0">
+                <a:solidFill>
+                  <a:srgbClr val="00B050"/>
+                </a:solidFill>
+              </a:rPr>
+              <a:t>podem ser </a:t>
+            </a:r>
+            <a:r>
+              <a:rPr lang="pt-BR" b="1" i="1" dirty="0">
+                <a:solidFill>
+                  <a:srgbClr val="7030A0"/>
+                </a:solidFill>
+              </a:rPr>
+              <a:t>mapeados</a:t>
+            </a:r>
+            <a:r>
+              <a:rPr lang="pt-BR" b="1" i="1" dirty="0">
+                <a:solidFill>
+                  <a:srgbClr val="00B050"/>
+                </a:solidFill>
+              </a:rPr>
+              <a:t> nas atividades</a:t>
+            </a:r>
+            <a:r>
+              <a:rPr lang="pt-BR" dirty="0"/>
+              <a:t>.</a:t>
+            </a:r>
+          </a:p>
+        </p:txBody>
+      </p:sp>
+      <p:pic>
+        <p:nvPicPr>
+          <p:cNvPr id="5" name="Imagem 4">
+            <a:extLst>
+              <a:ext uri="{FF2B5EF4-FFF2-40B4-BE49-F238E27FC236}">
+                <a16:creationId xmlns:a16="http://schemas.microsoft.com/office/drawing/2014/main" id="{405B7E34-8438-EEDF-963C-EC8C6C36EA38}"/>
+              </a:ext>
+            </a:extLst>
+          </p:cNvPr>
+          <p:cNvPicPr>
+            <a:picLocks noChangeAspect="1"/>
+          </p:cNvPicPr>
+          <p:nvPr/>
+        </p:nvPicPr>
+        <p:blipFill>
+          <a:blip r:embed="rId2"/>
+          <a:stretch>
+            <a:fillRect/>
+          </a:stretch>
+        </p:blipFill>
+        <p:spPr>
+          <a:xfrm>
+            <a:off x="76200" y="2274810"/>
+            <a:ext cx="6552000" cy="2308379"/>
+          </a:xfrm>
+          <a:prstGeom prst="rect">
+            <a:avLst/>
+          </a:prstGeom>
+        </p:spPr>
+      </p:pic>
+    </p:spTree>
+    <p:extLst>
+      <p:ext uri="{BB962C8B-B14F-4D97-AF65-F5344CB8AC3E}">
+        <p14:creationId xmlns:p14="http://schemas.microsoft.com/office/powerpoint/2010/main" val="3792600069"/>
+      </p:ext>
+    </p:extLst>
+  </p:cSld>
+  <p:clrMapOvr>
+    <a:masterClrMapping/>
+  </p:clrMapOvr>
+</p:sld>
+</file>
+
+<file path=ppt/slides/slide17.xml><?xml version="1.0" encoding="utf-8"?>
 <p:sld xmlns:a="http://schemas.openxmlformats.org/drawingml/2006/main" xmlns:r="http://schemas.openxmlformats.org/officeDocument/2006/relationships" xmlns:p="http://schemas.openxmlformats.org/presentationml/2006/main">
   <p:cSld>
     <p:spTree>
@@ -8713,7 +10940,35 @@
           <a:p>
             <a:r>
               <a:rPr lang="pt-BR" dirty="0"/>
-              <a:t>Vamos ver como o treinamento da máquina (i.e., dos modelos) funciona em alto nível.</a:t>
+              <a:t>Na verdade, nós não treinamos a máquina, mas sim, um </a:t>
+            </a:r>
+            <a:r>
+              <a:rPr lang="pt-BR" b="1" i="1" dirty="0">
+                <a:solidFill>
+                  <a:srgbClr val="7030A0"/>
+                </a:solidFill>
+              </a:rPr>
+              <a:t>modelo</a:t>
+            </a:r>
+            <a:r>
+              <a:rPr lang="pt-BR" dirty="0"/>
+              <a:t>.</a:t>
+            </a:r>
+          </a:p>
+          <a:p>
+            <a:pPr lvl="1">
+              <a:buFont typeface="Wingdings" panose="05000000000000000000" pitchFamily="2" charset="2"/>
+              <a:buChar char="§"/>
+            </a:pPr>
+            <a:r>
+              <a:rPr lang="pt-BR" dirty="0"/>
+              <a:t>Por exemplo, um neurônio artificial.</a:t>
+            </a:r>
+          </a:p>
+          <a:p>
+            <a:r>
+              <a:rPr lang="pt-BR" dirty="0"/>
+              <a:t>Vamos ver como o treinamento dos modelos funciona em alto nível.</a:t>
             </a:r>
           </a:p>
           <a:p>
@@ -8736,7 +10991,7 @@
             <a:r>
               <a:rPr lang="pt-BR" b="1" i="1" dirty="0">
                 <a:solidFill>
-                  <a:srgbClr val="00B050"/>
+                  <a:srgbClr val="7030A0"/>
                 </a:solidFill>
               </a:rPr>
               <a:t>algoritmo</a:t>
@@ -9040,8 +11295,8 @@
             </a:p>
           </p:txBody>
         </p:sp>
-        <mc:AlternateContent xmlns:mc="http://schemas.openxmlformats.org/markup-compatibility/2006">
-          <mc:Choice xmlns:a14="http://schemas.microsoft.com/office/drawing/2010/main" Requires="a14">
+        <mc:AlternateContent xmlns:mc="http://schemas.openxmlformats.org/markup-compatibility/2006" xmlns:a14="http://schemas.microsoft.com/office/drawing/2010/main">
+          <mc:Choice Requires="a14">
             <p:sp>
               <p:nvSpPr>
                 <p:cNvPr id="11" name="CaixaDeTexto 10">
@@ -9091,7 +11346,7 @@
               </p:txBody>
             </p:sp>
           </mc:Choice>
-          <mc:Fallback>
+          <mc:Fallback xmlns="">
             <p:sp>
               <p:nvSpPr>
                 <p:cNvPr id="11" name="CaixaDeTexto 10">
@@ -9627,7 +11882,7 @@
 </p:sld>
 </file>
 
-<file path=ppt/slides/slide14.xml><?xml version="1.0" encoding="utf-8"?>
+<file path=ppt/slides/slide18.xml><?xml version="1.0" encoding="utf-8"?>
 <p:sld xmlns:a="http://schemas.openxmlformats.org/drawingml/2006/main" xmlns:r="http://schemas.openxmlformats.org/officeDocument/2006/relationships" xmlns:p="http://schemas.openxmlformats.org/presentationml/2006/main">
   <p:cSld>
     <p:spTree>
@@ -9672,8 +11927,8 @@
           </a:p>
         </p:txBody>
       </p:sp>
-      <mc:AlternateContent xmlns:mc="http://schemas.openxmlformats.org/markup-compatibility/2006">
-        <mc:Choice xmlns:a14="http://schemas.microsoft.com/office/drawing/2010/main" Requires="a14">
+      <mc:AlternateContent xmlns:mc="http://schemas.openxmlformats.org/markup-compatibility/2006" xmlns:a14="http://schemas.microsoft.com/office/drawing/2010/main">
+        <mc:Choice Requires="a14">
           <p:sp>
             <p:nvSpPr>
               <p:cNvPr id="3" name="Espaço Reservado para Conteúdo 2">
@@ -9704,7 +11959,7 @@
               <a:p>
                 <a:r>
                   <a:rPr lang="pt-BR" dirty="0"/>
-                  <a:t>Primeiro, o computador (ou modelo de ML) faz um </a:t>
+                  <a:t>Primeiro, o modelo de ML faz um </a:t>
                 </a:r>
                 <a:r>
                   <a:rPr lang="pt-BR" b="1" i="1" dirty="0">
@@ -9721,7 +11976,7 @@
                 <a:r>
                   <a:rPr lang="pt-BR" b="1" i="1" dirty="0">
                     <a:solidFill>
-                      <a:srgbClr val="00B050"/>
+                      <a:srgbClr val="7030A0"/>
                     </a:solidFill>
                   </a:rPr>
                   <a:t>aleatório</a:t>
@@ -9776,6 +12031,16 @@
                 </a:r>
               </a:p>
               <a:p>
+                <a:pPr lvl="1">
+                  <a:buFont typeface="Wingdings" panose="05000000000000000000" pitchFamily="2" charset="2"/>
+                  <a:buChar char="§"/>
+                </a:pPr>
+                <a:r>
+                  <a:rPr lang="pt-BR" dirty="0"/>
+                  <a:t>Por exemplos, os pesos sinápticos e de bias de um neurônio são inicializados de forma aleatória.</a:t>
+                </a:r>
+              </a:p>
+              <a:p>
                 <a:r>
                   <a:rPr lang="pt-BR" dirty="0"/>
                   <a:t>Ou seja, o modelo dá um </a:t>
@@ -9796,7 +12061,7 @@
             </p:txBody>
           </p:sp>
         </mc:Choice>
-        <mc:Fallback>
+        <mc:Fallback xmlns="">
           <p:sp>
             <p:nvSpPr>
               <p:cNvPr id="3" name="Espaço Reservado para Conteúdo 2">
@@ -9821,7 +12086,7 @@
               <a:blipFill>
                 <a:blip r:embed="rId3"/>
                 <a:stretch>
-                  <a:fillRect l="-1833" t="-1937" r="-1324"/>
+                  <a:fillRect l="-1833" t="-1937" r="-2444"/>
                 </a:stretch>
               </a:blipFill>
             </p:spPr>
@@ -9830,7 +12095,7 @@
               <a:lstStyle/>
               <a:p>
                 <a:r>
-                  <a:rPr lang="pt-BR">
+                  <a:rPr lang="en-US">
                     <a:noFill/>
                   </a:rPr>
                   <a:t> </a:t>
@@ -10120,8 +12385,8 @@
             </a:p>
           </p:txBody>
         </p:sp>
-        <mc:AlternateContent xmlns:mc="http://schemas.openxmlformats.org/markup-compatibility/2006">
-          <mc:Choice xmlns:a14="http://schemas.microsoft.com/office/drawing/2010/main" Requires="a14">
+        <mc:AlternateContent xmlns:mc="http://schemas.openxmlformats.org/markup-compatibility/2006" xmlns:a14="http://schemas.microsoft.com/office/drawing/2010/main">
+          <mc:Choice Requires="a14">
             <p:sp>
               <p:nvSpPr>
                 <p:cNvPr id="11" name="CaixaDeTexto 10">
@@ -10171,7 +12436,7 @@
               </p:txBody>
             </p:sp>
           </mc:Choice>
-          <mc:Fallback>
+          <mc:Fallback xmlns="">
             <p:sp>
               <p:nvSpPr>
                 <p:cNvPr id="11" name="CaixaDeTexto 10">
@@ -10749,7 +13014,7 @@
 </p:sld>
 </file>
 
-<file path=ppt/slides/slide15.xml><?xml version="1.0" encoding="utf-8"?>
+<file path=ppt/slides/slide19.xml><?xml version="1.0" encoding="utf-8"?>
 <p:sld xmlns:a="http://schemas.openxmlformats.org/drawingml/2006/main" xmlns:r="http://schemas.openxmlformats.org/officeDocument/2006/relationships" xmlns:p="http://schemas.openxmlformats.org/presentationml/2006/main">
   <p:cSld>
     <p:spTree>
@@ -10794,8 +13059,8 @@
           </a:p>
         </p:txBody>
       </p:sp>
-      <mc:AlternateContent xmlns:mc="http://schemas.openxmlformats.org/markup-compatibility/2006">
-        <mc:Choice xmlns:a14="http://schemas.microsoft.com/office/drawing/2010/main" Requires="a14">
+      <mc:AlternateContent xmlns:mc="http://schemas.openxmlformats.org/markup-compatibility/2006" xmlns:a14="http://schemas.microsoft.com/office/drawing/2010/main">
+        <mc:Choice Requires="a14">
           <p:sp>
             <p:nvSpPr>
               <p:cNvPr id="3" name="Espaço Reservado para Conteúdo 2">
@@ -10840,7 +13105,19 @@
                 </a14:m>
                 <a:r>
                   <a:rPr lang="pt-BR" dirty="0"/>
-                  <a:t>, (i.e., rótulos), </a:t>
+                  <a:t>, (i.e., </a:t>
+                </a:r>
+                <a:r>
+                  <a:rPr lang="pt-BR" b="1" i="1" dirty="0">
+                    <a:solidFill>
+                      <a:srgbClr val="7030A0"/>
+                    </a:solidFill>
+                  </a:rPr>
+                  <a:t>rótulos</a:t>
+                </a:r>
+                <a:r>
+                  <a:rPr lang="pt-BR" dirty="0"/>
+                  <a:t>), </a:t>
                 </a:r>
                 <a:r>
                   <a:rPr lang="pt-BR" b="1" i="1" dirty="0">
@@ -10858,7 +13135,19 @@
               <a:p>
                 <a:r>
                   <a:rPr lang="pt-BR" dirty="0"/>
-                  <a:t>Medimos a qualidade do palpite usando uma função chamada de </a:t>
+                  <a:t>Medimos a </a:t>
+                </a:r>
+                <a:r>
+                  <a:rPr lang="pt-BR" b="1" i="1" dirty="0">
+                    <a:solidFill>
+                      <a:srgbClr val="0070C0"/>
+                    </a:solidFill>
+                  </a:rPr>
+                  <a:t>qualidade</a:t>
+                </a:r>
+                <a:r>
+                  <a:rPr lang="pt-BR" dirty="0"/>
+                  <a:t> do palpite usando uma função chamada de </a:t>
                 </a:r>
                 <a:r>
                   <a:rPr lang="pt-BR" b="1" i="1" dirty="0">
@@ -10876,7 +13165,7 @@
             </p:txBody>
           </p:sp>
         </mc:Choice>
-        <mc:Fallback>
+        <mc:Fallback xmlns="">
           <p:sp>
             <p:nvSpPr>
               <p:cNvPr id="3" name="Espaço Reservado para Conteúdo 2">
@@ -10901,7 +13190,7 @@
               <a:blipFill>
                 <a:blip r:embed="rId3"/>
                 <a:stretch>
-                  <a:fillRect l="-1889" t="-1937" r="-1469"/>
+                  <a:fillRect l="-1889" t="-1937" r="-1784"/>
                 </a:stretch>
               </a:blipFill>
             </p:spPr>
@@ -10910,7 +13199,7 @@
               <a:lstStyle/>
               <a:p>
                 <a:r>
-                  <a:rPr lang="pt-BR">
+                  <a:rPr lang="en-US">
                     <a:noFill/>
                   </a:rPr>
                   <a:t> </a:t>
@@ -11200,8 +13489,8 @@
             </a:p>
           </p:txBody>
         </p:sp>
-        <mc:AlternateContent xmlns:mc="http://schemas.openxmlformats.org/markup-compatibility/2006">
-          <mc:Choice xmlns:a14="http://schemas.microsoft.com/office/drawing/2010/main" Requires="a14">
+        <mc:AlternateContent xmlns:mc="http://schemas.openxmlformats.org/markup-compatibility/2006" xmlns:a14="http://schemas.microsoft.com/office/drawing/2010/main">
+          <mc:Choice Requires="a14">
             <p:sp>
               <p:nvSpPr>
                 <p:cNvPr id="17" name="CaixaDeTexto 16">
@@ -11251,7 +13540,7 @@
               </p:txBody>
             </p:sp>
           </mc:Choice>
-          <mc:Fallback>
+          <mc:Fallback xmlns="">
             <p:sp>
               <p:nvSpPr>
                 <p:cNvPr id="17" name="CaixaDeTexto 16">
@@ -11829,7 +14118,208 @@
 </p:sld>
 </file>
 
-<file path=ppt/slides/slide16.xml><?xml version="1.0" encoding="utf-8"?>
+<file path=ppt/slides/slide2.xml><?xml version="1.0" encoding="utf-8"?>
+<p:sld xmlns:a="http://schemas.openxmlformats.org/drawingml/2006/main" xmlns:r="http://schemas.openxmlformats.org/officeDocument/2006/relationships" xmlns:p="http://schemas.openxmlformats.org/presentationml/2006/main">
+  <p:cSld>
+    <p:spTree>
+      <p:nvGrpSpPr>
+        <p:cNvPr id="1" name=""/>
+        <p:cNvGrpSpPr/>
+        <p:nvPr/>
+      </p:nvGrpSpPr>
+      <p:grpSpPr>
+        <a:xfrm>
+          <a:off x="0" y="0"/>
+          <a:ext cx="0" cy="0"/>
+          <a:chOff x="0" y="0"/>
+          <a:chExt cx="0" cy="0"/>
+        </a:xfrm>
+      </p:grpSpPr>
+      <p:sp>
+        <p:nvSpPr>
+          <p:cNvPr id="2" name="Título 1">
+            <a:extLst>
+              <a:ext uri="{FF2B5EF4-FFF2-40B4-BE49-F238E27FC236}">
+                <a16:creationId xmlns:a16="http://schemas.microsoft.com/office/drawing/2014/main" id="{EECB3FED-5D1A-7084-5333-A3B2FA75F608}"/>
+              </a:ext>
+            </a:extLst>
+          </p:cNvPr>
+          <p:cNvSpPr>
+            <a:spLocks noGrp="1"/>
+          </p:cNvSpPr>
+          <p:nvPr>
+            <p:ph type="title"/>
+          </p:nvPr>
+        </p:nvSpPr>
+        <p:spPr/>
+        <p:txBody>
+          <a:bodyPr/>
+          <a:lstStyle/>
+          <a:p>
+            <a:r>
+              <a:rPr lang="pt-BR" dirty="0"/>
+              <a:t>O que vamos ver?</a:t>
+            </a:r>
+          </a:p>
+        </p:txBody>
+      </p:sp>
+      <p:sp>
+        <p:nvSpPr>
+          <p:cNvPr id="3" name="Espaço Reservado para Conteúdo 2">
+            <a:extLst>
+              <a:ext uri="{FF2B5EF4-FFF2-40B4-BE49-F238E27FC236}">
+                <a16:creationId xmlns:a16="http://schemas.microsoft.com/office/drawing/2014/main" id="{25FE7774-7186-A846-D8DE-518B2CBF4EBD}"/>
+              </a:ext>
+            </a:extLst>
+          </p:cNvPr>
+          <p:cNvSpPr>
+            <a:spLocks noGrp="1"/>
+          </p:cNvSpPr>
+          <p:nvPr>
+            <p:ph idx="1"/>
+          </p:nvPr>
+        </p:nvSpPr>
+        <p:spPr>
+          <a:xfrm>
+            <a:off x="838199" y="1825624"/>
+            <a:ext cx="10929257" cy="5032376"/>
+          </a:xfrm>
+        </p:spPr>
+        <p:txBody>
+          <a:bodyPr>
+            <a:normAutofit/>
+          </a:bodyPr>
+          <a:lstStyle/>
+          <a:p>
+            <a:r>
+              <a:rPr lang="pt-BR" dirty="0"/>
+              <a:t>Neste tópico vamos explorar o que o </a:t>
+            </a:r>
+            <a:r>
+              <a:rPr lang="pt-BR" b="1" i="1" dirty="0">
+                <a:solidFill>
+                  <a:srgbClr val="00B050"/>
+                </a:solidFill>
+              </a:rPr>
+              <a:t>aprendizado de máquina </a:t>
+            </a:r>
+            <a:r>
+              <a:rPr lang="pt-BR" dirty="0"/>
+              <a:t>realmente é em um nível mais fundamental.</a:t>
+            </a:r>
+          </a:p>
+          <a:p>
+            <a:r>
+              <a:rPr lang="pt-BR" dirty="0"/>
+              <a:t>Basicamente, o que vamos discutir é um </a:t>
+            </a:r>
+            <a:r>
+              <a:rPr lang="pt-BR" b="1" i="1" dirty="0">
+                <a:solidFill>
+                  <a:srgbClr val="00B050"/>
+                </a:solidFill>
+              </a:rPr>
+              <a:t>novo paradigma</a:t>
+            </a:r>
+            <a:r>
+              <a:rPr lang="pt-BR" dirty="0"/>
+              <a:t>, onde </a:t>
+            </a:r>
+            <a:r>
+              <a:rPr lang="pt-BR" b="1" i="1" dirty="0">
+                <a:solidFill>
+                  <a:srgbClr val="7030A0"/>
+                </a:solidFill>
+              </a:rPr>
+              <a:t>ao invés de programar uma solução</a:t>
+            </a:r>
+            <a:r>
+              <a:rPr lang="pt-BR" b="1" i="1" dirty="0"/>
+              <a:t> </a:t>
+            </a:r>
+            <a:r>
+              <a:rPr lang="pt-BR" dirty="0"/>
+              <a:t>para um determinado problema, vamos </a:t>
+            </a:r>
+            <a:r>
+              <a:rPr lang="pt-BR" b="1" i="1" dirty="0">
+                <a:solidFill>
+                  <a:schemeClr val="accent1"/>
+                </a:solidFill>
+              </a:rPr>
+              <a:t>ensinar um computador a aprender a solução </a:t>
+            </a:r>
+            <a:r>
+              <a:rPr lang="pt-BR" dirty="0"/>
+              <a:t>através de experiências prévias.</a:t>
+            </a:r>
+          </a:p>
+          <a:p>
+            <a:r>
+              <a:rPr lang="pt-BR" dirty="0"/>
+              <a:t>Esse novo paradigma tem o potencial para </a:t>
+            </a:r>
+            <a:r>
+              <a:rPr lang="pt-BR" b="1" i="1" dirty="0"/>
+              <a:t>resolver problemas </a:t>
+            </a:r>
+            <a:r>
+              <a:rPr lang="pt-BR" dirty="0"/>
+              <a:t>que</a:t>
+            </a:r>
+            <a:r>
+              <a:rPr lang="pt-BR" b="1" i="1" dirty="0"/>
+              <a:t> </a:t>
+            </a:r>
+          </a:p>
+          <a:p>
+            <a:pPr lvl="1">
+              <a:buFont typeface="Wingdings" panose="05000000000000000000" pitchFamily="2" charset="2"/>
+              <a:buChar char="§"/>
+            </a:pPr>
+            <a:r>
+              <a:rPr lang="pt-BR" b="1" i="1" dirty="0">
+                <a:solidFill>
+                  <a:srgbClr val="00B050"/>
+                </a:solidFill>
+              </a:rPr>
+              <a:t>não podem ou </a:t>
+            </a:r>
+          </a:p>
+          <a:p>
+            <a:pPr lvl="1">
+              <a:buFont typeface="Wingdings" panose="05000000000000000000" pitchFamily="2" charset="2"/>
+              <a:buChar char="§"/>
+            </a:pPr>
+            <a:r>
+              <a:rPr lang="pt-BR" b="1" i="1" dirty="0">
+                <a:solidFill>
+                  <a:srgbClr val="00B050"/>
+                </a:solidFill>
+              </a:rPr>
+              <a:t>são muito difíceis de serem resolvidos programaticamente</a:t>
+            </a:r>
+            <a:r>
+              <a:rPr lang="pt-BR" dirty="0"/>
+              <a:t>.</a:t>
+            </a:r>
+          </a:p>
+        </p:txBody>
+      </p:sp>
+    </p:spTree>
+    <p:extLst>
+      <p:ext uri="{BB962C8B-B14F-4D97-AF65-F5344CB8AC3E}">
+        <p14:creationId xmlns:p14="http://schemas.microsoft.com/office/powerpoint/2010/main" val="529739951"/>
+      </p:ext>
+    </p:extLst>
+  </p:cSld>
+  <p:clrMapOvr>
+    <a:masterClrMapping/>
+  </p:clrMapOvr>
+</p:sld>
+</file>
+
+<file path=ppt/slides/slide20.xml><?xml version="1.0" encoding="utf-8"?>
 <p:sld xmlns:a="http://schemas.openxmlformats.org/drawingml/2006/main" xmlns:r="http://schemas.openxmlformats.org/officeDocument/2006/relationships" xmlns:p="http://schemas.openxmlformats.org/presentationml/2006/main">
   <p:cSld>
     <p:spTree>
@@ -11921,14 +14411,10 @@
             <a:r>
               <a:rPr lang="pt-BR" b="1" i="1" dirty="0">
                 <a:solidFill>
-                  <a:srgbClr val="00B050"/>
+                  <a:srgbClr val="0070C0"/>
                 </a:solidFill>
               </a:rPr>
-              <a:t>otimizar o modelo </a:t>
-            </a:r>
-            <a:r>
-              <a:rPr lang="pt-BR" dirty="0"/>
-              <a:t>e, com isso, </a:t>
+              <a:t>otimizar</a:t>
             </a:r>
             <a:r>
               <a:rPr lang="pt-BR" b="1" i="1" dirty="0">
@@ -11936,7 +14422,27 @@
                   <a:srgbClr val="00B050"/>
                 </a:solidFill>
               </a:rPr>
-              <a:t>melhorar o próximo palpite</a:t>
+              <a:t> o modelo </a:t>
+            </a:r>
+            <a:r>
+              <a:rPr lang="pt-BR" dirty="0"/>
+              <a:t>e, com isso, </a:t>
+            </a:r>
+            <a:r>
+              <a:rPr lang="pt-BR" b="1" i="1" dirty="0">
+                <a:solidFill>
+                  <a:srgbClr val="00B050"/>
+                </a:solidFill>
+              </a:rPr>
+              <a:t>melhorar o </a:t>
+            </a:r>
+            <a:r>
+              <a:rPr lang="pt-BR" b="1" i="1" dirty="0">
+                <a:solidFill>
+                  <a:srgbClr val="0070C0"/>
+                </a:solidFill>
+              </a:rPr>
+              <a:t>próximo palpite</a:t>
             </a:r>
             <a:r>
               <a:rPr lang="pt-BR" dirty="0"/>
@@ -11950,7 +14456,7 @@
             </a:pPr>
             <a:r>
               <a:rPr lang="pt-BR" dirty="0"/>
-              <a:t>Por exemplo, em uma rede neural, atualizar seus pesos.</a:t>
+              <a:t>Por exemplo, atualizar os pesos do neurônio.</a:t>
             </a:r>
           </a:p>
           <a:p>
@@ -11976,7 +14482,15 @@
                   <a:srgbClr val="00B050"/>
                 </a:solidFill>
               </a:rPr>
-              <a:t>suma importância para o treinamento de modelos de aprendizado supervisionados</a:t>
+              <a:t>suma importância para o treinamento de modelos de </a:t>
+            </a:r>
+            <a:r>
+              <a:rPr lang="pt-BR" b="1" i="1" dirty="0">
+                <a:solidFill>
+                  <a:srgbClr val="7030A0"/>
+                </a:solidFill>
+              </a:rPr>
+              <a:t>aprendizado supervisionados</a:t>
             </a:r>
             <a:r>
               <a:rPr lang="pt-BR" dirty="0"/>
@@ -12307,8 +14821,8 @@
             </a:p>
           </p:txBody>
         </p:sp>
-        <mc:AlternateContent xmlns:mc="http://schemas.openxmlformats.org/markup-compatibility/2006">
-          <mc:Choice xmlns:a14="http://schemas.microsoft.com/office/drawing/2010/main" Requires="a14">
+        <mc:AlternateContent xmlns:mc="http://schemas.openxmlformats.org/markup-compatibility/2006" xmlns:a14="http://schemas.microsoft.com/office/drawing/2010/main">
+          <mc:Choice Requires="a14">
             <p:sp>
               <p:nvSpPr>
                 <p:cNvPr id="19" name="CaixaDeTexto 18">
@@ -12358,7 +14872,7 @@
               </p:txBody>
             </p:sp>
           </mc:Choice>
-          <mc:Fallback>
+          <mc:Fallback xmlns="">
             <p:sp>
               <p:nvSpPr>
                 <p:cNvPr id="19" name="CaixaDeTexto 18">
@@ -12894,7 +15408,1002 @@
 </p:sld>
 </file>
 
-<file path=ppt/slides/slide17.xml><?xml version="1.0" encoding="utf-8"?>
+<file path=ppt/slides/slide21.xml><?xml version="1.0" encoding="utf-8"?>
+<p:sld xmlns:a="http://schemas.openxmlformats.org/drawingml/2006/main" xmlns:r="http://schemas.openxmlformats.org/officeDocument/2006/relationships" xmlns:p="http://schemas.openxmlformats.org/presentationml/2006/main">
+  <p:cSld>
+    <p:spTree>
+      <p:nvGrpSpPr>
+        <p:cNvPr id="1" name="">
+          <a:extLst>
+            <a:ext uri="{FF2B5EF4-FFF2-40B4-BE49-F238E27FC236}">
+              <a16:creationId xmlns:a16="http://schemas.microsoft.com/office/drawing/2014/main" id="{D082C295-4EFD-FDAF-2220-2DA2FF8A90E7}"/>
+            </a:ext>
+          </a:extLst>
+        </p:cNvPr>
+        <p:cNvGrpSpPr/>
+        <p:nvPr/>
+      </p:nvGrpSpPr>
+      <p:grpSpPr>
+        <a:xfrm>
+          <a:off x="0" y="0"/>
+          <a:ext cx="0" cy="0"/>
+          <a:chOff x="0" y="0"/>
+          <a:chExt cx="0" cy="0"/>
+        </a:xfrm>
+      </p:grpSpPr>
+      <p:sp>
+        <p:nvSpPr>
+          <p:cNvPr id="2" name="Título 1">
+            <a:extLst>
+              <a:ext uri="{FF2B5EF4-FFF2-40B4-BE49-F238E27FC236}">
+                <a16:creationId xmlns:a16="http://schemas.microsoft.com/office/drawing/2014/main" id="{A27D2E67-6F3F-3DFB-4A65-F052362B1546}"/>
+              </a:ext>
+            </a:extLst>
+          </p:cNvPr>
+          <p:cNvSpPr>
+            <a:spLocks noGrp="1"/>
+          </p:cNvSpPr>
+          <p:nvPr>
+            <p:ph type="title"/>
+          </p:nvPr>
+        </p:nvSpPr>
+        <p:spPr/>
+        <p:txBody>
+          <a:bodyPr/>
+          <a:lstStyle/>
+          <a:p>
+            <a:r>
+              <a:rPr lang="pt-BR" dirty="0"/>
+              <a:t>Treinamento da máquina (ou modelo de ML)</a:t>
+            </a:r>
+          </a:p>
+        </p:txBody>
+      </p:sp>
+      <p:sp>
+        <p:nvSpPr>
+          <p:cNvPr id="3" name="Espaço Reservado para Conteúdo 2">
+            <a:extLst>
+              <a:ext uri="{FF2B5EF4-FFF2-40B4-BE49-F238E27FC236}">
+                <a16:creationId xmlns:a16="http://schemas.microsoft.com/office/drawing/2014/main" id="{C83E2783-5080-94DD-F04F-DAC0387416F9}"/>
+              </a:ext>
+            </a:extLst>
+          </p:cNvPr>
+          <p:cNvSpPr>
+            <a:spLocks noGrp="1"/>
+          </p:cNvSpPr>
+          <p:nvPr>
+            <p:ph idx="1"/>
+          </p:nvPr>
+        </p:nvSpPr>
+        <p:spPr>
+          <a:xfrm>
+            <a:off x="6225308" y="1825624"/>
+            <a:ext cx="5809503" cy="5032376"/>
+          </a:xfrm>
+        </p:spPr>
+        <p:txBody>
+          <a:bodyPr>
+            <a:normAutofit/>
+          </a:bodyPr>
+          <a:lstStyle/>
+          <a:p>
+            <a:r>
+              <a:rPr lang="pt-BR" dirty="0"/>
+              <a:t>O </a:t>
+            </a:r>
+            <a:r>
+              <a:rPr lang="pt-BR" b="1" i="1" dirty="0">
+                <a:solidFill>
+                  <a:srgbClr val="7030A0"/>
+                </a:solidFill>
+              </a:rPr>
+              <a:t>aprendizado supervisionado</a:t>
+            </a:r>
+            <a:r>
+              <a:rPr lang="pt-BR" dirty="0"/>
+              <a:t> é uma abordagem do aprendizado de máquina em que o </a:t>
+            </a:r>
+            <a:r>
+              <a:rPr lang="pt-BR" b="1" i="1" dirty="0">
+                <a:solidFill>
+                  <a:srgbClr val="00B050"/>
+                </a:solidFill>
+              </a:rPr>
+              <a:t>modelo</a:t>
+            </a:r>
+            <a:r>
+              <a:rPr lang="pt-BR" dirty="0"/>
+              <a:t> aprende a partir de </a:t>
+            </a:r>
+            <a:r>
+              <a:rPr lang="pt-BR" b="1" i="1" dirty="0">
+                <a:solidFill>
+                  <a:schemeClr val="accent1"/>
+                </a:solidFill>
+              </a:rPr>
+              <a:t>dados rotulados</a:t>
+            </a:r>
+            <a:r>
+              <a:rPr lang="pt-BR" dirty="0"/>
+              <a:t>. </a:t>
+            </a:r>
+          </a:p>
+          <a:p>
+            <a:r>
+              <a:rPr lang="pt-BR" dirty="0"/>
+              <a:t>Ou seja, cada exemplo do conjunto de treinamento contém uma entrada e a saída esperada (ou rótulo). </a:t>
+            </a:r>
+          </a:p>
+        </p:txBody>
+      </p:sp>
+      <p:grpSp>
+        <p:nvGrpSpPr>
+          <p:cNvPr id="10" name="Agrupar 9">
+            <a:extLst>
+              <a:ext uri="{FF2B5EF4-FFF2-40B4-BE49-F238E27FC236}">
+                <a16:creationId xmlns:a16="http://schemas.microsoft.com/office/drawing/2014/main" id="{9BBC33AB-684C-4B19-628A-1F6C080DF968}"/>
+              </a:ext>
+            </a:extLst>
+          </p:cNvPr>
+          <p:cNvGrpSpPr/>
+          <p:nvPr/>
+        </p:nvGrpSpPr>
+        <p:grpSpPr>
+          <a:xfrm>
+            <a:off x="732540" y="2398623"/>
+            <a:ext cx="4730868" cy="3031571"/>
+            <a:chOff x="157187" y="2378075"/>
+            <a:chExt cx="4730868" cy="3031571"/>
+          </a:xfrm>
+        </p:grpSpPr>
+        <p:sp>
+          <p:nvSpPr>
+            <p:cNvPr id="32" name="Retângulo 31">
+              <a:extLst>
+                <a:ext uri="{FF2B5EF4-FFF2-40B4-BE49-F238E27FC236}">
+                  <a16:creationId xmlns:a16="http://schemas.microsoft.com/office/drawing/2014/main" id="{838329C1-1E89-B28D-F941-8802C19AD179}"/>
+                </a:ext>
+              </a:extLst>
+            </p:cNvPr>
+            <p:cNvSpPr/>
+            <p:nvPr/>
+          </p:nvSpPr>
+          <p:spPr>
+            <a:xfrm>
+              <a:off x="425788" y="3029858"/>
+              <a:ext cx="463575" cy="1935842"/>
+            </a:xfrm>
+            <a:prstGeom prst="rect">
+              <a:avLst/>
+            </a:prstGeom>
+            <a:solidFill>
+              <a:schemeClr val="accent1">
+                <a:alpha val="41000"/>
+              </a:schemeClr>
+            </a:solidFill>
+            <a:ln>
+              <a:solidFill>
+                <a:schemeClr val="accent1">
+                  <a:shade val="15000"/>
+                </a:schemeClr>
+              </a:solidFill>
+            </a:ln>
+          </p:spPr>
+          <p:style>
+            <a:lnRef idx="2">
+              <a:schemeClr val="accent1">
+                <a:shade val="15000"/>
+              </a:schemeClr>
+            </a:lnRef>
+            <a:fillRef idx="1">
+              <a:schemeClr val="accent1"/>
+            </a:fillRef>
+            <a:effectRef idx="0">
+              <a:schemeClr val="accent1"/>
+            </a:effectRef>
+            <a:fontRef idx="minor">
+              <a:schemeClr val="lt1"/>
+            </a:fontRef>
+          </p:style>
+          <p:txBody>
+            <a:bodyPr rtlCol="0" anchor="ctr"/>
+            <a:lstStyle/>
+            <a:p>
+              <a:pPr algn="ctr"/>
+              <a:endParaRPr lang="pt-BR" dirty="0"/>
+            </a:p>
+          </p:txBody>
+        </p:sp>
+        <p:sp>
+          <p:nvSpPr>
+            <p:cNvPr id="14" name="Rectangle 12">
+              <a:extLst>
+                <a:ext uri="{FF2B5EF4-FFF2-40B4-BE49-F238E27FC236}">
+                  <a16:creationId xmlns:a16="http://schemas.microsoft.com/office/drawing/2014/main" id="{4A2785BF-1CEE-E8AB-8D08-84BCD2D133E0}"/>
+                </a:ext>
+              </a:extLst>
+            </p:cNvPr>
+            <p:cNvSpPr/>
+            <p:nvPr/>
+          </p:nvSpPr>
+          <p:spPr>
+            <a:xfrm>
+              <a:off x="1361788" y="3029857"/>
+              <a:ext cx="1216819" cy="849086"/>
+            </a:xfrm>
+            <a:prstGeom prst="rect">
+              <a:avLst/>
+            </a:prstGeom>
+            <a:noFill/>
+            <a:ln>
+              <a:solidFill>
+                <a:schemeClr val="tx1"/>
+              </a:solidFill>
+            </a:ln>
+          </p:spPr>
+          <p:style>
+            <a:lnRef idx="2">
+              <a:schemeClr val="accent1">
+                <a:shade val="50000"/>
+              </a:schemeClr>
+            </a:lnRef>
+            <a:fillRef idx="1">
+              <a:schemeClr val="accent1"/>
+            </a:fillRef>
+            <a:effectRef idx="0">
+              <a:schemeClr val="accent1"/>
+            </a:effectRef>
+            <a:fontRef idx="minor">
+              <a:schemeClr val="lt1"/>
+            </a:fontRef>
+          </p:style>
+          <p:txBody>
+            <a:bodyPr rtlCol="0" anchor="ctr"/>
+            <a:lstStyle/>
+            <a:p>
+              <a:pPr algn="ctr"/>
+              <a:r>
+                <a:rPr lang="pt-BR" dirty="0">
+                  <a:solidFill>
+                    <a:schemeClr val="tx1"/>
+                  </a:solidFill>
+                </a:rPr>
+                <a:t>Modelo de ML</a:t>
+              </a:r>
+            </a:p>
+          </p:txBody>
+        </p:sp>
+        <p:cxnSp>
+          <p:nvCxnSpPr>
+            <p:cNvPr id="15" name="Straight Arrow Connector 14">
+              <a:extLst>
+                <a:ext uri="{FF2B5EF4-FFF2-40B4-BE49-F238E27FC236}">
+                  <a16:creationId xmlns:a16="http://schemas.microsoft.com/office/drawing/2014/main" id="{435EB3E1-4C6B-29AA-FCF3-CC20FA646A06}"/>
+                </a:ext>
+              </a:extLst>
+            </p:cNvPr>
+            <p:cNvCxnSpPr>
+              <a:cxnSpLocks/>
+            </p:cNvCxnSpPr>
+            <p:nvPr/>
+          </p:nvCxnSpPr>
+          <p:spPr>
+            <a:xfrm>
+              <a:off x="893787" y="3471233"/>
+              <a:ext cx="468000" cy="0"/>
+            </a:xfrm>
+            <a:prstGeom prst="straightConnector1">
+              <a:avLst/>
+            </a:prstGeom>
+            <a:ln w="19050">
+              <a:tailEnd type="triangle"/>
+            </a:ln>
+          </p:spPr>
+          <p:style>
+            <a:lnRef idx="1">
+              <a:schemeClr val="accent1"/>
+            </a:lnRef>
+            <a:fillRef idx="0">
+              <a:schemeClr val="accent1"/>
+            </a:fillRef>
+            <a:effectRef idx="0">
+              <a:schemeClr val="accent1"/>
+            </a:effectRef>
+            <a:fontRef idx="minor">
+              <a:schemeClr val="tx1"/>
+            </a:fontRef>
+          </p:style>
+        </p:cxnSp>
+        <p:cxnSp>
+          <p:nvCxnSpPr>
+            <p:cNvPr id="17" name="Straight Arrow Connector 14">
+              <a:extLst>
+                <a:ext uri="{FF2B5EF4-FFF2-40B4-BE49-F238E27FC236}">
+                  <a16:creationId xmlns:a16="http://schemas.microsoft.com/office/drawing/2014/main" id="{6F777AA0-6CE8-9E70-5DB9-8A7A493D5C0C}"/>
+                </a:ext>
+              </a:extLst>
+            </p:cNvPr>
+            <p:cNvCxnSpPr>
+              <a:cxnSpLocks/>
+              <a:stCxn id="14" idx="3"/>
+              <a:endCxn id="18" idx="1"/>
+            </p:cNvCxnSpPr>
+            <p:nvPr/>
+          </p:nvCxnSpPr>
+          <p:spPr>
+            <a:xfrm>
+              <a:off x="2578607" y="3454400"/>
+              <a:ext cx="692886" cy="0"/>
+            </a:xfrm>
+            <a:prstGeom prst="straightConnector1">
+              <a:avLst/>
+            </a:prstGeom>
+            <a:ln w="19050">
+              <a:tailEnd type="triangle"/>
+            </a:ln>
+          </p:spPr>
+          <p:style>
+            <a:lnRef idx="1">
+              <a:schemeClr val="accent1"/>
+            </a:lnRef>
+            <a:fillRef idx="0">
+              <a:schemeClr val="accent1"/>
+            </a:fillRef>
+            <a:effectRef idx="0">
+              <a:schemeClr val="accent1"/>
+            </a:effectRef>
+            <a:fontRef idx="minor">
+              <a:schemeClr val="tx1"/>
+            </a:fontRef>
+          </p:style>
+        </p:cxnSp>
+        <p:sp>
+          <p:nvSpPr>
+            <p:cNvPr id="18" name="Rectangle 12">
+              <a:extLst>
+                <a:ext uri="{FF2B5EF4-FFF2-40B4-BE49-F238E27FC236}">
+                  <a16:creationId xmlns:a16="http://schemas.microsoft.com/office/drawing/2014/main" id="{97EA4150-4F71-28A5-8099-E18BAC734F20}"/>
+                </a:ext>
+              </a:extLst>
+            </p:cNvPr>
+            <p:cNvSpPr/>
+            <p:nvPr/>
+          </p:nvSpPr>
+          <p:spPr>
+            <a:xfrm>
+              <a:off x="3271493" y="3029857"/>
+              <a:ext cx="1216818" cy="849086"/>
+            </a:xfrm>
+            <a:prstGeom prst="rect">
+              <a:avLst/>
+            </a:prstGeom>
+            <a:noFill/>
+            <a:ln>
+              <a:solidFill>
+                <a:schemeClr val="tx1"/>
+              </a:solidFill>
+            </a:ln>
+          </p:spPr>
+          <p:style>
+            <a:lnRef idx="2">
+              <a:schemeClr val="accent1">
+                <a:shade val="50000"/>
+              </a:schemeClr>
+            </a:lnRef>
+            <a:fillRef idx="1">
+              <a:schemeClr val="accent1"/>
+            </a:fillRef>
+            <a:effectRef idx="0">
+              <a:schemeClr val="accent1"/>
+            </a:effectRef>
+            <a:fontRef idx="minor">
+              <a:schemeClr val="lt1"/>
+            </a:fontRef>
+          </p:style>
+          <p:txBody>
+            <a:bodyPr rtlCol="0" anchor="ctr"/>
+            <a:lstStyle/>
+            <a:p>
+              <a:pPr algn="ctr"/>
+              <a:r>
+                <a:rPr lang="pt-BR" dirty="0">
+                  <a:solidFill>
+                    <a:schemeClr val="tx1"/>
+                  </a:solidFill>
+                </a:rPr>
+                <a:t>Função de erro</a:t>
+              </a:r>
+            </a:p>
+          </p:txBody>
+        </p:sp>
+        <mc:AlternateContent xmlns:mc="http://schemas.openxmlformats.org/markup-compatibility/2006" xmlns:a14="http://schemas.microsoft.com/office/drawing/2010/main">
+          <mc:Choice Requires="a14">
+            <p:sp>
+              <p:nvSpPr>
+                <p:cNvPr id="19" name="CaixaDeTexto 18">
+                  <a:extLst>
+                    <a:ext uri="{FF2B5EF4-FFF2-40B4-BE49-F238E27FC236}">
+                      <a16:creationId xmlns:a16="http://schemas.microsoft.com/office/drawing/2014/main" id="{A8C92083-4870-D971-9726-55B7AAA3538B}"/>
+                    </a:ext>
+                  </a:extLst>
+                </p:cNvPr>
+                <p:cNvSpPr txBox="1"/>
+                <p:nvPr/>
+              </p:nvSpPr>
+              <p:spPr>
+                <a:xfrm flipH="1">
+                  <a:off x="436587" y="3162012"/>
+                  <a:ext cx="467999" cy="461665"/>
+                </a:xfrm>
+                <a:prstGeom prst="rect">
+                  <a:avLst/>
+                </a:prstGeom>
+                <a:noFill/>
+              </p:spPr>
+              <p:txBody>
+                <a:bodyPr wrap="square">
+                  <a:spAutoFit/>
+                </a:bodyPr>
+                <a:lstStyle/>
+                <a:p>
+                  <a:pPr/>
+                  <a14:m>
+                    <m:oMathPara xmlns:m="http://schemas.openxmlformats.org/officeDocument/2006/math">
+                      <m:oMathParaPr>
+                        <m:jc m:val="center"/>
+                      </m:oMathParaPr>
+                      <m:oMath xmlns:m="http://schemas.openxmlformats.org/officeDocument/2006/math">
+                        <m:r>
+                          <a:rPr lang="pt-BR" sz="2400" b="1" i="1" smtClean="0">
+                            <a:latin typeface="Cambria Math" panose="02040503050406030204" pitchFamily="18" charset="0"/>
+                          </a:rPr>
+                          <m:t>𝒙</m:t>
+                        </m:r>
+                      </m:oMath>
+                    </m:oMathPara>
+                  </a14:m>
+                  <a:endParaRPr lang="pt-BR" sz="2400" b="1" dirty="0"/>
+                </a:p>
+              </p:txBody>
+            </p:sp>
+          </mc:Choice>
+          <mc:Fallback xmlns="">
+            <p:sp>
+              <p:nvSpPr>
+                <p:cNvPr id="19" name="CaixaDeTexto 18">
+                  <a:extLst>
+                    <a:ext uri="{FF2B5EF4-FFF2-40B4-BE49-F238E27FC236}">
+                      <a16:creationId xmlns:a16="http://schemas.microsoft.com/office/drawing/2014/main" id="{C78060AE-A702-AF60-DFA2-2E7F62790D30}"/>
+                    </a:ext>
+                  </a:extLst>
+                </p:cNvPr>
+                <p:cNvSpPr txBox="1">
+                  <a:spLocks noRot="1" noChangeAspect="1" noMove="1" noResize="1" noEditPoints="1" noAdjustHandles="1" noChangeArrowheads="1" noChangeShapeType="1" noTextEdit="1"/>
+                </p:cNvSpPr>
+                <p:nvPr/>
+              </p:nvSpPr>
+              <p:spPr>
+                <a:xfrm flipH="1">
+                  <a:off x="436587" y="3162012"/>
+                  <a:ext cx="467999" cy="461665"/>
+                </a:xfrm>
+                <a:prstGeom prst="rect">
+                  <a:avLst/>
+                </a:prstGeom>
+                <a:blipFill>
+                  <a:blip r:embed="rId3"/>
+                  <a:stretch>
+                    <a:fillRect/>
+                  </a:stretch>
+                </a:blipFill>
+              </p:spPr>
+              <p:txBody>
+                <a:bodyPr/>
+                <a:lstStyle/>
+                <a:p>
+                  <a:r>
+                    <a:rPr lang="pt-BR">
+                      <a:noFill/>
+                    </a:rPr>
+                    <a:t> </a:t>
+                  </a:r>
+                </a:p>
+              </p:txBody>
+            </p:sp>
+          </mc:Fallback>
+        </mc:AlternateContent>
+        <mc:AlternateContent xmlns:mc="http://schemas.openxmlformats.org/markup-compatibility/2006" xmlns:a14="http://schemas.microsoft.com/office/drawing/2010/main">
+          <mc:Choice Requires="a14">
+            <p:sp>
+              <p:nvSpPr>
+                <p:cNvPr id="20" name="CaixaDeTexto 19">
+                  <a:extLst>
+                    <a:ext uri="{FF2B5EF4-FFF2-40B4-BE49-F238E27FC236}">
+                      <a16:creationId xmlns:a16="http://schemas.microsoft.com/office/drawing/2014/main" id="{3239E92A-0AF3-20CF-CDF8-D1DE86F8E7D2}"/>
+                    </a:ext>
+                  </a:extLst>
+                </p:cNvPr>
+                <p:cNvSpPr txBox="1"/>
+                <p:nvPr/>
+              </p:nvSpPr>
+              <p:spPr>
+                <a:xfrm flipH="1">
+                  <a:off x="425788" y="4367212"/>
+                  <a:ext cx="467999" cy="461665"/>
+                </a:xfrm>
+                <a:prstGeom prst="rect">
+                  <a:avLst/>
+                </a:prstGeom>
+                <a:noFill/>
+              </p:spPr>
+              <p:txBody>
+                <a:bodyPr wrap="square">
+                  <a:spAutoFit/>
+                </a:bodyPr>
+                <a:lstStyle/>
+                <a:p>
+                  <a:pPr/>
+                  <a14:m>
+                    <m:oMathPara xmlns:m="http://schemas.openxmlformats.org/officeDocument/2006/math">
+                      <m:oMathParaPr>
+                        <m:jc m:val="center"/>
+                      </m:oMathParaPr>
+                      <m:oMath xmlns:m="http://schemas.openxmlformats.org/officeDocument/2006/math">
+                        <m:r>
+                          <a:rPr lang="pt-BR" sz="2400" b="0" i="1" smtClean="0">
+                            <a:latin typeface="Cambria Math" panose="02040503050406030204" pitchFamily="18" charset="0"/>
+                          </a:rPr>
+                          <m:t>𝑦</m:t>
+                        </m:r>
+                      </m:oMath>
+                    </m:oMathPara>
+                  </a14:m>
+                  <a:endParaRPr lang="pt-BR" sz="2400" dirty="0"/>
+                </a:p>
+              </p:txBody>
+            </p:sp>
+          </mc:Choice>
+          <mc:Fallback xmlns="">
+            <p:sp>
+              <p:nvSpPr>
+                <p:cNvPr id="12" name="CaixaDeTexto 11">
+                  <a:extLst>
+                    <a:ext uri="{FF2B5EF4-FFF2-40B4-BE49-F238E27FC236}">
+                      <a16:creationId xmlns:a16="http://schemas.microsoft.com/office/drawing/2014/main" id="{120EB5AF-A158-F20A-7D5F-DC34312E5153}"/>
+                    </a:ext>
+                  </a:extLst>
+                </p:cNvPr>
+                <p:cNvSpPr txBox="1">
+                  <a:spLocks noRot="1" noChangeAspect="1" noMove="1" noResize="1" noEditPoints="1" noAdjustHandles="1" noChangeArrowheads="1" noChangeShapeType="1" noTextEdit="1"/>
+                </p:cNvSpPr>
+                <p:nvPr/>
+              </p:nvSpPr>
+              <p:spPr>
+                <a:xfrm flipH="1">
+                  <a:off x="425788" y="4367212"/>
+                  <a:ext cx="467999" cy="461665"/>
+                </a:xfrm>
+                <a:prstGeom prst="rect">
+                  <a:avLst/>
+                </a:prstGeom>
+                <a:blipFill>
+                  <a:blip r:embed="rId5"/>
+                  <a:stretch>
+                    <a:fillRect b="-10526"/>
+                  </a:stretch>
+                </a:blipFill>
+              </p:spPr>
+              <p:txBody>
+                <a:bodyPr/>
+                <a:lstStyle/>
+                <a:p>
+                  <a:r>
+                    <a:rPr lang="pt-BR">
+                      <a:noFill/>
+                    </a:rPr>
+                    <a:t> </a:t>
+                  </a:r>
+                </a:p>
+              </p:txBody>
+            </p:sp>
+          </mc:Fallback>
+        </mc:AlternateContent>
+        <mc:AlternateContent xmlns:mc="http://schemas.openxmlformats.org/markup-compatibility/2006" xmlns:a14="http://schemas.microsoft.com/office/drawing/2010/main">
+          <mc:Choice Requires="a14">
+            <p:sp>
+              <p:nvSpPr>
+                <p:cNvPr id="22" name="CaixaDeTexto 21">
+                  <a:extLst>
+                    <a:ext uri="{FF2B5EF4-FFF2-40B4-BE49-F238E27FC236}">
+                      <a16:creationId xmlns:a16="http://schemas.microsoft.com/office/drawing/2014/main" id="{7BF159E9-FD2C-CD6C-1FF7-7A1E5F39FB86}"/>
+                    </a:ext>
+                  </a:extLst>
+                </p:cNvPr>
+                <p:cNvSpPr txBox="1"/>
+                <p:nvPr/>
+              </p:nvSpPr>
+              <p:spPr>
+                <a:xfrm flipH="1">
+                  <a:off x="2656972" y="3008452"/>
+                  <a:ext cx="467999" cy="461665"/>
+                </a:xfrm>
+                <a:prstGeom prst="rect">
+                  <a:avLst/>
+                </a:prstGeom>
+                <a:noFill/>
+              </p:spPr>
+              <p:txBody>
+                <a:bodyPr wrap="square">
+                  <a:spAutoFit/>
+                </a:bodyPr>
+                <a:lstStyle/>
+                <a:p>
+                  <a:pPr/>
+                  <a14:m>
+                    <m:oMathPara xmlns:m="http://schemas.openxmlformats.org/officeDocument/2006/math">
+                      <m:oMathParaPr>
+                        <m:jc m:val="center"/>
+                      </m:oMathParaPr>
+                      <m:oMath xmlns:m="http://schemas.openxmlformats.org/officeDocument/2006/math">
+                        <m:acc>
+                          <m:accPr>
+                            <m:chr m:val="̂"/>
+                            <m:ctrlPr>
+                              <a:rPr lang="pt-BR" sz="2400" b="0" i="1" smtClean="0">
+                                <a:latin typeface="Cambria Math" panose="02040503050406030204" pitchFamily="18" charset="0"/>
+                              </a:rPr>
+                            </m:ctrlPr>
+                          </m:accPr>
+                          <m:e>
+                            <m:r>
+                              <a:rPr lang="pt-BR" sz="2400" b="0" i="1" smtClean="0">
+                                <a:latin typeface="Cambria Math" panose="02040503050406030204" pitchFamily="18" charset="0"/>
+                              </a:rPr>
+                              <m:t>𝑦</m:t>
+                            </m:r>
+                          </m:e>
+                        </m:acc>
+                      </m:oMath>
+                    </m:oMathPara>
+                  </a14:m>
+                  <a:endParaRPr lang="pt-BR" sz="2400" dirty="0"/>
+                </a:p>
+              </p:txBody>
+            </p:sp>
+          </mc:Choice>
+          <mc:Fallback xmlns="">
+            <p:sp>
+              <p:nvSpPr>
+                <p:cNvPr id="13" name="CaixaDeTexto 12">
+                  <a:extLst>
+                    <a:ext uri="{FF2B5EF4-FFF2-40B4-BE49-F238E27FC236}">
+                      <a16:creationId xmlns:a16="http://schemas.microsoft.com/office/drawing/2014/main" id="{0DD5471C-A64B-2523-03B6-5429998A9CAA}"/>
+                    </a:ext>
+                  </a:extLst>
+                </p:cNvPr>
+                <p:cNvSpPr txBox="1">
+                  <a:spLocks noRot="1" noChangeAspect="1" noMove="1" noResize="1" noEditPoints="1" noAdjustHandles="1" noChangeArrowheads="1" noChangeShapeType="1" noTextEdit="1"/>
+                </p:cNvSpPr>
+                <p:nvPr/>
+              </p:nvSpPr>
+              <p:spPr>
+                <a:xfrm flipH="1">
+                  <a:off x="2656972" y="3008452"/>
+                  <a:ext cx="467999" cy="461665"/>
+                </a:xfrm>
+                <a:prstGeom prst="rect">
+                  <a:avLst/>
+                </a:prstGeom>
+                <a:blipFill>
+                  <a:blip r:embed="rId6"/>
+                  <a:stretch>
+                    <a:fillRect t="-4000" r="-24675" b="-10667"/>
+                  </a:stretch>
+                </a:blipFill>
+              </p:spPr>
+              <p:txBody>
+                <a:bodyPr/>
+                <a:lstStyle/>
+                <a:p>
+                  <a:r>
+                    <a:rPr lang="pt-BR">
+                      <a:noFill/>
+                    </a:rPr>
+                    <a:t> </a:t>
+                  </a:r>
+                </a:p>
+              </p:txBody>
+            </p:sp>
+          </mc:Fallback>
+        </mc:AlternateContent>
+        <p:cxnSp>
+          <p:nvCxnSpPr>
+            <p:cNvPr id="28" name="Conector: Angulado 27">
+              <a:extLst>
+                <a:ext uri="{FF2B5EF4-FFF2-40B4-BE49-F238E27FC236}">
+                  <a16:creationId xmlns:a16="http://schemas.microsoft.com/office/drawing/2014/main" id="{93CAC8EC-8DD3-0065-D7A3-44F194B56749}"/>
+                </a:ext>
+              </a:extLst>
+            </p:cNvPr>
+            <p:cNvCxnSpPr>
+              <a:cxnSpLocks/>
+              <a:stCxn id="20" idx="1"/>
+              <a:endCxn id="18" idx="2"/>
+            </p:cNvCxnSpPr>
+            <p:nvPr/>
+          </p:nvCxnSpPr>
+          <p:spPr>
+            <a:xfrm flipV="1">
+              <a:off x="893787" y="3878943"/>
+              <a:ext cx="2986115" cy="719102"/>
+            </a:xfrm>
+            <a:prstGeom prst="bentConnector2">
+              <a:avLst/>
+            </a:prstGeom>
+            <a:ln>
+              <a:tailEnd type="triangle"/>
+            </a:ln>
+          </p:spPr>
+          <p:style>
+            <a:lnRef idx="1">
+              <a:schemeClr val="accent1"/>
+            </a:lnRef>
+            <a:fillRef idx="0">
+              <a:schemeClr val="accent1"/>
+            </a:fillRef>
+            <a:effectRef idx="0">
+              <a:schemeClr val="accent1"/>
+            </a:effectRef>
+            <a:fontRef idx="minor">
+              <a:schemeClr val="tx1"/>
+            </a:fontRef>
+          </p:style>
+        </p:cxnSp>
+        <p:cxnSp>
+          <p:nvCxnSpPr>
+            <p:cNvPr id="29" name="Conector: Angulado 28">
+              <a:extLst>
+                <a:ext uri="{FF2B5EF4-FFF2-40B4-BE49-F238E27FC236}">
+                  <a16:creationId xmlns:a16="http://schemas.microsoft.com/office/drawing/2014/main" id="{4BB76601-D203-2E3A-0CE4-DAE4C5F709EA}"/>
+                </a:ext>
+              </a:extLst>
+            </p:cNvPr>
+            <p:cNvCxnSpPr>
+              <a:stCxn id="18" idx="3"/>
+            </p:cNvCxnSpPr>
+            <p:nvPr/>
+          </p:nvCxnSpPr>
+          <p:spPr>
+            <a:xfrm flipH="1" flipV="1">
+              <a:off x="2663083" y="2378075"/>
+              <a:ext cx="1825228" cy="1076325"/>
+            </a:xfrm>
+            <a:prstGeom prst="bentConnector3">
+              <a:avLst>
+                <a:gd name="adj1" fmla="val -12524"/>
+              </a:avLst>
+            </a:prstGeom>
+            <a:ln>
+              <a:prstDash val="dash"/>
+              <a:headEnd type="none" w="med" len="med"/>
+              <a:tailEnd type="none" w="med" len="med"/>
+            </a:ln>
+          </p:spPr>
+          <p:style>
+            <a:lnRef idx="1">
+              <a:schemeClr val="accent1"/>
+            </a:lnRef>
+            <a:fillRef idx="0">
+              <a:schemeClr val="accent1"/>
+            </a:fillRef>
+            <a:effectRef idx="0">
+              <a:schemeClr val="accent1"/>
+            </a:effectRef>
+            <a:fontRef idx="minor">
+              <a:schemeClr val="tx1"/>
+            </a:fontRef>
+          </p:style>
+        </p:cxnSp>
+        <p:cxnSp>
+          <p:nvCxnSpPr>
+            <p:cNvPr id="30" name="Conector reto 29">
+              <a:extLst>
+                <a:ext uri="{FF2B5EF4-FFF2-40B4-BE49-F238E27FC236}">
+                  <a16:creationId xmlns:a16="http://schemas.microsoft.com/office/drawing/2014/main" id="{16D37D63-EDD1-FDE6-0ADD-36BADAF7DB27}"/>
+                </a:ext>
+              </a:extLst>
+            </p:cNvPr>
+            <p:cNvCxnSpPr/>
+            <p:nvPr/>
+          </p:nvCxnSpPr>
+          <p:spPr>
+            <a:xfrm flipH="1">
+              <a:off x="1450107" y="2378075"/>
+              <a:ext cx="1212396" cy="1743075"/>
+            </a:xfrm>
+            <a:prstGeom prst="line">
+              <a:avLst/>
+            </a:prstGeom>
+            <a:ln>
+              <a:prstDash val="dash"/>
+              <a:headEnd type="none" w="med" len="med"/>
+              <a:tailEnd type="triangle" w="med" len="med"/>
+            </a:ln>
+          </p:spPr>
+          <p:style>
+            <a:lnRef idx="1">
+              <a:schemeClr val="accent1"/>
+            </a:lnRef>
+            <a:fillRef idx="0">
+              <a:schemeClr val="accent1"/>
+            </a:fillRef>
+            <a:effectRef idx="0">
+              <a:schemeClr val="accent1"/>
+            </a:effectRef>
+            <a:fontRef idx="minor">
+              <a:schemeClr val="tx1"/>
+            </a:fontRef>
+          </p:style>
+        </p:cxnSp>
+        <p:sp>
+          <p:nvSpPr>
+            <p:cNvPr id="31" name="CaixaDeTexto 30">
+              <a:extLst>
+                <a:ext uri="{FF2B5EF4-FFF2-40B4-BE49-F238E27FC236}">
+                  <a16:creationId xmlns:a16="http://schemas.microsoft.com/office/drawing/2014/main" id="{D1E65769-723F-E0E4-8B19-F24F2391844D}"/>
+                </a:ext>
+              </a:extLst>
+            </p:cNvPr>
+            <p:cNvSpPr txBox="1"/>
+            <p:nvPr/>
+          </p:nvSpPr>
+          <p:spPr>
+            <a:xfrm>
+              <a:off x="893787" y="4074825"/>
+              <a:ext cx="1309262" cy="276999"/>
+            </a:xfrm>
+            <a:prstGeom prst="rect">
+              <a:avLst/>
+            </a:prstGeom>
+            <a:noFill/>
+          </p:spPr>
+          <p:txBody>
+            <a:bodyPr wrap="square" rtlCol="0">
+              <a:spAutoFit/>
+            </a:bodyPr>
+            <a:lstStyle/>
+            <a:p>
+              <a:pPr algn="ctr"/>
+              <a:r>
+                <a:rPr lang="pt-BR" sz="1200" dirty="0"/>
+                <a:t>Ajuste do modelo</a:t>
+              </a:r>
+            </a:p>
+          </p:txBody>
+        </p:sp>
+        <p:sp>
+          <p:nvSpPr>
+            <p:cNvPr id="35" name="CaixaDeTexto 34">
+              <a:extLst>
+                <a:ext uri="{FF2B5EF4-FFF2-40B4-BE49-F238E27FC236}">
+                  <a16:creationId xmlns:a16="http://schemas.microsoft.com/office/drawing/2014/main" id="{ED008859-9A38-E63A-CD30-71AEDC72C153}"/>
+                </a:ext>
+              </a:extLst>
+            </p:cNvPr>
+            <p:cNvSpPr txBox="1"/>
+            <p:nvPr/>
+          </p:nvSpPr>
+          <p:spPr>
+            <a:xfrm>
+              <a:off x="157187" y="4947981"/>
+              <a:ext cx="1047413" cy="461665"/>
+            </a:xfrm>
+            <a:prstGeom prst="rect">
+              <a:avLst/>
+            </a:prstGeom>
+            <a:noFill/>
+          </p:spPr>
+          <p:txBody>
+            <a:bodyPr wrap="square" rtlCol="0">
+              <a:spAutoFit/>
+            </a:bodyPr>
+            <a:lstStyle/>
+            <a:p>
+              <a:pPr algn="ctr"/>
+              <a:r>
+                <a:rPr lang="pt-BR" sz="1200" dirty="0"/>
+                <a:t>Conjunto de treinamento</a:t>
+              </a:r>
+            </a:p>
+          </p:txBody>
+        </p:sp>
+        <p:sp>
+          <p:nvSpPr>
+            <p:cNvPr id="36" name="CaixaDeTexto 35">
+              <a:extLst>
+                <a:ext uri="{FF2B5EF4-FFF2-40B4-BE49-F238E27FC236}">
+                  <a16:creationId xmlns:a16="http://schemas.microsoft.com/office/drawing/2014/main" id="{7827DB5B-F0A6-A2F0-7B68-97F6F9DC5ED8}"/>
+                </a:ext>
+              </a:extLst>
+            </p:cNvPr>
+            <p:cNvSpPr txBox="1"/>
+            <p:nvPr/>
+          </p:nvSpPr>
+          <p:spPr>
+            <a:xfrm>
+              <a:off x="2578608" y="3490140"/>
+              <a:ext cx="692886" cy="276999"/>
+            </a:xfrm>
+            <a:prstGeom prst="rect">
+              <a:avLst/>
+            </a:prstGeom>
+            <a:noFill/>
+          </p:spPr>
+          <p:txBody>
+            <a:bodyPr wrap="square" rtlCol="0">
+              <a:spAutoFit/>
+            </a:bodyPr>
+            <a:lstStyle/>
+            <a:p>
+              <a:pPr algn="ctr"/>
+              <a:r>
+                <a:rPr lang="pt-BR" sz="1200" dirty="0"/>
+                <a:t>palpite</a:t>
+              </a:r>
+            </a:p>
+          </p:txBody>
+        </p:sp>
+        <p:sp>
+          <p:nvSpPr>
+            <p:cNvPr id="37" name="CaixaDeTexto 36">
+              <a:extLst>
+                <a:ext uri="{FF2B5EF4-FFF2-40B4-BE49-F238E27FC236}">
+                  <a16:creationId xmlns:a16="http://schemas.microsoft.com/office/drawing/2014/main" id="{D6885FDC-ACED-E437-62E3-542908BECB0F}"/>
+                </a:ext>
+              </a:extLst>
+            </p:cNvPr>
+            <p:cNvSpPr txBox="1"/>
+            <p:nvPr/>
+          </p:nvSpPr>
+          <p:spPr>
+            <a:xfrm>
+              <a:off x="4433138" y="3443383"/>
+              <a:ext cx="454917" cy="276999"/>
+            </a:xfrm>
+            <a:prstGeom prst="rect">
+              <a:avLst/>
+            </a:prstGeom>
+            <a:noFill/>
+          </p:spPr>
+          <p:txBody>
+            <a:bodyPr wrap="square" rtlCol="0">
+              <a:spAutoFit/>
+            </a:bodyPr>
+            <a:lstStyle/>
+            <a:p>
+              <a:pPr algn="ctr"/>
+              <a:r>
+                <a:rPr lang="pt-BR" sz="1200" dirty="0"/>
+                <a:t>erro</a:t>
+              </a:r>
+            </a:p>
+          </p:txBody>
+        </p:sp>
+      </p:grpSp>
+    </p:spTree>
+    <p:extLst>
+      <p:ext uri="{BB962C8B-B14F-4D97-AF65-F5344CB8AC3E}">
+        <p14:creationId xmlns:p14="http://schemas.microsoft.com/office/powerpoint/2010/main" val="1056112654"/>
+      </p:ext>
+    </p:extLst>
+  </p:cSld>
+  <p:clrMapOvr>
+    <a:masterClrMapping/>
+  </p:clrMapOvr>
+</p:sld>
+</file>
+
+<file path=ppt/slides/slide22.xml><?xml version="1.0" encoding="utf-8"?>
 <p:sld xmlns:a="http://schemas.openxmlformats.org/drawingml/2006/main" xmlns:r="http://schemas.openxmlformats.org/officeDocument/2006/relationships" xmlns:p="http://schemas.openxmlformats.org/presentationml/2006/main">
   <p:cSld>
     <p:spTree>
@@ -12969,7 +16478,7 @@
           <a:p>
             <a:r>
               <a:rPr lang="pt-BR" dirty="0"/>
-              <a:t>Esse processo é repetido até que o erro seja </a:t>
+              <a:t>Esse processo iterativo de aprendizado é repetido até que o erro seja </a:t>
             </a:r>
             <a:r>
               <a:rPr lang="pt-BR" b="1" i="1" dirty="0">
@@ -13368,8 +16877,8 @@
             </a:p>
           </p:txBody>
         </p:sp>
-        <mc:AlternateContent xmlns:mc="http://schemas.openxmlformats.org/markup-compatibility/2006">
-          <mc:Choice xmlns:a14="http://schemas.microsoft.com/office/drawing/2010/main" Requires="a14">
+        <mc:AlternateContent xmlns:mc="http://schemas.openxmlformats.org/markup-compatibility/2006" xmlns:a14="http://schemas.microsoft.com/office/drawing/2010/main">
+          <mc:Choice Requires="a14">
             <p:sp>
               <p:nvSpPr>
                 <p:cNvPr id="18" name="CaixaDeTexto 17">
@@ -13419,7 +16928,7 @@
               </p:txBody>
             </p:sp>
           </mc:Choice>
-          <mc:Fallback>
+          <mc:Fallback xmlns="">
             <p:sp>
               <p:nvSpPr>
                 <p:cNvPr id="18" name="CaixaDeTexto 17">
@@ -13955,7 +17464,7 @@
 </p:sld>
 </file>
 
-<file path=ppt/slides/slide18.xml><?xml version="1.0" encoding="utf-8"?>
+<file path=ppt/slides/slide23.xml><?xml version="1.0" encoding="utf-8"?>
 <p:sld xmlns:a="http://schemas.openxmlformats.org/drawingml/2006/main" xmlns:r="http://schemas.openxmlformats.org/officeDocument/2006/relationships" xmlns:p="http://schemas.openxmlformats.org/presentationml/2006/main">
   <p:cSld>
     <p:spTree>
@@ -14000,8 +17509,8 @@
           </a:p>
         </p:txBody>
       </p:sp>
-      <mc:AlternateContent xmlns:mc="http://schemas.openxmlformats.org/markup-compatibility/2006">
-        <mc:Choice xmlns:a14="http://schemas.microsoft.com/office/drawing/2010/main" Requires="a14">
+      <mc:AlternateContent xmlns:mc="http://schemas.openxmlformats.org/markup-compatibility/2006" xmlns:a14="http://schemas.microsoft.com/office/drawing/2010/main">
+        <mc:Choice Requires="a14">
           <p:sp>
             <p:nvSpPr>
               <p:cNvPr id="3" name="Espaço Reservado para Conteúdo 2">
@@ -14106,6 +17615,9 @@
                 </a:r>
                 <a:r>
                   <a:rPr lang="pt-BR" b="1" i="1" dirty="0">
+                    <a:solidFill>
+                      <a:schemeClr val="accent1"/>
+                    </a:solidFill>
                     <a:effectLst/>
                   </a:rPr>
                   <a:t>conclusões gerais </a:t>
@@ -14118,6 +17630,9 @@
                 </a:r>
                 <a:r>
                   <a:rPr lang="pt-BR" b="1" i="1" dirty="0">
+                    <a:solidFill>
+                      <a:srgbClr val="7030A0"/>
+                    </a:solidFill>
                     <a:effectLst/>
                   </a:rPr>
                   <a:t>experiências passadas</a:t>
@@ -14133,7 +17648,7 @@
             </p:txBody>
           </p:sp>
         </mc:Choice>
-        <mc:Fallback>
+        <mc:Fallback xmlns="">
           <p:sp>
             <p:nvSpPr>
               <p:cNvPr id="3" name="Espaço Reservado para Conteúdo 2">
@@ -14167,7 +17682,7 @@
               <a:lstStyle/>
               <a:p>
                 <a:r>
-                  <a:rPr lang="pt-BR">
+                  <a:rPr lang="en-US">
                     <a:noFill/>
                   </a:rPr>
                   <a:t> </a:t>
@@ -14457,8 +17972,8 @@
             </a:p>
           </p:txBody>
         </p:sp>
-        <mc:AlternateContent xmlns:mc="http://schemas.openxmlformats.org/markup-compatibility/2006">
-          <mc:Choice xmlns:a14="http://schemas.microsoft.com/office/drawing/2010/main" Requires="a14">
+        <mc:AlternateContent xmlns:mc="http://schemas.openxmlformats.org/markup-compatibility/2006" xmlns:a14="http://schemas.microsoft.com/office/drawing/2010/main">
+          <mc:Choice Requires="a14">
             <p:sp>
               <p:nvSpPr>
                 <p:cNvPr id="18" name="CaixaDeTexto 17">
@@ -14508,7 +18023,7 @@
               </p:txBody>
             </p:sp>
           </mc:Choice>
-          <mc:Fallback>
+          <mc:Fallback xmlns="">
             <p:sp>
               <p:nvSpPr>
                 <p:cNvPr id="18" name="CaixaDeTexto 17">
@@ -15044,7 +18559,7 @@
 </p:sld>
 </file>
 
-<file path=ppt/slides/slide19.xml><?xml version="1.0" encoding="utf-8"?>
+<file path=ppt/slides/slide24.xml><?xml version="1.0" encoding="utf-8"?>
 <p:sld xmlns:a="http://schemas.openxmlformats.org/drawingml/2006/main" xmlns:r="http://schemas.openxmlformats.org/officeDocument/2006/relationships" xmlns:p="http://schemas.openxmlformats.org/presentationml/2006/main">
   <p:cSld>
     <p:spTree>
@@ -15113,13 +18628,25 @@
         </p:spPr>
         <p:txBody>
           <a:bodyPr>
-            <a:normAutofit/>
+            <a:normAutofit lnSpcReduction="10000"/>
           </a:bodyPr>
           <a:lstStyle/>
           <a:p>
             <a:r>
               <a:rPr lang="pt-BR" sz="2800" dirty="0"/>
-              <a:t>Por exemplo, o modelo de ML pode ser uma </a:t>
+              <a:t>Por exemplo, o modelo de ML pode ser um </a:t>
+            </a:r>
+            <a:r>
+              <a:rPr lang="pt-BR" sz="2800" b="1" i="1" dirty="0">
+                <a:solidFill>
+                  <a:srgbClr val="00B050"/>
+                </a:solidFill>
+              </a:rPr>
+              <a:t>neurônio</a:t>
+            </a:r>
+            <a:r>
+              <a:rPr lang="pt-BR" sz="2800" dirty="0"/>
+              <a:t> ou uma </a:t>
             </a:r>
             <a:r>
               <a:rPr lang="pt-BR" sz="2800" b="1" i="1" dirty="0">
@@ -15253,168 +18780,7 @@
 </p:sld>
 </file>
 
-<file path=ppt/slides/slide2.xml><?xml version="1.0" encoding="utf-8"?>
-<p:sld xmlns:a="http://schemas.openxmlformats.org/drawingml/2006/main" xmlns:r="http://schemas.openxmlformats.org/officeDocument/2006/relationships" xmlns:p="http://schemas.openxmlformats.org/presentationml/2006/main">
-  <p:cSld>
-    <p:spTree>
-      <p:nvGrpSpPr>
-        <p:cNvPr id="1" name=""/>
-        <p:cNvGrpSpPr/>
-        <p:nvPr/>
-      </p:nvGrpSpPr>
-      <p:grpSpPr>
-        <a:xfrm>
-          <a:off x="0" y="0"/>
-          <a:ext cx="0" cy="0"/>
-          <a:chOff x="0" y="0"/>
-          <a:chExt cx="0" cy="0"/>
-        </a:xfrm>
-      </p:grpSpPr>
-      <p:sp>
-        <p:nvSpPr>
-          <p:cNvPr id="2" name="Título 1">
-            <a:extLst>
-              <a:ext uri="{FF2B5EF4-FFF2-40B4-BE49-F238E27FC236}">
-                <a16:creationId xmlns:a16="http://schemas.microsoft.com/office/drawing/2014/main" id="{EECB3FED-5D1A-7084-5333-A3B2FA75F608}"/>
-              </a:ext>
-            </a:extLst>
-          </p:cNvPr>
-          <p:cNvSpPr>
-            <a:spLocks noGrp="1"/>
-          </p:cNvSpPr>
-          <p:nvPr>
-            <p:ph type="title"/>
-          </p:nvPr>
-        </p:nvSpPr>
-        <p:spPr/>
-        <p:txBody>
-          <a:bodyPr/>
-          <a:lstStyle/>
-          <a:p>
-            <a:r>
-              <a:rPr lang="pt-BR" dirty="0"/>
-              <a:t>O que vamos ver?</a:t>
-            </a:r>
-          </a:p>
-        </p:txBody>
-      </p:sp>
-      <p:sp>
-        <p:nvSpPr>
-          <p:cNvPr id="3" name="Espaço Reservado para Conteúdo 2">
-            <a:extLst>
-              <a:ext uri="{FF2B5EF4-FFF2-40B4-BE49-F238E27FC236}">
-                <a16:creationId xmlns:a16="http://schemas.microsoft.com/office/drawing/2014/main" id="{25FE7774-7186-A846-D8DE-518B2CBF4EBD}"/>
-              </a:ext>
-            </a:extLst>
-          </p:cNvPr>
-          <p:cNvSpPr>
-            <a:spLocks noGrp="1"/>
-          </p:cNvSpPr>
-          <p:nvPr>
-            <p:ph idx="1"/>
-          </p:nvPr>
-        </p:nvSpPr>
-        <p:spPr>
-          <a:xfrm>
-            <a:off x="838199" y="1825624"/>
-            <a:ext cx="10929257" cy="5032376"/>
-          </a:xfrm>
-        </p:spPr>
-        <p:txBody>
-          <a:bodyPr>
-            <a:normAutofit/>
-          </a:bodyPr>
-          <a:lstStyle/>
-          <a:p>
-            <a:r>
-              <a:rPr lang="pt-BR" dirty="0"/>
-              <a:t>Neste tópico vamos explorar o que o </a:t>
-            </a:r>
-            <a:r>
-              <a:rPr lang="pt-BR" b="1" i="1" dirty="0">
-                <a:solidFill>
-                  <a:srgbClr val="00B050"/>
-                </a:solidFill>
-              </a:rPr>
-              <a:t>aprendizado de máquina </a:t>
-            </a:r>
-            <a:r>
-              <a:rPr lang="pt-BR" dirty="0"/>
-              <a:t>realmente é em um nível mais fundamental.</a:t>
-            </a:r>
-          </a:p>
-          <a:p>
-            <a:r>
-              <a:rPr lang="pt-BR" dirty="0"/>
-              <a:t>Basicamente, o que vamos discutir é um </a:t>
-            </a:r>
-            <a:r>
-              <a:rPr lang="pt-BR" b="1" i="1" dirty="0">
-                <a:solidFill>
-                  <a:srgbClr val="00B050"/>
-                </a:solidFill>
-              </a:rPr>
-              <a:t>novo paradigma</a:t>
-            </a:r>
-            <a:r>
-              <a:rPr lang="pt-BR" dirty="0"/>
-              <a:t>, onde </a:t>
-            </a:r>
-            <a:r>
-              <a:rPr lang="pt-BR" b="1" i="1" dirty="0"/>
-              <a:t>ao invés de programar uma solução </a:t>
-            </a:r>
-            <a:r>
-              <a:rPr lang="pt-BR" dirty="0"/>
-              <a:t>para um determinado problema, vamos </a:t>
-            </a:r>
-            <a:r>
-              <a:rPr lang="pt-BR" b="1" i="1" dirty="0"/>
-              <a:t>ensinar um computador a aprender a solução </a:t>
-            </a:r>
-            <a:r>
-              <a:rPr lang="pt-BR" dirty="0"/>
-              <a:t>através de experiências prévias.</a:t>
-            </a:r>
-          </a:p>
-          <a:p>
-            <a:r>
-              <a:rPr lang="pt-BR" dirty="0"/>
-              <a:t>Esse novo paradigma tem o potencial para </a:t>
-            </a:r>
-            <a:r>
-              <a:rPr lang="pt-BR" b="1" i="1" dirty="0"/>
-              <a:t>resolver problemas que </a:t>
-            </a:r>
-            <a:r>
-              <a:rPr lang="pt-BR" b="1" i="1" dirty="0">
-                <a:solidFill>
-                  <a:srgbClr val="00B050"/>
-                </a:solidFill>
-              </a:rPr>
-              <a:t>não podem ou são muito difíceis de serem resolvidos programaticamente</a:t>
-            </a:r>
-            <a:r>
-              <a:rPr lang="pt-BR" dirty="0"/>
-              <a:t>.</a:t>
-            </a:r>
-          </a:p>
-        </p:txBody>
-      </p:sp>
-    </p:spTree>
-    <p:extLst>
-      <p:ext uri="{BB962C8B-B14F-4D97-AF65-F5344CB8AC3E}">
-        <p14:creationId xmlns:p14="http://schemas.microsoft.com/office/powerpoint/2010/main" val="529739951"/>
-      </p:ext>
-    </p:extLst>
-  </p:cSld>
-  <p:clrMapOvr>
-    <a:masterClrMapping/>
-  </p:clrMapOvr>
-</p:sld>
-</file>
-
-<file path=ppt/slides/slide20.xml><?xml version="1.0" encoding="utf-8"?>
+<file path=ppt/slides/slide25.xml><?xml version="1.0" encoding="utf-8"?>
 <p:sld xmlns:a="http://schemas.openxmlformats.org/drawingml/2006/main" xmlns:r="http://schemas.openxmlformats.org/officeDocument/2006/relationships" xmlns:p="http://schemas.openxmlformats.org/presentationml/2006/main">
   <p:cSld>
     <p:spTree>
@@ -16183,7 +19549,7 @@
 </p:sld>
 </file>
 
-<file path=ppt/slides/slide21.xml><?xml version="1.0" encoding="utf-8"?>
+<file path=ppt/slides/slide26.xml><?xml version="1.0" encoding="utf-8"?>
 <p:sld xmlns:a="http://schemas.openxmlformats.org/drawingml/2006/main" xmlns:r="http://schemas.openxmlformats.org/officeDocument/2006/relationships" xmlns:p="http://schemas.openxmlformats.org/presentationml/2006/main">
   <p:cSld>
     <p:spTree>
@@ -16298,7 +19664,7 @@
             <a:r>
               <a:rPr lang="pt-BR" b="1" i="1" dirty="0">
                 <a:solidFill>
-                  <a:srgbClr val="00B050"/>
+                  <a:srgbClr val="7030A0"/>
                 </a:solidFill>
               </a:rPr>
               <a:t>solução geral</a:t>
@@ -16575,7 +19941,7 @@
 </p:sld>
 </file>
 
-<file path=ppt/slides/slide22.xml><?xml version="1.0" encoding="utf-8"?>
+<file path=ppt/slides/slide27.xml><?xml version="1.0" encoding="utf-8"?>
 <p:sld xmlns:a="http://schemas.openxmlformats.org/drawingml/2006/main" xmlns:r="http://schemas.openxmlformats.org/officeDocument/2006/relationships" xmlns:p="http://schemas.openxmlformats.org/presentationml/2006/main">
   <p:cSld>
     <p:spTree>
@@ -17245,7 +20611,23 @@
                     <a:srgbClr val="00B050"/>
                   </a:solidFill>
                 </a:rPr>
-                <a:t>O modelo aprendeu que uma reta é um </a:t>
+                <a:t>O modelo aprendeu que uma </a:t>
+              </a:r>
+              <a:r>
+                <a:rPr lang="pt-BR" sz="1400" b="1" i="1" dirty="0">
+                  <a:solidFill>
+                    <a:schemeClr val="accent2"/>
+                  </a:solidFill>
+                </a:rPr>
+                <a:t>reta</a:t>
+              </a:r>
+              <a:r>
+                <a:rPr lang="pt-BR" sz="1400" b="1" i="1" dirty="0">
+                  <a:solidFill>
+                    <a:srgbClr val="00B050"/>
+                  </a:solidFill>
+                </a:rPr>
+                <a:t> é um </a:t>
               </a:r>
               <a:r>
                 <a:rPr lang="pt-BR" sz="1400" b="1" i="1" dirty="0">
@@ -17678,7 +21060,7 @@
 </p:sld>
 </file>
 
-<file path=ppt/slides/slide23.xml><?xml version="1.0" encoding="utf-8"?>
+<file path=ppt/slides/slide28.xml><?xml version="1.0" encoding="utf-8"?>
 <p:sld xmlns:a="http://schemas.openxmlformats.org/drawingml/2006/main" xmlns:r="http://schemas.openxmlformats.org/officeDocument/2006/relationships" xmlns:p="http://schemas.openxmlformats.org/presentationml/2006/main">
   <p:cSld>
     <p:spTree>
@@ -18934,7 +22316,7 @@
 </p:sld>
 </file>
 
-<file path=ppt/slides/slide24.xml><?xml version="1.0" encoding="utf-8"?>
+<file path=ppt/slides/slide29.xml><?xml version="1.0" encoding="utf-8"?>
 <p:sld xmlns:a="http://schemas.openxmlformats.org/drawingml/2006/main" xmlns:r="http://schemas.openxmlformats.org/officeDocument/2006/relationships" xmlns:p="http://schemas.openxmlformats.org/presentationml/2006/main">
   <p:cSld>
     <p:spTree>
@@ -19030,7 +22412,433 @@
 </p:sld>
 </file>
 
-<file path=ppt/slides/slide25.xml><?xml version="1.0" encoding="utf-8"?>
+<file path=ppt/slides/slide3.xml><?xml version="1.0" encoding="utf-8"?>
+<p:sld xmlns:a="http://schemas.openxmlformats.org/drawingml/2006/main" xmlns:r="http://schemas.openxmlformats.org/officeDocument/2006/relationships" xmlns:p="http://schemas.openxmlformats.org/presentationml/2006/main">
+  <p:cSld>
+    <p:spTree>
+      <p:nvGrpSpPr>
+        <p:cNvPr id="1" name=""/>
+        <p:cNvGrpSpPr/>
+        <p:nvPr/>
+      </p:nvGrpSpPr>
+      <p:grpSpPr>
+        <a:xfrm>
+          <a:off x="0" y="0"/>
+          <a:ext cx="0" cy="0"/>
+          <a:chOff x="0" y="0"/>
+          <a:chExt cx="0" cy="0"/>
+        </a:xfrm>
+      </p:grpSpPr>
+      <p:sp>
+        <p:nvSpPr>
+          <p:cNvPr id="2" name="Título 1"/>
+          <p:cNvSpPr>
+            <a:spLocks noGrp="1"/>
+          </p:cNvSpPr>
+          <p:nvPr>
+            <p:ph type="title"/>
+          </p:nvPr>
+        </p:nvSpPr>
+        <p:spPr/>
+        <p:txBody>
+          <a:bodyPr/>
+          <a:lstStyle/>
+          <a:p>
+            <a:r>
+              <a:rPr lang="pt-BR" dirty="0"/>
+              <a:t>O que é o aprendizado de máquina?</a:t>
+            </a:r>
+            <a:endParaRPr lang="en-US" dirty="0"/>
+          </a:p>
+        </p:txBody>
+      </p:sp>
+      <p:sp>
+        <p:nvSpPr>
+          <p:cNvPr id="3" name="Espaço Reservado para Conteúdo 2"/>
+          <p:cNvSpPr>
+            <a:spLocks noGrp="1"/>
+          </p:cNvSpPr>
+          <p:nvPr>
+            <p:ph idx="1"/>
+          </p:nvPr>
+        </p:nvSpPr>
+        <p:spPr>
+          <a:xfrm>
+            <a:off x="5135418" y="1825624"/>
+            <a:ext cx="6899564" cy="5032376"/>
+          </a:xfrm>
+        </p:spPr>
+        <p:txBody>
+          <a:bodyPr>
+            <a:normAutofit/>
+          </a:bodyPr>
+          <a:lstStyle/>
+          <a:p>
+            <a:r>
+              <a:rPr lang="pt-BR" dirty="0"/>
+              <a:t>É uma das subáreas da inteligência artificial.</a:t>
+            </a:r>
+          </a:p>
+          <a:p>
+            <a:r>
+              <a:rPr lang="pt-BR" dirty="0"/>
+              <a:t>O termo foi cunhado em 1959, pelo cientista da computação Arthur Samuel, que o definiu como o </a:t>
+            </a:r>
+          </a:p>
+          <a:p>
+            <a:pPr marL="0" indent="0" algn="ctr">
+              <a:buNone/>
+            </a:pPr>
+            <a:r>
+              <a:rPr lang="pt-BR" dirty="0"/>
+              <a:t>“</a:t>
+            </a:r>
+            <a:r>
+              <a:rPr lang="pt-BR" i="1" dirty="0"/>
+              <a:t>Campo de estudo que dá aos computadores a habilidade de </a:t>
+            </a:r>
+            <a:r>
+              <a:rPr lang="pt-BR" b="1" i="1" dirty="0">
+                <a:solidFill>
+                  <a:srgbClr val="00B0F0"/>
+                </a:solidFill>
+              </a:rPr>
+              <a:t>aprender sem serem explicitamente programados</a:t>
+            </a:r>
+            <a:r>
+              <a:rPr lang="pt-BR" b="1" i="1" dirty="0"/>
+              <a:t>.</a:t>
+            </a:r>
+            <a:r>
+              <a:rPr lang="pt-BR" dirty="0"/>
+              <a:t>”</a:t>
+            </a:r>
+          </a:p>
+        </p:txBody>
+      </p:sp>
+      <p:grpSp>
+        <p:nvGrpSpPr>
+          <p:cNvPr id="7" name="Group 10">
+            <a:extLst>
+              <a:ext uri="{FF2B5EF4-FFF2-40B4-BE49-F238E27FC236}">
+                <a16:creationId xmlns:a16="http://schemas.microsoft.com/office/drawing/2014/main" id="{77108F97-1760-2B74-0476-658F3DF7B667}"/>
+              </a:ext>
+            </a:extLst>
+          </p:cNvPr>
+          <p:cNvGrpSpPr>
+            <a:grpSpLocks noChangeAspect="1"/>
+          </p:cNvGrpSpPr>
+          <p:nvPr/>
+        </p:nvGrpSpPr>
+        <p:grpSpPr>
+          <a:xfrm>
+            <a:off x="838200" y="2278206"/>
+            <a:ext cx="3446442" cy="2610046"/>
+            <a:chOff x="9278726" y="984249"/>
+            <a:chExt cx="3036570" cy="2249488"/>
+          </a:xfrm>
+        </p:grpSpPr>
+        <p:grpSp>
+          <p:nvGrpSpPr>
+            <p:cNvPr id="8" name="Agrupar 4">
+              <a:extLst>
+                <a:ext uri="{FF2B5EF4-FFF2-40B4-BE49-F238E27FC236}">
+                  <a16:creationId xmlns:a16="http://schemas.microsoft.com/office/drawing/2014/main" id="{B305AC8F-D01B-A38A-7648-CDFB28BF0B9A}"/>
+                </a:ext>
+              </a:extLst>
+            </p:cNvPr>
+            <p:cNvGrpSpPr/>
+            <p:nvPr/>
+          </p:nvGrpSpPr>
+          <p:grpSpPr>
+            <a:xfrm>
+              <a:off x="9400740" y="984249"/>
+              <a:ext cx="2621635" cy="2249488"/>
+              <a:chOff x="9273707" y="365125"/>
+              <a:chExt cx="2918293" cy="2351181"/>
+            </a:xfrm>
+          </p:grpSpPr>
+          <p:pic>
+            <p:nvPicPr>
+              <p:cNvPr id="14" name="Picture 2" descr="Image result for umbrella">
+                <a:extLst>
+                  <a:ext uri="{FF2B5EF4-FFF2-40B4-BE49-F238E27FC236}">
+                    <a16:creationId xmlns:a16="http://schemas.microsoft.com/office/drawing/2014/main" id="{1C4F0E56-04EE-C84D-6203-EA46E6F7A273}"/>
+                  </a:ext>
+                </a:extLst>
+              </p:cNvPr>
+              <p:cNvPicPr>
+                <a:picLocks noChangeAspect="1" noChangeArrowheads="1"/>
+              </p:cNvPicPr>
+              <p:nvPr/>
+            </p:nvPicPr>
+            <p:blipFill rotWithShape="1">
+              <a:blip r:embed="rId3">
+                <a:extLst>
+                  <a:ext uri="{28A0092B-C50C-407E-A947-70E740481C1C}">
+                    <a14:useLocalDpi xmlns:a14="http://schemas.microsoft.com/office/drawing/2010/main" val="0"/>
+                  </a:ext>
+                </a:extLst>
+              </a:blip>
+              <a:srcRect t="12511" b="6921"/>
+              <a:stretch/>
+            </p:blipFill>
+            <p:spPr bwMode="auto">
+              <a:xfrm>
+                <a:off x="9273707" y="365125"/>
+                <a:ext cx="2918293" cy="2351181"/>
+              </a:xfrm>
+              <a:prstGeom prst="rect">
+                <a:avLst/>
+              </a:prstGeom>
+              <a:noFill/>
+              <a:extLst>
+                <a:ext uri="{909E8E84-426E-40DD-AFC4-6F175D3DCCD1}">
+                  <a14:hiddenFill xmlns:a14="http://schemas.microsoft.com/office/drawing/2010/main">
+                    <a:solidFill>
+                      <a:srgbClr val="FFFFFF"/>
+                    </a:solidFill>
+                  </a14:hiddenFill>
+                </a:ext>
+              </a:extLst>
+            </p:spPr>
+          </p:pic>
+          <p:sp>
+            <p:nvSpPr>
+              <p:cNvPr id="15" name="CaixaDeTexto 3">
+                <a:extLst>
+                  <a:ext uri="{FF2B5EF4-FFF2-40B4-BE49-F238E27FC236}">
+                    <a16:creationId xmlns:a16="http://schemas.microsoft.com/office/drawing/2014/main" id="{0441D544-9861-CEB3-3639-E49BCB7DD69D}"/>
+                  </a:ext>
+                </a:extLst>
+              </p:cNvPr>
+              <p:cNvSpPr txBox="1"/>
+              <p:nvPr/>
+            </p:nvSpPr>
+            <p:spPr>
+              <a:xfrm>
+                <a:off x="10342887" y="710931"/>
+                <a:ext cx="779930" cy="482426"/>
+              </a:xfrm>
+              <a:prstGeom prst="rect">
+                <a:avLst/>
+              </a:prstGeom>
+              <a:noFill/>
+            </p:spPr>
+            <p:txBody>
+              <a:bodyPr wrap="square" rtlCol="0">
+                <a:spAutoFit/>
+              </a:bodyPr>
+              <a:lstStyle/>
+              <a:p>
+                <a:pPr algn="ctr"/>
+                <a:r>
+                  <a:rPr lang="pt-BR" b="1" dirty="0">
+                    <a:solidFill>
+                      <a:schemeClr val="bg1"/>
+                    </a:solidFill>
+                  </a:rPr>
+                  <a:t>IA</a:t>
+                </a:r>
+              </a:p>
+            </p:txBody>
+          </p:sp>
+        </p:grpSp>
+        <p:sp>
+          <p:nvSpPr>
+            <p:cNvPr id="9" name="TextBox 8">
+              <a:extLst>
+                <a:ext uri="{FF2B5EF4-FFF2-40B4-BE49-F238E27FC236}">
+                  <a16:creationId xmlns:a16="http://schemas.microsoft.com/office/drawing/2014/main" id="{45E610A7-177F-E309-72FC-31FF7165FD03}"/>
+                </a:ext>
+              </a:extLst>
+            </p:cNvPr>
+            <p:cNvSpPr txBox="1"/>
+            <p:nvPr/>
+          </p:nvSpPr>
+          <p:spPr>
+            <a:xfrm>
+              <a:off x="11230128" y="2055309"/>
+              <a:ext cx="668574" cy="384634"/>
+            </a:xfrm>
+            <a:prstGeom prst="rect">
+              <a:avLst/>
+            </a:prstGeom>
+            <a:noFill/>
+          </p:spPr>
+          <p:txBody>
+            <a:bodyPr wrap="square" rtlCol="0">
+              <a:spAutoFit/>
+            </a:bodyPr>
+            <a:lstStyle/>
+            <a:p>
+              <a:pPr algn="ctr"/>
+              <a:r>
+                <a:rPr lang="pt-BR" sz="1400" dirty="0"/>
+                <a:t>ML</a:t>
+              </a:r>
+            </a:p>
+          </p:txBody>
+        </p:sp>
+        <p:sp>
+          <p:nvSpPr>
+            <p:cNvPr id="10" name="TextBox 13">
+              <a:extLst>
+                <a:ext uri="{FF2B5EF4-FFF2-40B4-BE49-F238E27FC236}">
+                  <a16:creationId xmlns:a16="http://schemas.microsoft.com/office/drawing/2014/main" id="{2BB7CEB8-37B2-4B53-B3DE-8197F8F01D24}"/>
+                </a:ext>
+              </a:extLst>
+            </p:cNvPr>
+            <p:cNvSpPr txBox="1"/>
+            <p:nvPr/>
+          </p:nvSpPr>
+          <p:spPr>
+            <a:xfrm>
+              <a:off x="9436672" y="1995046"/>
+              <a:ext cx="740011" cy="384634"/>
+            </a:xfrm>
+            <a:prstGeom prst="rect">
+              <a:avLst/>
+            </a:prstGeom>
+            <a:noFill/>
+          </p:spPr>
+          <p:txBody>
+            <a:bodyPr wrap="square" rtlCol="0">
+              <a:spAutoFit/>
+            </a:bodyPr>
+            <a:lstStyle/>
+            <a:p>
+              <a:pPr algn="ctr"/>
+              <a:r>
+                <a:rPr lang="pt-BR" sz="1400" dirty="0"/>
+                <a:t>NLP</a:t>
+              </a:r>
+            </a:p>
+          </p:txBody>
+        </p:sp>
+        <p:sp>
+          <p:nvSpPr>
+            <p:cNvPr id="11" name="TextBox 14">
+              <a:extLst>
+                <a:ext uri="{FF2B5EF4-FFF2-40B4-BE49-F238E27FC236}">
+                  <a16:creationId xmlns:a16="http://schemas.microsoft.com/office/drawing/2014/main" id="{7DD59A88-5397-B8A2-6CB4-DEE6DE47910C}"/>
+                </a:ext>
+              </a:extLst>
+            </p:cNvPr>
+            <p:cNvSpPr txBox="1"/>
+            <p:nvPr/>
+          </p:nvSpPr>
+          <p:spPr>
+            <a:xfrm>
+              <a:off x="9278726" y="2459661"/>
+              <a:ext cx="1303556" cy="384634"/>
+            </a:xfrm>
+            <a:prstGeom prst="rect">
+              <a:avLst/>
+            </a:prstGeom>
+            <a:noFill/>
+          </p:spPr>
+          <p:txBody>
+            <a:bodyPr wrap="square" rtlCol="0">
+              <a:spAutoFit/>
+            </a:bodyPr>
+            <a:lstStyle/>
+            <a:p>
+              <a:pPr algn="ctr"/>
+              <a:r>
+                <a:rPr lang="pt-BR" sz="1400" dirty="0"/>
+                <a:t>Robótica</a:t>
+              </a:r>
+            </a:p>
+          </p:txBody>
+        </p:sp>
+        <p:sp>
+          <p:nvSpPr>
+            <p:cNvPr id="12" name="TextBox 15">
+              <a:extLst>
+                <a:ext uri="{FF2B5EF4-FFF2-40B4-BE49-F238E27FC236}">
+                  <a16:creationId xmlns:a16="http://schemas.microsoft.com/office/drawing/2014/main" id="{3D747F60-3DCF-C18F-3605-518E24E523C9}"/>
+                </a:ext>
+              </a:extLst>
+            </p:cNvPr>
+            <p:cNvSpPr txBox="1"/>
+            <p:nvPr/>
+          </p:nvSpPr>
+          <p:spPr>
+            <a:xfrm>
+              <a:off x="10804705" y="2006626"/>
+              <a:ext cx="514350" cy="384634"/>
+            </a:xfrm>
+            <a:prstGeom prst="rect">
+              <a:avLst/>
+            </a:prstGeom>
+            <a:noFill/>
+          </p:spPr>
+          <p:txBody>
+            <a:bodyPr wrap="square" rtlCol="0">
+              <a:spAutoFit/>
+            </a:bodyPr>
+            <a:lstStyle/>
+            <a:p>
+              <a:pPr algn="ctr"/>
+              <a:r>
+                <a:rPr lang="pt-BR" sz="1400" dirty="0"/>
+                <a:t>CV</a:t>
+              </a:r>
+            </a:p>
+          </p:txBody>
+        </p:sp>
+        <p:sp>
+          <p:nvSpPr>
+            <p:cNvPr id="13" name="TextBox 16">
+              <a:extLst>
+                <a:ext uri="{FF2B5EF4-FFF2-40B4-BE49-F238E27FC236}">
+                  <a16:creationId xmlns:a16="http://schemas.microsoft.com/office/drawing/2014/main" id="{EB9D862A-6D65-3E7C-F7D6-258667FEDB63}"/>
+                </a:ext>
+              </a:extLst>
+            </p:cNvPr>
+            <p:cNvSpPr txBox="1"/>
+            <p:nvPr/>
+          </p:nvSpPr>
+          <p:spPr>
+            <a:xfrm>
+              <a:off x="10662720" y="2564126"/>
+              <a:ext cx="1652576" cy="653876"/>
+            </a:xfrm>
+            <a:prstGeom prst="rect">
+              <a:avLst/>
+            </a:prstGeom>
+            <a:noFill/>
+          </p:spPr>
+          <p:txBody>
+            <a:bodyPr wrap="square" rtlCol="0">
+              <a:spAutoFit/>
+            </a:bodyPr>
+            <a:lstStyle/>
+            <a:p>
+              <a:pPr algn="ctr"/>
+              <a:r>
+                <a:rPr lang="pt-BR" sz="1400" dirty="0"/>
+                <a:t>Raciocino e Planejamento</a:t>
+              </a:r>
+            </a:p>
+          </p:txBody>
+        </p:sp>
+      </p:grpSp>
+    </p:spTree>
+    <p:extLst>
+      <p:ext uri="{BB962C8B-B14F-4D97-AF65-F5344CB8AC3E}">
+        <p14:creationId xmlns:p14="http://schemas.microsoft.com/office/powerpoint/2010/main" val="2656687537"/>
+      </p:ext>
+    </p:extLst>
+  </p:cSld>
+  <p:clrMapOvr>
+    <a:masterClrMapping/>
+  </p:clrMapOvr>
+</p:sld>
+</file>
+
+<file path=ppt/slides/slide30.xml><?xml version="1.0" encoding="utf-8"?>
 <p:sld xmlns:a="http://schemas.openxmlformats.org/drawingml/2006/main" xmlns:r="http://schemas.openxmlformats.org/officeDocument/2006/relationships" xmlns:p="http://schemas.openxmlformats.org/presentationml/2006/main">
   <p:cSld>
     <p:spTree>
@@ -19116,7 +22924,7 @@
 </p:sld>
 </file>
 
-<file path=ppt/slides/slide26.xml><?xml version="1.0" encoding="utf-8"?>
+<file path=ppt/slides/slide31.xml><?xml version="1.0" encoding="utf-8"?>
 <p:sld xmlns:a="http://schemas.openxmlformats.org/drawingml/2006/main" xmlns:r="http://schemas.openxmlformats.org/officeDocument/2006/relationships" xmlns:p="http://schemas.openxmlformats.org/presentationml/2006/main">
   <p:cSld>
     <p:spTree>
@@ -19202,7 +23010,7 @@
 </p:sld>
 </file>
 
-<file path=ppt/slides/slide27.xml><?xml version="1.0" encoding="utf-8"?>
+<file path=ppt/slides/slide32.xml><?xml version="1.0" encoding="utf-8"?>
 <p:sld xmlns:a="http://schemas.openxmlformats.org/drawingml/2006/main" xmlns:r="http://schemas.openxmlformats.org/officeDocument/2006/relationships" xmlns:p="http://schemas.openxmlformats.org/presentationml/2006/main">
   <p:cSld>
     <p:spTree>
@@ -19476,8 +23284,8 @@
             </a:p>
           </p:txBody>
         </p:sp>
-        <mc:AlternateContent xmlns:mc="http://schemas.openxmlformats.org/markup-compatibility/2006">
-          <mc:Choice xmlns:a14="http://schemas.microsoft.com/office/drawing/2010/main" Requires="a14">
+        <mc:AlternateContent xmlns:mc="http://schemas.openxmlformats.org/markup-compatibility/2006" xmlns:a14="http://schemas.microsoft.com/office/drawing/2010/main">
+          <mc:Choice Requires="a14">
             <p:sp>
               <p:nvSpPr>
                 <p:cNvPr id="9" name="CaixaDeTexto 8">
@@ -19527,7 +23335,7 @@
               </p:txBody>
             </p:sp>
           </mc:Choice>
-          <mc:Fallback>
+          <mc:Fallback xmlns="">
             <p:sp>
               <p:nvSpPr>
                 <p:cNvPr id="9" name="CaixaDeTexto 8">
@@ -20063,12 +23871,18 @@
 </p:sld>
 </file>
 
-<file path=ppt/slides/slide3.xml><?xml version="1.0" encoding="utf-8"?>
+<file path=ppt/slides/slide4.xml><?xml version="1.0" encoding="utf-8"?>
 <p:sld xmlns:a="http://schemas.openxmlformats.org/drawingml/2006/main" xmlns:r="http://schemas.openxmlformats.org/officeDocument/2006/relationships" xmlns:p="http://schemas.openxmlformats.org/presentationml/2006/main">
   <p:cSld>
     <p:spTree>
       <p:nvGrpSpPr>
-        <p:cNvPr id="1" name=""/>
+        <p:cNvPr id="1" name="">
+          <a:extLst>
+            <a:ext uri="{FF2B5EF4-FFF2-40B4-BE49-F238E27FC236}">
+              <a16:creationId xmlns:a16="http://schemas.microsoft.com/office/drawing/2014/main" id="{06F16F85-0F7F-5753-B956-73E7B07ECFB9}"/>
+            </a:ext>
+          </a:extLst>
+        </p:cNvPr>
         <p:cNvGrpSpPr/>
         <p:nvPr/>
       </p:nvGrpSpPr>
@@ -20082,7 +23896,13 @@
       </p:grpSpPr>
       <p:sp>
         <p:nvSpPr>
-          <p:cNvPr id="2" name="Título 1"/>
+          <p:cNvPr id="2" name="Título 1">
+            <a:extLst>
+              <a:ext uri="{FF2B5EF4-FFF2-40B4-BE49-F238E27FC236}">
+                <a16:creationId xmlns:a16="http://schemas.microsoft.com/office/drawing/2014/main" id="{49EBACC2-E15E-F38F-B754-914CE542957F}"/>
+              </a:ext>
+            </a:extLst>
+          </p:cNvPr>
           <p:cNvSpPr>
             <a:spLocks noGrp="1"/>
           </p:cNvSpPr>
@@ -20105,7 +23925,13 @@
       </p:sp>
       <p:sp>
         <p:nvSpPr>
-          <p:cNvPr id="3" name="Espaço Reservado para Conteúdo 2"/>
+          <p:cNvPr id="3" name="Espaço Reservado para Conteúdo 2">
+            <a:extLst>
+              <a:ext uri="{FF2B5EF4-FFF2-40B4-BE49-F238E27FC236}">
+                <a16:creationId xmlns:a16="http://schemas.microsoft.com/office/drawing/2014/main" id="{5DF84E31-195A-D5BB-1FFD-C642029E34C4}"/>
+              </a:ext>
+            </a:extLst>
+          </p:cNvPr>
           <p:cNvSpPr>
             <a:spLocks noGrp="1"/>
           </p:cNvSpPr>
@@ -20115,56 +23941,15 @@
         </p:nvSpPr>
         <p:spPr>
           <a:xfrm>
-            <a:off x="838201" y="1825624"/>
-            <a:ext cx="8427219" cy="5032376"/>
+            <a:off x="4599708" y="1825624"/>
+            <a:ext cx="7435273" cy="5032376"/>
           </a:xfrm>
         </p:spPr>
         <p:txBody>
           <a:bodyPr>
-            <a:normAutofit lnSpcReduction="10000"/>
+            <a:normAutofit/>
           </a:bodyPr>
           <a:lstStyle/>
-          <a:p>
-            <a:r>
-              <a:rPr lang="pt-BR" dirty="0"/>
-              <a:t>É uma das subáreas da inteligência artificial.</a:t>
-            </a:r>
-          </a:p>
-          <a:p>
-            <a:r>
-              <a:rPr lang="pt-BR" dirty="0"/>
-              <a:t>O termo foi cunhado em 1959, pelo cientista da computação Arthur Samuel, que o definiu como o </a:t>
-            </a:r>
-          </a:p>
-          <a:p>
-            <a:pPr marL="0" indent="0" algn="ctr">
-              <a:buNone/>
-            </a:pPr>
-            <a:r>
-              <a:rPr lang="pt-BR" dirty="0"/>
-              <a:t>“</a:t>
-            </a:r>
-            <a:r>
-              <a:rPr lang="pt-BR" i="1" dirty="0"/>
-              <a:t>Campo de estudo que dá aos computadores a habilidade de </a:t>
-            </a:r>
-            <a:r>
-              <a:rPr lang="pt-BR" b="1" i="1" dirty="0">
-                <a:solidFill>
-                  <a:srgbClr val="00B0F0"/>
-                </a:solidFill>
-              </a:rPr>
-              <a:t>aprender sem serem explicitamente programados</a:t>
-            </a:r>
-            <a:r>
-              <a:rPr lang="pt-BR" b="1" i="1" dirty="0"/>
-              <a:t>.</a:t>
-            </a:r>
-            <a:r>
-              <a:rPr lang="pt-BR" dirty="0"/>
-              <a:t>”</a:t>
-            </a:r>
-          </a:p>
           <a:p>
             <a:r>
               <a:rPr lang="pt-BR" dirty="0"/>
@@ -20240,7 +24025,7 @@
       </p:sp>
       <p:pic>
         <p:nvPicPr>
-          <p:cNvPr id="4" name="Picture 2" descr="https://www.oulu.fi/sites/default/files/11/machines%20_decide.jpg">
+          <p:cNvPr id="7" name="Picture 2" descr="https://www.oulu.fi/sites/default/files/11/machines%20_decide.jpg">
             <a:extLst>
               <a:ext uri="{FF2B5EF4-FFF2-40B4-BE49-F238E27FC236}">
                 <a16:creationId xmlns:a16="http://schemas.microsoft.com/office/drawing/2014/main" id="{6B8DD7A2-43EE-406C-8FF3-BC9A04CF3BD4}"/>
@@ -20267,7 +24052,7 @@
         </p:blipFill>
         <p:spPr bwMode="auto">
           <a:xfrm>
-            <a:off x="9265420" y="1955359"/>
+            <a:off x="157018" y="1825624"/>
             <a:ext cx="1915886" cy="1278009"/>
           </a:xfrm>
           <a:prstGeom prst="rect">
@@ -20287,7 +24072,7 @@
       </p:pic>
       <p:pic>
         <p:nvPicPr>
-          <p:cNvPr id="5" name="Picture 2" descr="Inteligência Artificial: 3 fatos que você precisa saber! - Coopersystem"/>
+          <p:cNvPr id="8" name="Picture 2" descr="Inteligência Artificial: 3 fatos que você precisa saber! - Coopersystem"/>
           <p:cNvPicPr>
             <a:picLocks noChangeAspect="1" noChangeArrowheads="1"/>
           </p:cNvPicPr>
@@ -20306,7 +24091,7 @@
         </p:blipFill>
         <p:spPr bwMode="auto">
           <a:xfrm>
-            <a:off x="9265420" y="5369008"/>
+            <a:off x="663276" y="3678316"/>
             <a:ext cx="2819255" cy="1205964"/>
           </a:xfrm>
           <a:prstGeom prst="rect">
@@ -20326,7 +24111,7 @@
       </p:pic>
       <p:pic>
         <p:nvPicPr>
-          <p:cNvPr id="6" name="Picture 8" descr="Image result for applications of artificial intelligence">
+          <p:cNvPr id="9" name="Picture 8" descr="Image result for applications of artificial intelligence">
             <a:extLst>
               <a:ext uri="{FF2B5EF4-FFF2-40B4-BE49-F238E27FC236}">
                 <a16:creationId xmlns:a16="http://schemas.microsoft.com/office/drawing/2014/main" id="{030E6182-967A-44D7-8BED-F8E414DAE678}"/>
@@ -20353,7 +24138,7 @@
         </p:blipFill>
         <p:spPr bwMode="auto">
           <a:xfrm>
-            <a:off x="9663446" y="328439"/>
+            <a:off x="2072904" y="1934765"/>
             <a:ext cx="2421229" cy="1361941"/>
           </a:xfrm>
           <a:prstGeom prst="rect">
@@ -20373,7 +24158,7 @@
       </p:pic>
       <p:pic>
         <p:nvPicPr>
-          <p:cNvPr id="1026" name="Picture 2" descr="24 Top Machine Learning Applications &amp; Examples for 2023 | Built In">
+          <p:cNvPr id="10" name="Picture 2" descr="24 Top Machine Learning Applications &amp; Examples for 2023 | Built In">
             <a:extLst>
               <a:ext uri="{FF2B5EF4-FFF2-40B4-BE49-F238E27FC236}">
                 <a16:creationId xmlns:a16="http://schemas.microsoft.com/office/drawing/2014/main" id="{0EF40590-4520-4C15-5BBF-7561C78251CD}"/>
@@ -20400,7 +24185,7 @@
         </p:blipFill>
         <p:spPr bwMode="auto">
           <a:xfrm>
-            <a:off x="9730239" y="3498656"/>
+            <a:off x="1868892" y="5265890"/>
             <a:ext cx="2354436" cy="1361941"/>
           </a:xfrm>
           <a:prstGeom prst="rect">
@@ -20421,7 +24206,7 @@
     </p:spTree>
     <p:extLst>
       <p:ext uri="{BB962C8B-B14F-4D97-AF65-F5344CB8AC3E}">
-        <p14:creationId xmlns:p14="http://schemas.microsoft.com/office/powerpoint/2010/main" val="2656687537"/>
+        <p14:creationId xmlns:p14="http://schemas.microsoft.com/office/powerpoint/2010/main" val="3205145926"/>
       </p:ext>
     </p:extLst>
   </p:cSld>
@@ -20431,7 +24216,7 @@
 </p:sld>
 </file>
 
-<file path=ppt/slides/slide4.xml><?xml version="1.0" encoding="utf-8"?>
+<file path=ppt/slides/slide5.xml><?xml version="1.0" encoding="utf-8"?>
 <p:sld xmlns:a="http://schemas.openxmlformats.org/drawingml/2006/main" xmlns:r="http://schemas.openxmlformats.org/officeDocument/2006/relationships" xmlns:p="http://schemas.openxmlformats.org/presentationml/2006/main">
   <p:cSld>
     <p:spTree>
@@ -20510,11 +24295,11 @@
                   <a:srgbClr val="00B050"/>
                 </a:solidFill>
               </a:rPr>
-              <a:t>analisa um problema e cria um código </a:t>
+              <a:t>analisa um problema e cria um programa</a:t>
             </a:r>
             <a:r>
               <a:rPr lang="pt-BR" dirty="0"/>
-              <a:t>(ou programa) para resolvê-lo.</a:t>
+              <a:t> para resolvê-lo.</a:t>
             </a:r>
           </a:p>
           <a:p>
@@ -20524,7 +24309,7 @@
             </a:pPr>
             <a:r>
               <a:rPr lang="pt-BR" dirty="0"/>
-              <a:t>Código: sequência de regras que definem o comportamento do programa. </a:t>
+              <a:t>Programa: sequência de regras que definem o comportamento do programa. </a:t>
             </a:r>
           </a:p>
           <a:p>
@@ -20538,11 +24323,15 @@
                   <a:srgbClr val="00B050"/>
                 </a:solidFill>
               </a:rPr>
-              <a:t>computador recebe o código e os dados </a:t>
-            </a:r>
-            <a:r>
-              <a:rPr lang="pt-BR" dirty="0"/>
-              <a:t>(i.e., entradas), </a:t>
+              <a:t>computador recebe o </a:t>
+            </a:r>
+            <a:r>
+              <a:rPr lang="pt-BR" b="1" i="1" dirty="0">
+                <a:solidFill>
+                  <a:srgbClr val="7030A0"/>
+                </a:solidFill>
+              </a:rPr>
+              <a:t>código e os dados</a:t>
             </a:r>
             <a:r>
               <a:rPr lang="pt-BR" b="1" i="1" dirty="0">
@@ -20550,7 +24339,27 @@
                   <a:srgbClr val="00B050"/>
                 </a:solidFill>
               </a:rPr>
-              <a:t>o aplica aos dados e retorna os valores de saída</a:t>
+              <a:t> </a:t>
+            </a:r>
+            <a:r>
+              <a:rPr lang="pt-BR" dirty="0"/>
+              <a:t>(i.e., entradas), </a:t>
+            </a:r>
+            <a:r>
+              <a:rPr lang="pt-BR" b="1" i="1" dirty="0">
+                <a:solidFill>
+                  <a:srgbClr val="00B050"/>
+                </a:solidFill>
+              </a:rPr>
+              <a:t>o aplica aos dados e </a:t>
+            </a:r>
+            <a:r>
+              <a:rPr lang="pt-BR" b="1" i="1" dirty="0">
+                <a:solidFill>
+                  <a:schemeClr val="accent1"/>
+                </a:solidFill>
+              </a:rPr>
+              <a:t>retorna os valores de saída</a:t>
             </a:r>
             <a:r>
               <a:rPr lang="pt-BR" dirty="0"/>
@@ -21478,7 +25287,7 @@
 </p:sld>
 </file>
 
-<file path=ppt/slides/slide5.xml><?xml version="1.0" encoding="utf-8"?>
+<file path=ppt/slides/slide6.xml><?xml version="1.0" encoding="utf-8"?>
 <p:sld xmlns:a="http://schemas.openxmlformats.org/drawingml/2006/main" xmlns:r="http://schemas.openxmlformats.org/officeDocument/2006/relationships" xmlns:p="http://schemas.openxmlformats.org/presentationml/2006/main">
   <p:cSld>
     <p:spTree>
@@ -21558,10 +25367,18 @@
             <a:r>
               <a:rPr lang="pt-BR" b="1" i="1" dirty="0">
                 <a:solidFill>
+                  <a:schemeClr val="accent1"/>
+                </a:solidFill>
+              </a:rPr>
+              <a:t>mapeiam</a:t>
+            </a:r>
+            <a:r>
+              <a:rPr lang="pt-BR" b="1" i="1" dirty="0">
+                <a:solidFill>
                   <a:srgbClr val="00B050"/>
                 </a:solidFill>
               </a:rPr>
-              <a:t>mapeiam as entradas nas saídas</a:t>
+              <a:t> as entradas nas saídas</a:t>
             </a:r>
             <a:r>
               <a:rPr lang="pt-BR" dirty="0"/>
@@ -22489,7 +26306,7 @@
 </p:sld>
 </file>
 
-<file path=ppt/slides/slide6.xml><?xml version="1.0" encoding="utf-8"?>
+<file path=ppt/slides/slide7.xml><?xml version="1.0" encoding="utf-8"?>
 <p:sld xmlns:a="http://schemas.openxmlformats.org/drawingml/2006/main" xmlns:r="http://schemas.openxmlformats.org/officeDocument/2006/relationships" xmlns:p="http://schemas.openxmlformats.org/presentationml/2006/main">
   <p:cSld>
     <p:spTree>
@@ -22552,7 +26369,7 @@
           <a:p>
             <a:r>
               <a:rPr lang="pt-BR" dirty="0"/>
-              <a:t>Porém, em alguns casos é muito difícil criar um código para solucionar um problema de forma geral.</a:t>
+              <a:t>Porém, em alguns casos é muito difícil criar um código para solucionar um problema de forma geral (e.g., detecção de objetos, tradução, etc.).</a:t>
             </a:r>
           </a:p>
           <a:p>
@@ -23482,7 +27299,7 @@
 </p:sld>
 </file>
 
-<file path=ppt/slides/slide7.xml><?xml version="1.0" encoding="utf-8"?>
+<file path=ppt/slides/slide8.xml><?xml version="1.0" encoding="utf-8"?>
 <p:sld xmlns:a="http://schemas.openxmlformats.org/drawingml/2006/main" xmlns:r="http://schemas.openxmlformats.org/officeDocument/2006/relationships" xmlns:p="http://schemas.openxmlformats.org/presentationml/2006/main">
   <p:cSld>
     <p:spTree>
@@ -23893,7 +27710,7 @@
 </p:sld>
 </file>
 
-<file path=ppt/slides/slide8.xml><?xml version="1.0" encoding="utf-8"?>
+<file path=ppt/slides/slide9.xml><?xml version="1.0" encoding="utf-8"?>
 <p:sld xmlns:a="http://schemas.openxmlformats.org/drawingml/2006/main" xmlns:r="http://schemas.openxmlformats.org/officeDocument/2006/relationships" xmlns:p="http://schemas.openxmlformats.org/presentationml/2006/main">
   <p:cSld>
     <p:spTree>
@@ -24128,278 +27945,6 @@
     <p:extLst>
       <p:ext uri="{BB962C8B-B14F-4D97-AF65-F5344CB8AC3E}">
         <p14:creationId xmlns:p14="http://schemas.microsoft.com/office/powerpoint/2010/main" val="2197337138"/>
-      </p:ext>
-    </p:extLst>
-  </p:cSld>
-  <p:clrMapOvr>
-    <a:masterClrMapping/>
-  </p:clrMapOvr>
-</p:sld>
-</file>
-
-<file path=ppt/slides/slide9.xml><?xml version="1.0" encoding="utf-8"?>
-<p:sld xmlns:a="http://schemas.openxmlformats.org/drawingml/2006/main" xmlns:r="http://schemas.openxmlformats.org/officeDocument/2006/relationships" xmlns:p="http://schemas.openxmlformats.org/presentationml/2006/main">
-  <p:cSld>
-    <p:spTree>
-      <p:nvGrpSpPr>
-        <p:cNvPr id="1" name=""/>
-        <p:cNvGrpSpPr/>
-        <p:nvPr/>
-      </p:nvGrpSpPr>
-      <p:grpSpPr>
-        <a:xfrm>
-          <a:off x="0" y="0"/>
-          <a:ext cx="0" cy="0"/>
-          <a:chOff x="0" y="0"/>
-          <a:chExt cx="0" cy="0"/>
-        </a:xfrm>
-      </p:grpSpPr>
-      <p:sp>
-        <p:nvSpPr>
-          <p:cNvPr id="2" name="Título 1">
-            <a:extLst>
-              <a:ext uri="{FF2B5EF4-FFF2-40B4-BE49-F238E27FC236}">
-                <a16:creationId xmlns:a16="http://schemas.microsoft.com/office/drawing/2014/main" id="{E1859D24-083B-4F12-23CB-CA788AD2D8EC}"/>
-              </a:ext>
-            </a:extLst>
-          </p:cNvPr>
-          <p:cNvSpPr>
-            <a:spLocks noGrp="1"/>
-          </p:cNvSpPr>
-          <p:nvPr>
-            <p:ph type="title"/>
-          </p:nvPr>
-        </p:nvSpPr>
-        <p:spPr/>
-        <p:txBody>
-          <a:bodyPr/>
-          <a:lstStyle/>
-          <a:p>
-            <a:r>
-              <a:rPr lang="pt-BR" dirty="0"/>
-              <a:t>Programação tradicional</a:t>
-            </a:r>
-          </a:p>
-        </p:txBody>
-      </p:sp>
-      <p:sp>
-        <p:nvSpPr>
-          <p:cNvPr id="3" name="Espaço Reservado para Conteúdo 2">
-            <a:extLst>
-              <a:ext uri="{FF2B5EF4-FFF2-40B4-BE49-F238E27FC236}">
-                <a16:creationId xmlns:a16="http://schemas.microsoft.com/office/drawing/2014/main" id="{B712A549-DCD5-9C7D-3A1F-F4CB938CF177}"/>
-              </a:ext>
-            </a:extLst>
-          </p:cNvPr>
-          <p:cNvSpPr>
-            <a:spLocks noGrp="1"/>
-          </p:cNvSpPr>
-          <p:nvPr>
-            <p:ph idx="1"/>
-          </p:nvPr>
-        </p:nvSpPr>
-        <p:spPr>
-          <a:xfrm>
-            <a:off x="7222733" y="1690688"/>
-            <a:ext cx="4900010" cy="5167312"/>
-          </a:xfrm>
-        </p:spPr>
-        <p:txBody>
-          <a:bodyPr>
-            <a:normAutofit/>
-          </a:bodyPr>
-          <a:lstStyle/>
-          <a:p>
-            <a:r>
-              <a:rPr lang="pt-BR" dirty="0"/>
-              <a:t>Além disso, vejam que as </a:t>
-            </a:r>
-            <a:r>
-              <a:rPr lang="pt-BR" b="1" i="1" dirty="0">
-                <a:solidFill>
-                  <a:srgbClr val="00B050"/>
-                </a:solidFill>
-              </a:rPr>
-              <a:t>regras</a:t>
-            </a:r>
-            <a:r>
-              <a:rPr lang="pt-BR" dirty="0"/>
-              <a:t> que criamos são bem </a:t>
-            </a:r>
-            <a:r>
-              <a:rPr lang="pt-BR" b="1" i="1" dirty="0">
-                <a:solidFill>
-                  <a:srgbClr val="00B050"/>
-                </a:solidFill>
-              </a:rPr>
-              <a:t>simples e com certeza gerariam vários erros de identificação</a:t>
-            </a:r>
-            <a:r>
-              <a:rPr lang="pt-BR" dirty="0"/>
-              <a:t>.</a:t>
-            </a:r>
-          </a:p>
-          <a:p>
-            <a:pPr lvl="1">
-              <a:buFont typeface="Wingdings" panose="05000000000000000000" pitchFamily="2" charset="2"/>
-              <a:buChar char="§"/>
-            </a:pPr>
-            <a:r>
-              <a:rPr lang="pt-BR" dirty="0"/>
-              <a:t>Por exemplo, podemos correr ladeira abaixo mais rápido do que pedalamos ladeira acima.</a:t>
-            </a:r>
-          </a:p>
-          <a:p>
-            <a:r>
-              <a:rPr lang="pt-BR" dirty="0"/>
-              <a:t>Aprendizado de máquina pode nos ajudar a resolver este problema.</a:t>
-            </a:r>
-          </a:p>
-        </p:txBody>
-      </p:sp>
-      <p:grpSp>
-        <p:nvGrpSpPr>
-          <p:cNvPr id="10" name="Agrupar 9">
-            <a:extLst>
-              <a:ext uri="{FF2B5EF4-FFF2-40B4-BE49-F238E27FC236}">
-                <a16:creationId xmlns:a16="http://schemas.microsoft.com/office/drawing/2014/main" id="{E6BE4743-3C61-AD20-5644-76B635B7F260}"/>
-              </a:ext>
-            </a:extLst>
-          </p:cNvPr>
-          <p:cNvGrpSpPr>
-            <a:grpSpLocks noChangeAspect="1"/>
-          </p:cNvGrpSpPr>
-          <p:nvPr/>
-        </p:nvGrpSpPr>
-        <p:grpSpPr>
-          <a:xfrm>
-            <a:off x="149400" y="2420042"/>
-            <a:ext cx="6833430" cy="2655392"/>
-            <a:chOff x="0" y="1672582"/>
-            <a:chExt cx="8387452" cy="3259256"/>
-          </a:xfrm>
-        </p:grpSpPr>
-        <p:pic>
-          <p:nvPicPr>
-            <p:cNvPr id="5" name="Imagem 4">
-              <a:extLst>
-                <a:ext uri="{FF2B5EF4-FFF2-40B4-BE49-F238E27FC236}">
-                  <a16:creationId xmlns:a16="http://schemas.microsoft.com/office/drawing/2014/main" id="{3DDF97E4-A0BE-B8B6-AC86-B7FD47E96CCE}"/>
-                </a:ext>
-              </a:extLst>
-            </p:cNvPr>
-            <p:cNvPicPr>
-              <a:picLocks noChangeAspect="1"/>
-            </p:cNvPicPr>
-            <p:nvPr/>
-          </p:nvPicPr>
-          <p:blipFill rotWithShape="1">
-            <a:blip r:embed="rId2"/>
-            <a:srcRect r="81786"/>
-            <a:stretch/>
-          </p:blipFill>
-          <p:spPr>
-            <a:xfrm>
-              <a:off x="0" y="1672582"/>
-              <a:ext cx="2220686" cy="3241150"/>
-            </a:xfrm>
-            <a:prstGeom prst="rect">
-              <a:avLst/>
-            </a:prstGeom>
-          </p:spPr>
-        </p:pic>
-        <p:pic>
-          <p:nvPicPr>
-            <p:cNvPr id="6" name="Imagem 5">
-              <a:extLst>
-                <a:ext uri="{FF2B5EF4-FFF2-40B4-BE49-F238E27FC236}">
-                  <a16:creationId xmlns:a16="http://schemas.microsoft.com/office/drawing/2014/main" id="{7A6EC6EF-821D-9118-6748-01EAB046CC0F}"/>
-                </a:ext>
-              </a:extLst>
-            </p:cNvPr>
-            <p:cNvPicPr>
-              <a:picLocks noChangeAspect="1"/>
-            </p:cNvPicPr>
-            <p:nvPr/>
-          </p:nvPicPr>
-          <p:blipFill rotWithShape="1">
-            <a:blip r:embed="rId2"/>
-            <a:srcRect l="89732"/>
-            <a:stretch/>
-          </p:blipFill>
-          <p:spPr>
-            <a:xfrm>
-              <a:off x="7135595" y="1672582"/>
-              <a:ext cx="1251857" cy="3241150"/>
-            </a:xfrm>
-            <a:prstGeom prst="rect">
-              <a:avLst/>
-            </a:prstGeom>
-          </p:spPr>
-        </p:pic>
-        <p:pic>
-          <p:nvPicPr>
-            <p:cNvPr id="7" name="Imagem 6">
-              <a:extLst>
-                <a:ext uri="{FF2B5EF4-FFF2-40B4-BE49-F238E27FC236}">
-                  <a16:creationId xmlns:a16="http://schemas.microsoft.com/office/drawing/2014/main" id="{3578A7AB-C96B-1A18-011E-428B8A543367}"/>
-                </a:ext>
-              </a:extLst>
-            </p:cNvPr>
-            <p:cNvPicPr>
-              <a:picLocks noChangeAspect="1"/>
-            </p:cNvPicPr>
-            <p:nvPr/>
-          </p:nvPicPr>
-          <p:blipFill rotWithShape="1">
-            <a:blip r:embed="rId2"/>
-            <a:srcRect l="31697" r="52857"/>
-            <a:stretch/>
-          </p:blipFill>
-          <p:spPr>
-            <a:xfrm>
-              <a:off x="2607132" y="1690688"/>
-              <a:ext cx="1883228" cy="3241150"/>
-            </a:xfrm>
-            <a:prstGeom prst="rect">
-              <a:avLst/>
-            </a:prstGeom>
-          </p:spPr>
-        </p:pic>
-        <p:pic>
-          <p:nvPicPr>
-            <p:cNvPr id="8" name="Imagem 7">
-              <a:extLst>
-                <a:ext uri="{FF2B5EF4-FFF2-40B4-BE49-F238E27FC236}">
-                  <a16:creationId xmlns:a16="http://schemas.microsoft.com/office/drawing/2014/main" id="{D2F08DCC-A613-B284-5DDE-3A2147E22AF5}"/>
-                </a:ext>
-              </a:extLst>
-            </p:cNvPr>
-            <p:cNvPicPr>
-              <a:picLocks noChangeAspect="1"/>
-            </p:cNvPicPr>
-            <p:nvPr/>
-          </p:nvPicPr>
-          <p:blipFill rotWithShape="1">
-            <a:blip r:embed="rId2"/>
-            <a:srcRect l="60714" r="23929"/>
-            <a:stretch/>
-          </p:blipFill>
-          <p:spPr>
-            <a:xfrm>
-              <a:off x="4876806" y="1672582"/>
-              <a:ext cx="1872343" cy="3241150"/>
-            </a:xfrm>
-            <a:prstGeom prst="rect">
-              <a:avLst/>
-            </a:prstGeom>
-          </p:spPr>
-        </p:pic>
-      </p:grpSp>
-    </p:spTree>
-    <p:extLst>
-      <p:ext uri="{BB962C8B-B14F-4D97-AF65-F5344CB8AC3E}">
-        <p14:creationId xmlns:p14="http://schemas.microsoft.com/office/powerpoint/2010/main" val="195948511"/>
       </p:ext>
     </p:extLst>
   </p:cSld>
